--- a/기획/전투 기획.pptx
+++ b/기획/전투 기획.pptx
@@ -5,10 +5,10 @@
     <p:sldMasterId id="2147483648" r:id="rId1"/>
   </p:sldMasterIdLst>
   <p:notesMasterIdLst>
-    <p:notesMasterId r:id="rId8"/>
+    <p:notesMasterId r:id="rId12"/>
   </p:notesMasterIdLst>
   <p:handoutMasterIdLst>
-    <p:handoutMasterId r:id="rId9"/>
+    <p:handoutMasterId r:id="rId13"/>
   </p:handoutMasterIdLst>
   <p:sldIdLst>
     <p:sldId id="256" r:id="rId2"/>
@@ -17,6 +17,10 @@
     <p:sldId id="284" r:id="rId5"/>
     <p:sldId id="282" r:id="rId6"/>
     <p:sldId id="283" r:id="rId7"/>
+    <p:sldId id="285" r:id="rId8"/>
+    <p:sldId id="286" r:id="rId9"/>
+    <p:sldId id="288" r:id="rId10"/>
+    <p:sldId id="289" r:id="rId11"/>
   </p:sldIdLst>
   <p:sldSz cx="12192000" cy="6858000"/>
   <p:notesSz cx="6858000" cy="9144000"/>
@@ -140,7 +144,7 @@
 <file path=ppt/revisionInfo.xml><?xml version="1.0" encoding="utf-8"?>
 <p1510:revInfo xmlns:a="http://schemas.openxmlformats.org/drawingml/2006/main" xmlns:r="http://schemas.openxmlformats.org/officeDocument/2006/relationships" xmlns:p1510="http://schemas.microsoft.com/office/powerpoint/2015/10/main">
   <p1510:revLst>
-    <p1510:client id="{AAB3B7F1-1C79-4B50-AF11-34D2A72CFC60}" v="81" dt="2025-09-16T19:16:08.320"/>
+    <p1510:client id="{FE61F69A-2165-4919-AA1F-483684562680}" v="16" dt="2025-09-28T09:41:47.191"/>
   </p1510:revLst>
 </p1510:revInfo>
 </file>
@@ -265,68 +269,12 @@
             <ac:spMk id="4" creationId="{A65BED05-43EC-C289-3A55-8A21041F8B8B}"/>
           </ac:spMkLst>
         </pc:spChg>
-        <pc:spChg chg="add">
-          <ac:chgData name="이하나 윤" userId="f658f17427b35de9" providerId="LiveId" clId="{EE219EC4-0B48-4DAA-B6C8-F5305E865B87}" dt="2025-09-15T19:26:06.325" v="1111"/>
-          <ac:spMkLst>
-            <pc:docMk/>
-            <pc:sldMk cId="2467931347" sldId="280"/>
-            <ac:spMk id="6" creationId="{A37736E2-1181-F0A1-8B82-58C5E2D14207}"/>
-          </ac:spMkLst>
-        </pc:spChg>
-        <pc:spChg chg="add del">
-          <ac:chgData name="이하나 윤" userId="f658f17427b35de9" providerId="LiveId" clId="{EE219EC4-0B48-4DAA-B6C8-F5305E865B87}" dt="2025-09-16T19:08:50.049" v="2632" actId="478"/>
-          <ac:spMkLst>
-            <pc:docMk/>
-            <pc:sldMk cId="2467931347" sldId="280"/>
-            <ac:spMk id="15" creationId="{292DB9EB-59EE-CF26-8098-A8763190D77F}"/>
-          </ac:spMkLst>
-        </pc:spChg>
-        <pc:spChg chg="add">
-          <ac:chgData name="이하나 윤" userId="f658f17427b35de9" providerId="LiveId" clId="{EE219EC4-0B48-4DAA-B6C8-F5305E865B87}" dt="2025-09-16T19:09:03.584" v="2633"/>
-          <ac:spMkLst>
-            <pc:docMk/>
-            <pc:sldMk cId="2467931347" sldId="280"/>
-            <ac:spMk id="16" creationId="{1D70D79E-B75F-866C-9A1C-7B3471E948A0}"/>
-          </ac:spMkLst>
-        </pc:spChg>
-        <pc:picChg chg="add del mod">
-          <ac:chgData name="이하나 윤" userId="f658f17427b35de9" providerId="LiveId" clId="{EE219EC4-0B48-4DAA-B6C8-F5305E865B87}" dt="2025-09-16T19:03:22.702" v="2630" actId="21"/>
-          <ac:picMkLst>
-            <pc:docMk/>
-            <pc:sldMk cId="2467931347" sldId="280"/>
-            <ac:picMk id="7" creationId="{89ECD4EE-AD44-ADEA-5BAC-566D08D761DB}"/>
-          </ac:picMkLst>
-        </pc:picChg>
         <pc:picChg chg="add mod ord">
           <ac:chgData name="이하나 윤" userId="f658f17427b35de9" providerId="LiveId" clId="{EE219EC4-0B48-4DAA-B6C8-F5305E865B87}" dt="2025-09-16T19:11:36.516" v="2687" actId="1076"/>
           <ac:picMkLst>
             <pc:docMk/>
             <pc:sldMk cId="2467931347" sldId="280"/>
             <ac:picMk id="8" creationId="{934DF991-C79E-EEB8-D132-8F188CF79091}"/>
-          </ac:picMkLst>
-        </pc:picChg>
-        <pc:picChg chg="add del mod">
-          <ac:chgData name="이하나 윤" userId="f658f17427b35de9" providerId="LiveId" clId="{EE219EC4-0B48-4DAA-B6C8-F5305E865B87}" dt="2025-09-16T19:03:22.702" v="2630" actId="21"/>
-          <ac:picMkLst>
-            <pc:docMk/>
-            <pc:sldMk cId="2467931347" sldId="280"/>
-            <ac:picMk id="10" creationId="{A9918374-768B-53FB-9A15-CFA8DA5151C0}"/>
-          </ac:picMkLst>
-        </pc:picChg>
-        <pc:picChg chg="add del mod ord">
-          <ac:chgData name="이하나 윤" userId="f658f17427b35de9" providerId="LiveId" clId="{EE219EC4-0B48-4DAA-B6C8-F5305E865B87}" dt="2025-09-16T19:03:22.702" v="2630" actId="21"/>
-          <ac:picMkLst>
-            <pc:docMk/>
-            <pc:sldMk cId="2467931347" sldId="280"/>
-            <ac:picMk id="11" creationId="{339117FA-53FD-6EEB-9FD7-27AA987C39A8}"/>
-          </ac:picMkLst>
-        </pc:picChg>
-        <pc:picChg chg="add del mod">
-          <ac:chgData name="이하나 윤" userId="f658f17427b35de9" providerId="LiveId" clId="{EE219EC4-0B48-4DAA-B6C8-F5305E865B87}" dt="2025-09-16T19:03:20.493" v="2629" actId="21"/>
-          <ac:picMkLst>
-            <pc:docMk/>
-            <pc:sldMk cId="2467931347" sldId="280"/>
-            <ac:picMk id="14" creationId="{83C659EC-4F2D-186A-F876-5F7EF0F5AE7A}"/>
           </ac:picMkLst>
         </pc:picChg>
         <pc:picChg chg="add mod">
@@ -337,14 +285,6 @@
             <ac:picMk id="18" creationId="{D31DD244-90B0-98A4-ACD7-91DBACE07F05}"/>
           </ac:picMkLst>
         </pc:picChg>
-        <pc:cxnChg chg="add del mod ord">
-          <ac:chgData name="이하나 윤" userId="f658f17427b35de9" providerId="LiveId" clId="{EE219EC4-0B48-4DAA-B6C8-F5305E865B87}" dt="2025-09-16T19:03:22.702" v="2630" actId="21"/>
-          <ac:cxnSpMkLst>
-            <pc:docMk/>
-            <pc:sldMk cId="2467931347" sldId="280"/>
-            <ac:cxnSpMk id="13" creationId="{83115BCF-51E8-20F7-29BD-E72B270B15C1}"/>
-          </ac:cxnSpMkLst>
-        </pc:cxnChg>
       </pc:sldChg>
       <pc:sldChg chg="add del">
         <pc:chgData name="이하나 윤" userId="f658f17427b35de9" providerId="LiveId" clId="{EE219EC4-0B48-4DAA-B6C8-F5305E865B87}" dt="2025-09-15T18:24:05.060" v="713" actId="47"/>
@@ -398,14 +338,6 @@
           <pc:docMk/>
           <pc:sldMk cId="1852330910" sldId="282"/>
         </pc:sldMkLst>
-        <pc:spChg chg="mod">
-          <ac:chgData name="이하나 윤" userId="f658f17427b35de9" providerId="LiveId" clId="{EE219EC4-0B48-4DAA-B6C8-F5305E865B87}" dt="2025-09-15T18:20:06.236" v="710" actId="20577"/>
-          <ac:spMkLst>
-            <pc:docMk/>
-            <pc:sldMk cId="1852330910" sldId="282"/>
-            <ac:spMk id="4" creationId="{E9E7D8F7-967C-0A4D-483D-D75DE0218608}"/>
-          </ac:spMkLst>
-        </pc:spChg>
       </pc:sldChg>
       <pc:sldChg chg="addSp delSp modSp add mod modNotesTx">
         <pc:chgData name="이하나 윤" userId="f658f17427b35de9" providerId="LiveId" clId="{EE219EC4-0B48-4DAA-B6C8-F5305E865B87}" dt="2025-09-16T19:15:48.827" v="2713" actId="167"/>
@@ -419,14 +351,6 @@
             <pc:docMk/>
             <pc:sldMk cId="341395478" sldId="283"/>
             <ac:spMk id="4" creationId="{8B5E24BD-4D2E-7D2C-C488-EBBD442C4AD2}"/>
-          </ac:spMkLst>
-        </pc:spChg>
-        <pc:spChg chg="add del mod">
-          <ac:chgData name="이하나 윤" userId="f658f17427b35de9" providerId="LiveId" clId="{EE219EC4-0B48-4DAA-B6C8-F5305E865B87}" dt="2025-09-16T16:23:22.213" v="2306" actId="478"/>
-          <ac:spMkLst>
-            <pc:docMk/>
-            <pc:sldMk cId="341395478" sldId="283"/>
-            <ac:spMk id="6" creationId="{AB9BA06E-3724-C1A0-B65F-E7D662BA0880}"/>
           </ac:spMkLst>
         </pc:spChg>
         <pc:picChg chg="add mod ord">
@@ -453,14 +377,6 @@
             <ac:picMk id="11" creationId="{5F582FEE-6B42-4CD3-B919-B911F5215CE1}"/>
           </ac:picMkLst>
         </pc:picChg>
-        <pc:picChg chg="del">
-          <ac:chgData name="이하나 윤" userId="f658f17427b35de9" providerId="LiveId" clId="{EE219EC4-0B48-4DAA-B6C8-F5305E865B87}" dt="2025-09-15T19:35:00.704" v="1161" actId="478"/>
-          <ac:picMkLst>
-            <pc:docMk/>
-            <pc:sldMk cId="341395478" sldId="283"/>
-            <ac:picMk id="1026" creationId="{C31E36F9-C6DA-EC73-91E0-F8F20322E5B4}"/>
-          </ac:picMkLst>
-        </pc:picChg>
       </pc:sldChg>
       <pc:sldChg chg="modSp add mod">
         <pc:chgData name="이하나 윤" userId="f658f17427b35de9" providerId="LiveId" clId="{EE219EC4-0B48-4DAA-B6C8-F5305E865B87}" dt="2025-09-16T18:59:09.049" v="2593" actId="20577"/>
@@ -476,6 +392,411 @@
             <ac:spMk id="4" creationId="{DEADCFFD-643A-E027-52D4-B3D607DE4A1A}"/>
           </ac:spMkLst>
         </pc:spChg>
+      </pc:sldChg>
+    </pc:docChg>
+  </pc:docChgLst>
+  <pc:docChgLst>
+    <pc:chgData name="이하나 윤" userId="f658f17427b35de9" providerId="LiveId" clId="{E9838EAF-D27B-40BD-973C-B669816E3ACD}"/>
+    <pc:docChg chg="undo redo custSel addSld delSld modSld sldOrd">
+      <pc:chgData name="이하나 윤" userId="f658f17427b35de9" providerId="LiveId" clId="{E9838EAF-D27B-40BD-973C-B669816E3ACD}" dt="2025-09-28T09:43:28.823" v="1366" actId="20577"/>
+      <pc:docMkLst>
+        <pc:docMk/>
+      </pc:docMkLst>
+      <pc:sldChg chg="modSp mod">
+        <pc:chgData name="이하나 윤" userId="f658f17427b35de9" providerId="LiveId" clId="{E9838EAF-D27B-40BD-973C-B669816E3ACD}" dt="2025-09-28T07:08:15.861" v="33" actId="20577"/>
+        <pc:sldMkLst>
+          <pc:docMk/>
+          <pc:sldMk cId="695329364" sldId="256"/>
+        </pc:sldMkLst>
+        <pc:spChg chg="mod">
+          <ac:chgData name="이하나 윤" userId="f658f17427b35de9" providerId="LiveId" clId="{E9838EAF-D27B-40BD-973C-B669816E3ACD}" dt="2025-09-28T07:08:15.861" v="33" actId="20577"/>
+          <ac:spMkLst>
+            <pc:docMk/>
+            <pc:sldMk cId="695329364" sldId="256"/>
+            <ac:spMk id="3" creationId="{F2DB0B14-7B93-035D-6893-C7A5FA5E3A1F}"/>
+          </ac:spMkLst>
+        </pc:spChg>
+        <pc:spChg chg="mod">
+          <ac:chgData name="이하나 윤" userId="f658f17427b35de9" providerId="LiveId" clId="{E9838EAF-D27B-40BD-973C-B669816E3ACD}" dt="2025-09-28T07:06:59.146" v="4" actId="20577"/>
+          <ac:spMkLst>
+            <pc:docMk/>
+            <pc:sldMk cId="695329364" sldId="256"/>
+            <ac:spMk id="4" creationId="{77A1A4CF-75CA-73D9-FBFB-9F192FB89E8E}"/>
+          </ac:spMkLst>
+        </pc:spChg>
+      </pc:sldChg>
+      <pc:sldChg chg="modSp mod">
+        <pc:chgData name="이하나 윤" userId="f658f17427b35de9" providerId="LiveId" clId="{E9838EAF-D27B-40BD-973C-B669816E3ACD}" dt="2025-09-28T08:13:44.107" v="1024" actId="20577"/>
+        <pc:sldMkLst>
+          <pc:docMk/>
+          <pc:sldMk cId="1843325994" sldId="257"/>
+        </pc:sldMkLst>
+        <pc:spChg chg="mod">
+          <ac:chgData name="이하나 윤" userId="f658f17427b35de9" providerId="LiveId" clId="{E9838EAF-D27B-40BD-973C-B669816E3ACD}" dt="2025-09-28T08:13:44.107" v="1024" actId="20577"/>
+          <ac:spMkLst>
+            <pc:docMk/>
+            <pc:sldMk cId="1843325994" sldId="257"/>
+            <ac:spMk id="4" creationId="{566C19CA-242E-6D40-AE00-592C2404271D}"/>
+          </ac:spMkLst>
+        </pc:spChg>
+      </pc:sldChg>
+      <pc:sldChg chg="modSp mod">
+        <pc:chgData name="이하나 윤" userId="f658f17427b35de9" providerId="LiveId" clId="{E9838EAF-D27B-40BD-973C-B669816E3ACD}" dt="2025-09-28T07:33:59.088" v="287" actId="20577"/>
+        <pc:sldMkLst>
+          <pc:docMk/>
+          <pc:sldMk cId="2467931347" sldId="280"/>
+        </pc:sldMkLst>
+        <pc:spChg chg="mod">
+          <ac:chgData name="이하나 윤" userId="f658f17427b35de9" providerId="LiveId" clId="{E9838EAF-D27B-40BD-973C-B669816E3ACD}" dt="2025-09-28T07:33:59.088" v="287" actId="20577"/>
+          <ac:spMkLst>
+            <pc:docMk/>
+            <pc:sldMk cId="2467931347" sldId="280"/>
+            <ac:spMk id="4" creationId="{A65BED05-43EC-C289-3A55-8A21041F8B8B}"/>
+          </ac:spMkLst>
+        </pc:spChg>
+      </pc:sldChg>
+      <pc:sldChg chg="modSp mod">
+        <pc:chgData name="이하나 윤" userId="f658f17427b35de9" providerId="LiveId" clId="{E9838EAF-D27B-40BD-973C-B669816E3ACD}" dt="2025-09-28T07:34:06.269" v="306" actId="20577"/>
+        <pc:sldMkLst>
+          <pc:docMk/>
+          <pc:sldMk cId="1508756470" sldId="282"/>
+        </pc:sldMkLst>
+        <pc:spChg chg="mod">
+          <ac:chgData name="이하나 윤" userId="f658f17427b35de9" providerId="LiveId" clId="{E9838EAF-D27B-40BD-973C-B669816E3ACD}" dt="2025-09-28T07:34:06.269" v="306" actId="20577"/>
+          <ac:spMkLst>
+            <pc:docMk/>
+            <pc:sldMk cId="1508756470" sldId="282"/>
+            <ac:spMk id="4" creationId="{0E71D581-27EE-8AD4-573D-997E70EC9BFC}"/>
+          </ac:spMkLst>
+        </pc:spChg>
+      </pc:sldChg>
+      <pc:sldChg chg="modSp mod">
+        <pc:chgData name="이하나 윤" userId="f658f17427b35de9" providerId="LiveId" clId="{E9838EAF-D27B-40BD-973C-B669816E3ACD}" dt="2025-09-28T07:34:12.083" v="325" actId="20577"/>
+        <pc:sldMkLst>
+          <pc:docMk/>
+          <pc:sldMk cId="341395478" sldId="283"/>
+        </pc:sldMkLst>
+        <pc:spChg chg="mod">
+          <ac:chgData name="이하나 윤" userId="f658f17427b35de9" providerId="LiveId" clId="{E9838EAF-D27B-40BD-973C-B669816E3ACD}" dt="2025-09-28T07:34:12.083" v="325" actId="20577"/>
+          <ac:spMkLst>
+            <pc:docMk/>
+            <pc:sldMk cId="341395478" sldId="283"/>
+            <ac:spMk id="4" creationId="{8B5E24BD-4D2E-7D2C-C488-EBBD442C4AD2}"/>
+          </ac:spMkLst>
+        </pc:spChg>
+      </pc:sldChg>
+      <pc:sldChg chg="modSp mod">
+        <pc:chgData name="이하나 윤" userId="f658f17427b35de9" providerId="LiveId" clId="{E9838EAF-D27B-40BD-973C-B669816E3ACD}" dt="2025-09-28T07:33:49.712" v="259" actId="20577"/>
+        <pc:sldMkLst>
+          <pc:docMk/>
+          <pc:sldMk cId="1852283351" sldId="284"/>
+        </pc:sldMkLst>
+        <pc:spChg chg="mod">
+          <ac:chgData name="이하나 윤" userId="f658f17427b35de9" providerId="LiveId" clId="{E9838EAF-D27B-40BD-973C-B669816E3ACD}" dt="2025-09-28T07:33:49.712" v="259" actId="20577"/>
+          <ac:spMkLst>
+            <pc:docMk/>
+            <pc:sldMk cId="1852283351" sldId="284"/>
+            <ac:spMk id="4" creationId="{DEADCFFD-643A-E027-52D4-B3D607DE4A1A}"/>
+          </ac:spMkLst>
+        </pc:spChg>
+      </pc:sldChg>
+      <pc:sldChg chg="addSp modSp new mod ord">
+        <pc:chgData name="이하나 윤" userId="f658f17427b35de9" providerId="LiveId" clId="{E9838EAF-D27B-40BD-973C-B669816E3ACD}" dt="2025-09-28T08:12:55.503" v="1009" actId="207"/>
+        <pc:sldMkLst>
+          <pc:docMk/>
+          <pc:sldMk cId="3387152185" sldId="285"/>
+        </pc:sldMkLst>
+        <pc:spChg chg="mod">
+          <ac:chgData name="이하나 윤" userId="f658f17427b35de9" providerId="LiveId" clId="{E9838EAF-D27B-40BD-973C-B669816E3ACD}" dt="2025-09-28T08:01:21.695" v="825" actId="113"/>
+          <ac:spMkLst>
+            <pc:docMk/>
+            <pc:sldMk cId="3387152185" sldId="285"/>
+            <ac:spMk id="2" creationId="{A505DC85-97EC-3C15-BF84-A0EF7476D8A7}"/>
+          </ac:spMkLst>
+        </pc:spChg>
+        <pc:spChg chg="mod">
+          <ac:chgData name="이하나 윤" userId="f658f17427b35de9" providerId="LiveId" clId="{E9838EAF-D27B-40BD-973C-B669816E3ACD}" dt="2025-09-28T07:12:21.559" v="112"/>
+          <ac:spMkLst>
+            <pc:docMk/>
+            <pc:sldMk cId="3387152185" sldId="285"/>
+            <ac:spMk id="3" creationId="{42D5F7D5-9A32-C9CB-26C1-9174544DFC93}"/>
+          </ac:spMkLst>
+        </pc:spChg>
+        <pc:spChg chg="mod">
+          <ac:chgData name="이하나 윤" userId="f658f17427b35de9" providerId="LiveId" clId="{E9838EAF-D27B-40BD-973C-B669816E3ACD}" dt="2025-09-28T07:35:17.616" v="386" actId="20577"/>
+          <ac:spMkLst>
+            <pc:docMk/>
+            <pc:sldMk cId="3387152185" sldId="285"/>
+            <ac:spMk id="4" creationId="{79913FB2-72E7-61AC-16CD-8C20E73AAAEE}"/>
+          </ac:spMkLst>
+        </pc:spChg>
+        <pc:graphicFrameChg chg="add mod modGraphic">
+          <ac:chgData name="이하나 윤" userId="f658f17427b35de9" providerId="LiveId" clId="{E9838EAF-D27B-40BD-973C-B669816E3ACD}" dt="2025-09-28T08:12:55.503" v="1009" actId="207"/>
+          <ac:graphicFrameMkLst>
+            <pc:docMk/>
+            <pc:sldMk cId="3387152185" sldId="285"/>
+            <ac:graphicFrameMk id="6" creationId="{DCF701A9-572B-D7F3-874E-C77C002B7781}"/>
+          </ac:graphicFrameMkLst>
+        </pc:graphicFrameChg>
+      </pc:sldChg>
+      <pc:sldChg chg="addSp delSp modSp new mod">
+        <pc:chgData name="이하나 윤" userId="f658f17427b35de9" providerId="LiveId" clId="{E9838EAF-D27B-40BD-973C-B669816E3ACD}" dt="2025-09-28T08:32:07.035" v="1055" actId="1076"/>
+        <pc:sldMkLst>
+          <pc:docMk/>
+          <pc:sldMk cId="3654646454" sldId="286"/>
+        </pc:sldMkLst>
+        <pc:spChg chg="mod">
+          <ac:chgData name="이하나 윤" userId="f658f17427b35de9" providerId="LiveId" clId="{E9838EAF-D27B-40BD-973C-B669816E3ACD}" dt="2025-09-28T08:13:38.605" v="1020" actId="113"/>
+          <ac:spMkLst>
+            <pc:docMk/>
+            <pc:sldMk cId="3654646454" sldId="286"/>
+            <ac:spMk id="2" creationId="{FAA54CC2-59AB-0E80-3695-A9D923BB04AC}"/>
+          </ac:spMkLst>
+        </pc:spChg>
+        <pc:spChg chg="mod">
+          <ac:chgData name="이하나 윤" userId="f658f17427b35de9" providerId="LiveId" clId="{E9838EAF-D27B-40BD-973C-B669816E3ACD}" dt="2025-09-28T07:11:49.237" v="101" actId="20577"/>
+          <ac:spMkLst>
+            <pc:docMk/>
+            <pc:sldMk cId="3654646454" sldId="286"/>
+            <ac:spMk id="3" creationId="{02315CFE-E06C-070F-2D5C-4B65B4BA4C52}"/>
+          </ac:spMkLst>
+        </pc:spChg>
+        <pc:spChg chg="mod">
+          <ac:chgData name="이하나 윤" userId="f658f17427b35de9" providerId="LiveId" clId="{E9838EAF-D27B-40BD-973C-B669816E3ACD}" dt="2025-09-28T07:12:36.258" v="114"/>
+          <ac:spMkLst>
+            <pc:docMk/>
+            <pc:sldMk cId="3654646454" sldId="286"/>
+            <ac:spMk id="4" creationId="{35A0BB1C-32DD-7B4F-2286-F3A98C04D97A}"/>
+          </ac:spMkLst>
+        </pc:spChg>
+        <pc:spChg chg="add del mod">
+          <ac:chgData name="이하나 윤" userId="f658f17427b35de9" providerId="LiveId" clId="{E9838EAF-D27B-40BD-973C-B669816E3ACD}" dt="2025-09-28T08:09:07.717" v="959" actId="478"/>
+          <ac:spMkLst>
+            <pc:docMk/>
+            <pc:sldMk cId="3654646454" sldId="286"/>
+            <ac:spMk id="7" creationId="{722DABAE-2B1F-6E35-CA58-EC1567BDF2D9}"/>
+          </ac:spMkLst>
+        </pc:spChg>
+        <pc:spChg chg="add mod">
+          <ac:chgData name="이하나 윤" userId="f658f17427b35de9" providerId="LiveId" clId="{E9838EAF-D27B-40BD-973C-B669816E3ACD}" dt="2025-09-28T08:32:04.824" v="1054" actId="164"/>
+          <ac:spMkLst>
+            <pc:docMk/>
+            <pc:sldMk cId="3654646454" sldId="286"/>
+            <ac:spMk id="8" creationId="{3A00B2BA-98A1-2D64-87FA-B57F9314705D}"/>
+          </ac:spMkLst>
+        </pc:spChg>
+        <pc:spChg chg="add mod">
+          <ac:chgData name="이하나 윤" userId="f658f17427b35de9" providerId="LiveId" clId="{E9838EAF-D27B-40BD-973C-B669816E3ACD}" dt="2025-09-28T08:32:04.824" v="1054" actId="164"/>
+          <ac:spMkLst>
+            <pc:docMk/>
+            <pc:sldMk cId="3654646454" sldId="286"/>
+            <ac:spMk id="9" creationId="{43ACD007-4DC8-F3F8-63AC-FAE52D4CD21C}"/>
+          </ac:spMkLst>
+        </pc:spChg>
+        <pc:grpChg chg="add mod">
+          <ac:chgData name="이하나 윤" userId="f658f17427b35de9" providerId="LiveId" clId="{E9838EAF-D27B-40BD-973C-B669816E3ACD}" dt="2025-09-28T08:32:07.035" v="1055" actId="1076"/>
+          <ac:grpSpMkLst>
+            <pc:docMk/>
+            <pc:sldMk cId="3654646454" sldId="286"/>
+            <ac:grpSpMk id="10" creationId="{B3928684-4281-A32A-0052-DD4464BBF1B2}"/>
+          </ac:grpSpMkLst>
+        </pc:grpChg>
+        <pc:graphicFrameChg chg="add mod modGraphic">
+          <ac:chgData name="이하나 윤" userId="f658f17427b35de9" providerId="LiveId" clId="{E9838EAF-D27B-40BD-973C-B669816E3ACD}" dt="2025-09-28T08:31:59.716" v="1053" actId="20577"/>
+          <ac:graphicFrameMkLst>
+            <pc:docMk/>
+            <pc:sldMk cId="3654646454" sldId="286"/>
+            <ac:graphicFrameMk id="6" creationId="{AE1875A4-B894-7A56-CFDD-613522DA0E28}"/>
+          </ac:graphicFrameMkLst>
+        </pc:graphicFrameChg>
+      </pc:sldChg>
+      <pc:sldChg chg="new del">
+        <pc:chgData name="이하나 윤" userId="f658f17427b35de9" providerId="LiveId" clId="{E9838EAF-D27B-40BD-973C-B669816E3ACD}" dt="2025-09-28T08:22:38.174" v="1027" actId="47"/>
+        <pc:sldMkLst>
+          <pc:docMk/>
+          <pc:sldMk cId="2899440009" sldId="287"/>
+        </pc:sldMkLst>
+      </pc:sldChg>
+      <pc:sldChg chg="addSp delSp modSp add mod">
+        <pc:chgData name="이하나 윤" userId="f658f17427b35de9" providerId="LiveId" clId="{E9838EAF-D27B-40BD-973C-B669816E3ACD}" dt="2025-09-28T09:30:55.114" v="1063" actId="1076"/>
+        <pc:sldMkLst>
+          <pc:docMk/>
+          <pc:sldMk cId="3756870264" sldId="288"/>
+        </pc:sldMkLst>
+        <pc:spChg chg="mod">
+          <ac:chgData name="이하나 윤" userId="f658f17427b35de9" providerId="LiveId" clId="{E9838EAF-D27B-40BD-973C-B669816E3ACD}" dt="2025-09-28T08:22:51.333" v="1030" actId="113"/>
+          <ac:spMkLst>
+            <pc:docMk/>
+            <pc:sldMk cId="3756870264" sldId="288"/>
+            <ac:spMk id="2" creationId="{07FFE341-FE08-7B09-2324-0107F1B02DD5}"/>
+          </ac:spMkLst>
+        </pc:spChg>
+        <pc:spChg chg="del">
+          <ac:chgData name="이하나 윤" userId="f658f17427b35de9" providerId="LiveId" clId="{E9838EAF-D27B-40BD-973C-B669816E3ACD}" dt="2025-09-28T08:22:45.321" v="1028" actId="478"/>
+          <ac:spMkLst>
+            <pc:docMk/>
+            <pc:sldMk cId="3756870264" sldId="288"/>
+            <ac:spMk id="8" creationId="{B410264E-CAEE-52CD-4AC9-383E7844118C}"/>
+          </ac:spMkLst>
+        </pc:spChg>
+        <pc:spChg chg="del">
+          <ac:chgData name="이하나 윤" userId="f658f17427b35de9" providerId="LiveId" clId="{E9838EAF-D27B-40BD-973C-B669816E3ACD}" dt="2025-09-28T08:22:45.321" v="1028" actId="478"/>
+          <ac:spMkLst>
+            <pc:docMk/>
+            <pc:sldMk cId="3756870264" sldId="288"/>
+            <ac:spMk id="9" creationId="{206F07DC-9A7E-3F4E-66E5-174F6E8BBE78}"/>
+          </ac:spMkLst>
+        </pc:spChg>
+        <pc:grpChg chg="add del mod">
+          <ac:chgData name="이하나 윤" userId="f658f17427b35de9" providerId="LiveId" clId="{E9838EAF-D27B-40BD-973C-B669816E3ACD}" dt="2025-09-28T09:30:21.848" v="1056" actId="478"/>
+          <ac:grpSpMkLst>
+            <pc:docMk/>
+            <pc:sldMk cId="3756870264" sldId="288"/>
+            <ac:grpSpMk id="7" creationId="{8E62E042-2C2A-DB80-D174-36AF6801237E}"/>
+          </ac:grpSpMkLst>
+        </pc:grpChg>
+        <pc:grpChg chg="mod">
+          <ac:chgData name="이하나 윤" userId="f658f17427b35de9" providerId="LiveId" clId="{E9838EAF-D27B-40BD-973C-B669816E3ACD}" dt="2025-09-28T08:23:41.427" v="1031"/>
+          <ac:grpSpMkLst>
+            <pc:docMk/>
+            <pc:sldMk cId="3756870264" sldId="288"/>
+            <ac:grpSpMk id="11" creationId="{2230AB58-9D7E-9EF7-E5F7-6C0DEC44A6D6}"/>
+          </ac:grpSpMkLst>
+        </pc:grpChg>
+        <pc:grpChg chg="mod">
+          <ac:chgData name="이하나 윤" userId="f658f17427b35de9" providerId="LiveId" clId="{E9838EAF-D27B-40BD-973C-B669816E3ACD}" dt="2025-09-28T08:23:41.427" v="1031"/>
+          <ac:grpSpMkLst>
+            <pc:docMk/>
+            <pc:sldMk cId="3756870264" sldId="288"/>
+            <ac:grpSpMk id="12" creationId="{6FC382EE-0CC1-3D8F-6A27-8667EDFF7435}"/>
+          </ac:grpSpMkLst>
+        </pc:grpChg>
+        <pc:grpChg chg="mod">
+          <ac:chgData name="이하나 윤" userId="f658f17427b35de9" providerId="LiveId" clId="{E9838EAF-D27B-40BD-973C-B669816E3ACD}" dt="2025-09-28T08:23:41.427" v="1031"/>
+          <ac:grpSpMkLst>
+            <pc:docMk/>
+            <pc:sldMk cId="3756870264" sldId="288"/>
+            <ac:grpSpMk id="14" creationId="{3FABE1EC-2245-0B40-BA79-BF8B5924F953}"/>
+          </ac:grpSpMkLst>
+        </pc:grpChg>
+        <pc:grpChg chg="mod">
+          <ac:chgData name="이하나 윤" userId="f658f17427b35de9" providerId="LiveId" clId="{E9838EAF-D27B-40BD-973C-B669816E3ACD}" dt="2025-09-28T08:23:41.427" v="1031"/>
+          <ac:grpSpMkLst>
+            <pc:docMk/>
+            <pc:sldMk cId="3756870264" sldId="288"/>
+            <ac:grpSpMk id="17" creationId="{4FBC4621-5BC6-B4D0-6AF9-BE42EF5665A0}"/>
+          </ac:grpSpMkLst>
+        </pc:grpChg>
+        <pc:grpChg chg="mod">
+          <ac:chgData name="이하나 윤" userId="f658f17427b35de9" providerId="LiveId" clId="{E9838EAF-D27B-40BD-973C-B669816E3ACD}" dt="2025-09-28T08:23:41.427" v="1031"/>
+          <ac:grpSpMkLst>
+            <pc:docMk/>
+            <pc:sldMk cId="3756870264" sldId="288"/>
+            <ac:grpSpMk id="18" creationId="{D78F9F41-43D0-77E0-8654-456E10106BF9}"/>
+          </ac:grpSpMkLst>
+        </pc:grpChg>
+        <pc:graphicFrameChg chg="del">
+          <ac:chgData name="이하나 윤" userId="f658f17427b35de9" providerId="LiveId" clId="{E9838EAF-D27B-40BD-973C-B669816E3ACD}" dt="2025-09-28T08:22:45.321" v="1028" actId="478"/>
+          <ac:graphicFrameMkLst>
+            <pc:docMk/>
+            <pc:sldMk cId="3756870264" sldId="288"/>
+            <ac:graphicFrameMk id="6" creationId="{ADE11E84-998A-1587-5FB7-DA5714198CB7}"/>
+          </ac:graphicFrameMkLst>
+        </pc:graphicFrameChg>
+        <pc:picChg chg="mod">
+          <ac:chgData name="이하나 윤" userId="f658f17427b35de9" providerId="LiveId" clId="{E9838EAF-D27B-40BD-973C-B669816E3ACD}" dt="2025-09-28T08:23:41.427" v="1031"/>
+          <ac:picMkLst>
+            <pc:docMk/>
+            <pc:sldMk cId="3756870264" sldId="288"/>
+            <ac:picMk id="10" creationId="{CEC3B0B9-3674-0C11-4DA1-E0DD676870AD}"/>
+          </ac:picMkLst>
+        </pc:picChg>
+        <pc:picChg chg="add mod">
+          <ac:chgData name="이하나 윤" userId="f658f17427b35de9" providerId="LiveId" clId="{E9838EAF-D27B-40BD-973C-B669816E3ACD}" dt="2025-09-28T09:30:55.114" v="1063" actId="1076"/>
+          <ac:picMkLst>
+            <pc:docMk/>
+            <pc:sldMk cId="3756870264" sldId="288"/>
+            <ac:picMk id="175" creationId="{0C06DADE-7AF1-5951-9C6A-64467E67AE33}"/>
+          </ac:picMkLst>
+        </pc:picChg>
+        <pc:inkChg chg="mod">
+          <ac:chgData name="이하나 윤" userId="f658f17427b35de9" providerId="LiveId" clId="{E9838EAF-D27B-40BD-973C-B669816E3ACD}" dt="2025-09-28T08:23:41.427" v="1031"/>
+          <ac:inkMkLst>
+            <pc:docMk/>
+            <pc:sldMk cId="3756870264" sldId="288"/>
+            <ac:inkMk id="59" creationId="{B8C8ACBA-12AB-B5B3-B081-FB0AAFD65BB4}"/>
+          </ac:inkMkLst>
+        </pc:inkChg>
+        <pc:inkChg chg="mod">
+          <ac:chgData name="이하나 윤" userId="f658f17427b35de9" providerId="LiveId" clId="{E9838EAF-D27B-40BD-973C-B669816E3ACD}" dt="2025-09-28T08:23:41.427" v="1031"/>
+          <ac:inkMkLst>
+            <pc:docMk/>
+            <pc:sldMk cId="3756870264" sldId="288"/>
+            <ac:inkMk id="95" creationId="{92385C6D-57EC-B117-E44E-16ED6008B648}"/>
+          </ac:inkMkLst>
+        </pc:inkChg>
+        <pc:inkChg chg="mod">
+          <ac:chgData name="이하나 윤" userId="f658f17427b35de9" providerId="LiveId" clId="{E9838EAF-D27B-40BD-973C-B669816E3ACD}" dt="2025-09-28T08:23:41.427" v="1031"/>
+          <ac:inkMkLst>
+            <pc:docMk/>
+            <pc:sldMk cId="3756870264" sldId="288"/>
+            <ac:inkMk id="102" creationId="{A932D1F1-CB98-8403-C747-1AA3A939C895}"/>
+          </ac:inkMkLst>
+        </pc:inkChg>
+      </pc:sldChg>
+      <pc:sldChg chg="addSp delSp modSp add mod">
+        <pc:chgData name="이하나 윤" userId="f658f17427b35de9" providerId="LiveId" clId="{E9838EAF-D27B-40BD-973C-B669816E3ACD}" dt="2025-09-28T09:43:28.823" v="1366" actId="20577"/>
+        <pc:sldMkLst>
+          <pc:docMk/>
+          <pc:sldMk cId="3324608471" sldId="289"/>
+        </pc:sldMkLst>
+        <pc:spChg chg="mod">
+          <ac:chgData name="이하나 윤" userId="f658f17427b35de9" providerId="LiveId" clId="{E9838EAF-D27B-40BD-973C-B669816E3ACD}" dt="2025-09-28T09:41:57.799" v="1069" actId="113"/>
+          <ac:spMkLst>
+            <pc:docMk/>
+            <pc:sldMk cId="3324608471" sldId="289"/>
+            <ac:spMk id="2" creationId="{B208B376-0743-E8C9-E35B-BBF8AA656457}"/>
+          </ac:spMkLst>
+        </pc:spChg>
+        <pc:spChg chg="del">
+          <ac:chgData name="이하나 윤" userId="f658f17427b35de9" providerId="LiveId" clId="{E9838EAF-D27B-40BD-973C-B669816E3ACD}" dt="2025-09-28T09:42:05.649" v="1071" actId="478"/>
+          <ac:spMkLst>
+            <pc:docMk/>
+            <pc:sldMk cId="3324608471" sldId="289"/>
+            <ac:spMk id="4" creationId="{E1026054-9EB8-81DB-14ED-F94DB25A774D}"/>
+          </ac:spMkLst>
+        </pc:spChg>
+        <pc:spChg chg="add mod">
+          <ac:chgData name="이하나 윤" userId="f658f17427b35de9" providerId="LiveId" clId="{E9838EAF-D27B-40BD-973C-B669816E3ACD}" dt="2025-09-28T09:43:28.823" v="1366" actId="20577"/>
+          <ac:spMkLst>
+            <pc:docMk/>
+            <pc:sldMk cId="3324608471" sldId="289"/>
+            <ac:spMk id="11" creationId="{161AB7A6-A663-B3DF-5EA4-62CEDB69FD83}"/>
+          </ac:spMkLst>
+        </pc:spChg>
+        <pc:grpChg chg="del">
+          <ac:chgData name="이하나 윤" userId="f658f17427b35de9" providerId="LiveId" clId="{E9838EAF-D27B-40BD-973C-B669816E3ACD}" dt="2025-09-28T09:42:08.498" v="1072" actId="478"/>
+          <ac:grpSpMkLst>
+            <pc:docMk/>
+            <pc:sldMk cId="3324608471" sldId="289"/>
+            <ac:grpSpMk id="10" creationId="{713F3F7A-1E4F-9CCC-F963-A3535C51BE91}"/>
+          </ac:grpSpMkLst>
+        </pc:grpChg>
+        <pc:graphicFrameChg chg="del">
+          <ac:chgData name="이하나 윤" userId="f658f17427b35de9" providerId="LiveId" clId="{E9838EAF-D27B-40BD-973C-B669816E3ACD}" dt="2025-09-28T09:42:04.193" v="1070" actId="478"/>
+          <ac:graphicFrameMkLst>
+            <pc:docMk/>
+            <pc:sldMk cId="3324608471" sldId="289"/>
+            <ac:graphicFrameMk id="6" creationId="{D6BF1AD6-658A-2AC7-532D-460541484F2C}"/>
+          </ac:graphicFrameMkLst>
+        </pc:graphicFrameChg>
+      </pc:sldChg>
+      <pc:sldChg chg="new del">
+        <pc:chgData name="이하나 윤" userId="f658f17427b35de9" providerId="LiveId" clId="{E9838EAF-D27B-40BD-973C-B669816E3ACD}" dt="2025-09-28T09:41:46.912" v="1065" actId="47"/>
+        <pc:sldMkLst>
+          <pc:docMk/>
+          <pc:sldMk cId="4014291457" sldId="289"/>
+        </pc:sldMkLst>
       </pc:sldChg>
     </pc:docChg>
   </pc:docChgLst>
@@ -576,7 +897,7 @@
           <a:p>
             <a:fld id="{90ADBB8C-8191-4AEC-B0E4-021A6DCC5E88}" type="datetimeFigureOut">
               <a:rPr lang="ko-KR" altLang="en-US" smtClean="0"/>
-              <a:t>2025-09-17</a:t>
+              <a:t>2025-09-28</a:t>
             </a:fld>
             <a:endParaRPr lang="ko-KR" altLang="en-US"/>
           </a:p>
@@ -753,7 +1074,7 @@
           <a:p>
             <a:fld id="{9A139F74-74AF-4C37-AE84-1000E0D0E51D}" type="datetimeFigureOut">
               <a:rPr lang="ko-KR" altLang="en-US" smtClean="0"/>
-              <a:t>2025-09-17</a:t>
+              <a:t>2025-09-28</a:t>
             </a:fld>
             <a:endParaRPr lang="ko-KR" altLang="en-US"/>
           </a:p>
@@ -1395,7 +1716,7 @@
           <a:p>
             <a:fld id="{FBFF74CB-B97E-448A-8613-336F71D317F5}" type="datetime1">
               <a:rPr lang="ko-KR" altLang="en-US" smtClean="0"/>
-              <a:t>2025-09-17</a:t>
+              <a:t>2025-09-28</a:t>
             </a:fld>
             <a:endParaRPr lang="ko-KR" altLang="en-US"/>
           </a:p>
@@ -1683,7 +2004,7 @@
           <a:p>
             <a:fld id="{6D5A3F2E-880D-4AB2-BE87-1DABB4D9D36B}" type="datetime1">
               <a:rPr lang="ko-KR" altLang="en-US" smtClean="0"/>
-              <a:t>2025-09-17</a:t>
+              <a:t>2025-09-28</a:t>
             </a:fld>
             <a:endParaRPr lang="ko-KR" altLang="en-US"/>
           </a:p>
@@ -1881,7 +2202,7 @@
           <a:p>
             <a:fld id="{E225792B-2F2C-46B3-9536-A6BE584A3133}" type="datetime1">
               <a:rPr lang="ko-KR" altLang="en-US" smtClean="0"/>
-              <a:t>2025-09-17</a:t>
+              <a:t>2025-09-28</a:t>
             </a:fld>
             <a:endParaRPr lang="ko-KR" altLang="en-US"/>
           </a:p>
@@ -2089,7 +2410,7 @@
           <a:p>
             <a:fld id="{B959B1C4-1FB0-4ED1-88EC-81D9419D81DC}" type="datetime1">
               <a:rPr lang="ko-KR" altLang="en-US" smtClean="0"/>
-              <a:t>2025-09-17</a:t>
+              <a:t>2025-09-28</a:t>
             </a:fld>
             <a:endParaRPr lang="ko-KR" altLang="en-US"/>
           </a:p>
@@ -2358,7 +2679,7 @@
           <a:p>
             <a:fld id="{644DB65B-E6AE-4B39-8D08-8DC3DC9B3DE6}" type="datetime1">
               <a:rPr lang="ko-KR" altLang="en-US" smtClean="0"/>
-              <a:t>2025-09-17</a:t>
+              <a:t>2025-09-28</a:t>
             </a:fld>
             <a:endParaRPr lang="ko-KR" altLang="en-US"/>
           </a:p>
@@ -2627,7 +2948,7 @@
           <a:p>
             <a:fld id="{644DB65B-E6AE-4B39-8D08-8DC3DC9B3DE6}" type="datetime1">
               <a:rPr lang="ko-KR" altLang="en-US" smtClean="0"/>
-              <a:t>2025-09-17</a:t>
+              <a:t>2025-09-28</a:t>
             </a:fld>
             <a:endParaRPr lang="ko-KR" altLang="en-US"/>
           </a:p>
@@ -2939,7 +3260,7 @@
           <a:p>
             <a:fld id="{A80E6DAD-F59F-4DF2-B36E-B1403061A098}" type="datetime1">
               <a:rPr lang="ko-KR" altLang="en-US" smtClean="0"/>
-              <a:t>2025-09-17</a:t>
+              <a:t>2025-09-28</a:t>
             </a:fld>
             <a:endParaRPr lang="ko-KR" altLang="en-US"/>
           </a:p>
@@ -3204,7 +3525,7 @@
           <a:p>
             <a:fld id="{65E7A435-D09E-4012-8A5A-CB367CE86DE7}" type="datetime1">
               <a:rPr lang="ko-KR" altLang="en-US" smtClean="0"/>
-              <a:t>2025-09-17</a:t>
+              <a:t>2025-09-28</a:t>
             </a:fld>
             <a:endParaRPr lang="ko-KR" altLang="en-US"/>
           </a:p>
@@ -3616,7 +3937,7 @@
           <a:p>
             <a:fld id="{EAEE4FE5-8155-4A7B-B9F1-1277B556A678}" type="datetime1">
               <a:rPr lang="ko-KR" altLang="en-US" smtClean="0"/>
-              <a:t>2025-09-17</a:t>
+              <a:t>2025-09-28</a:t>
             </a:fld>
             <a:endParaRPr lang="ko-KR" altLang="en-US"/>
           </a:p>
@@ -3757,7 +4078,7 @@
           <a:p>
             <a:fld id="{A5DDFFB1-F462-49A1-A952-F86898531EFC}" type="datetime1">
               <a:rPr lang="ko-KR" altLang="en-US" smtClean="0"/>
-              <a:t>2025-09-17</a:t>
+              <a:t>2025-09-28</a:t>
             </a:fld>
             <a:endParaRPr lang="ko-KR" altLang="en-US"/>
           </a:p>
@@ -3870,7 +4191,7 @@
           <a:p>
             <a:fld id="{DF307744-A7EE-42A9-B4BD-A75049B592B9}" type="datetime1">
               <a:rPr lang="ko-KR" altLang="en-US" smtClean="0"/>
-              <a:t>2025-09-17</a:t>
+              <a:t>2025-09-28</a:t>
             </a:fld>
             <a:endParaRPr lang="ko-KR" altLang="en-US"/>
           </a:p>
@@ -4181,7 +4502,7 @@
           <a:p>
             <a:fld id="{DEB58597-5F16-46FB-9810-19206F29ADC7}" type="datetime1">
               <a:rPr lang="ko-KR" altLang="en-US" smtClean="0"/>
-              <a:t>2025-09-17</a:t>
+              <a:t>2025-09-28</a:t>
             </a:fld>
             <a:endParaRPr lang="ko-KR" altLang="en-US"/>
           </a:p>
@@ -4422,7 +4743,7 @@
           <a:p>
             <a:fld id="{F9163AAC-BAFF-4F5F-9CEA-0445F100C3E2}" type="datetime1">
               <a:rPr lang="ko-KR" altLang="en-US" smtClean="0"/>
-              <a:t>2025-09-17</a:t>
+              <a:t>2025-09-28</a:t>
             </a:fld>
             <a:endParaRPr lang="ko-KR" altLang="en-US"/>
           </a:p>
@@ -4899,15 +5220,15 @@
           <a:p>
             <a:r>
               <a:rPr lang="ko-KR" altLang="en-US" dirty="0"/>
-              <a:t>몬스터를 어떻게 공격할 것인가</a:t>
+              <a:t>플레이어와 거미</a:t>
             </a:r>
             <a:r>
               <a:rPr lang="en-US" altLang="ko-KR" dirty="0"/>
-              <a:t>? (</a:t>
-            </a:r>
-            <a:r>
-              <a:rPr lang="ko-KR" altLang="en-US" dirty="0"/>
-              <a:t>마법</a:t>
+              <a:t> (HP, </a:t>
+            </a:r>
+            <a:r>
+              <a:rPr lang="ko-KR" altLang="en-US" dirty="0"/>
+              <a:t>이동속도</a:t>
             </a:r>
             <a:r>
               <a:rPr lang="en-US" altLang="ko-KR" dirty="0"/>
@@ -4915,7 +5236,7 @@
             </a:r>
             <a:r>
               <a:rPr lang="ko-KR" altLang="en-US" dirty="0"/>
-              <a:t>근거리 무기</a:t>
+              <a:t>공격속도</a:t>
             </a:r>
             <a:r>
               <a:rPr lang="en-US" altLang="ko-KR" dirty="0"/>
@@ -4923,45 +5244,28 @@
             </a:r>
             <a:r>
               <a:rPr lang="ko-KR" altLang="en-US" dirty="0"/>
-              <a:t>원거리 무기</a:t>
-            </a:r>
-            <a:r>
-              <a:rPr lang="en-US" altLang="ko-KR" dirty="0"/>
-              <a:t>)   </a:t>
-            </a:r>
-            <a:r>
-              <a:rPr lang="ko-KR" altLang="en-US" dirty="0"/>
-              <a:t>각 무기별 </a:t>
-            </a:r>
-            <a:r>
-              <a:rPr lang="en-US" altLang="ko-KR" dirty="0"/>
-              <a:t>(</a:t>
-            </a:r>
-            <a:r>
-              <a:rPr lang="ko-KR" altLang="en-US" dirty="0"/>
-              <a:t>공격력</a:t>
+              <a:t>데미지</a:t>
             </a:r>
             <a:r>
               <a:rPr lang="en-US" altLang="ko-KR" dirty="0"/>
               <a:t>, </a:t>
             </a:r>
             <a:r>
-              <a:rPr lang="ko-KR" altLang="en-US" dirty="0" err="1"/>
-              <a:t>쿨타임</a:t>
+              <a:rPr lang="ko-KR" altLang="en-US" dirty="0"/>
+              <a:t>거미</a:t>
             </a:r>
             <a:r>
               <a:rPr lang="en-US" altLang="ko-KR" dirty="0"/>
-              <a:t>, </a:t>
-            </a:r>
-            <a:r>
-              <a:rPr lang="ko-KR" altLang="en-US" dirty="0"/>
-              <a:t>장탄 수</a:t>
+              <a:t> </a:t>
+            </a:r>
+            <a:r>
+              <a:rPr lang="ko-KR" altLang="en-US" dirty="0"/>
+              <a:t>스킬</a:t>
             </a:r>
             <a:r>
               <a:rPr lang="en-US" altLang="ko-KR" dirty="0"/>
-              <a:t>.....)</a:t>
-            </a:r>
-            <a:endParaRPr lang="ko-KR" altLang="en-US" dirty="0"/>
+              <a:t>)</a:t>
+            </a:r>
           </a:p>
         </p:txBody>
       </p:sp>
@@ -4997,7 +5301,7 @@
               <a:rPr lang="en-US" altLang="ko-KR" dirty="0">
                 <a:ea typeface="맑은 고딕"/>
               </a:rPr>
-              <a:t>2025.</a:t>
+              <a:t>2025.09.28</a:t>
             </a:r>
           </a:p>
         </p:txBody>
@@ -5006,6 +5310,199 @@
     <p:extLst>
       <p:ext uri="{BB962C8B-B14F-4D97-AF65-F5344CB8AC3E}">
         <p14:creationId xmlns:p14="http://schemas.microsoft.com/office/powerpoint/2010/main" val="695329364"/>
+      </p:ext>
+    </p:extLst>
+  </p:cSld>
+  <p:clrMapOvr>
+    <a:masterClrMapping/>
+  </p:clrMapOvr>
+</p:sld>
+</file>
+
+<file path=ppt/slides/slide10.xml><?xml version="1.0" encoding="utf-8"?>
+<p:sld xmlns:a="http://schemas.openxmlformats.org/drawingml/2006/main" xmlns:r="http://schemas.openxmlformats.org/officeDocument/2006/relationships" xmlns:p="http://schemas.openxmlformats.org/presentationml/2006/main">
+  <p:cSld>
+    <p:spTree>
+      <p:nvGrpSpPr>
+        <p:cNvPr id="1" name="">
+          <a:extLst>
+            <a:ext uri="{FF2B5EF4-FFF2-40B4-BE49-F238E27FC236}">
+              <a16:creationId xmlns:a16="http://schemas.microsoft.com/office/drawing/2014/main" id="{31D2C7A6-B4F4-EF26-C3A5-025FBC77D235}"/>
+            </a:ext>
+          </a:extLst>
+        </p:cNvPr>
+        <p:cNvGrpSpPr/>
+        <p:nvPr/>
+      </p:nvGrpSpPr>
+      <p:grpSpPr>
+        <a:xfrm>
+          <a:off x="0" y="0"/>
+          <a:ext cx="0" cy="0"/>
+          <a:chOff x="0" y="0"/>
+          <a:chExt cx="0" cy="0"/>
+        </a:xfrm>
+      </p:grpSpPr>
+      <p:sp>
+        <p:nvSpPr>
+          <p:cNvPr id="2" name="텍스트 개체 틀 1">
+            <a:extLst>
+              <a:ext uri="{FF2B5EF4-FFF2-40B4-BE49-F238E27FC236}">
+                <a16:creationId xmlns:a16="http://schemas.microsoft.com/office/drawing/2014/main" id="{B208B376-0743-E8C9-E35B-BBF8AA656457}"/>
+              </a:ext>
+            </a:extLst>
+          </p:cNvPr>
+          <p:cNvSpPr>
+            <a:spLocks noGrp="1"/>
+          </p:cNvSpPr>
+          <p:nvPr>
+            <p:ph type="body" sz="quarter" idx="13"/>
+          </p:nvPr>
+        </p:nvSpPr>
+        <p:spPr>
+          <a:xfrm>
+            <a:off x="0" y="654689"/>
+            <a:ext cx="1600200" cy="2349500"/>
+          </a:xfrm>
+        </p:spPr>
+        <p:txBody>
+          <a:bodyPr/>
+          <a:lstStyle/>
+          <a:p>
+            <a:r>
+              <a:rPr lang="ko-KR" altLang="en-US" dirty="0" err="1"/>
+              <a:t>스탯</a:t>
+            </a:r>
+            <a:endParaRPr lang="en-US" altLang="ko-KR" dirty="0"/>
+          </a:p>
+          <a:p>
+            <a:r>
+              <a:rPr lang="en-US" altLang="ko-KR" dirty="0"/>
+              <a:t>FSM</a:t>
+            </a:r>
+          </a:p>
+          <a:p>
+            <a:r>
+              <a:rPr lang="ko-KR" altLang="en-US" b="1" dirty="0"/>
+              <a:t>스킬</a:t>
+            </a:r>
+          </a:p>
+        </p:txBody>
+      </p:sp>
+      <p:sp>
+        <p:nvSpPr>
+          <p:cNvPr id="3" name="제목 2">
+            <a:extLst>
+              <a:ext uri="{FF2B5EF4-FFF2-40B4-BE49-F238E27FC236}">
+                <a16:creationId xmlns:a16="http://schemas.microsoft.com/office/drawing/2014/main" id="{5BE9D689-69D2-7FB9-1E02-EA2DF933B80D}"/>
+              </a:ext>
+            </a:extLst>
+          </p:cNvPr>
+          <p:cNvSpPr>
+            <a:spLocks noGrp="1"/>
+          </p:cNvSpPr>
+          <p:nvPr>
+            <p:ph type="title"/>
+          </p:nvPr>
+        </p:nvSpPr>
+        <p:spPr>
+          <a:xfrm>
+            <a:off x="0" y="119158"/>
+            <a:ext cx="1600200" cy="535531"/>
+          </a:xfrm>
+        </p:spPr>
+        <p:txBody>
+          <a:bodyPr/>
+          <a:lstStyle/>
+          <a:p>
+            <a:r>
+              <a:rPr lang="ko-KR" altLang="en-US" dirty="0"/>
+              <a:t>거미</a:t>
+            </a:r>
+          </a:p>
+        </p:txBody>
+      </p:sp>
+      <p:sp>
+        <p:nvSpPr>
+          <p:cNvPr id="5" name="슬라이드 번호 개체 틀 4">
+            <a:extLst>
+              <a:ext uri="{FF2B5EF4-FFF2-40B4-BE49-F238E27FC236}">
+                <a16:creationId xmlns:a16="http://schemas.microsoft.com/office/drawing/2014/main" id="{9C1D64E5-28A3-6645-16F5-5F97C2E85C8A}"/>
+              </a:ext>
+            </a:extLst>
+          </p:cNvPr>
+          <p:cNvSpPr>
+            <a:spLocks noGrp="1"/>
+          </p:cNvSpPr>
+          <p:nvPr>
+            <p:ph type="sldNum" sz="quarter" idx="12"/>
+          </p:nvPr>
+        </p:nvSpPr>
+        <p:spPr/>
+        <p:txBody>
+          <a:bodyPr/>
+          <a:lstStyle/>
+          <a:p>
+            <a:fld id="{2A226FEB-661D-4181-84CB-C53DCFE1931A}" type="slidenum">
+              <a:rPr lang="ko-KR" altLang="en-US" smtClean="0"/>
+              <a:t>10</a:t>
+            </a:fld>
+            <a:endParaRPr lang="ko-KR" altLang="en-US"/>
+          </a:p>
+        </p:txBody>
+      </p:sp>
+      <p:sp>
+        <p:nvSpPr>
+          <p:cNvPr id="11" name="내용 개체 틀 10">
+            <a:extLst>
+              <a:ext uri="{FF2B5EF4-FFF2-40B4-BE49-F238E27FC236}">
+                <a16:creationId xmlns:a16="http://schemas.microsoft.com/office/drawing/2014/main" id="{161AB7A6-A663-B3DF-5EA4-62CEDB69FD83}"/>
+              </a:ext>
+            </a:extLst>
+          </p:cNvPr>
+          <p:cNvSpPr>
+            <a:spLocks noGrp="1"/>
+          </p:cNvSpPr>
+          <p:nvPr>
+            <p:ph idx="1"/>
+          </p:nvPr>
+        </p:nvSpPr>
+        <p:spPr/>
+        <p:txBody>
+          <a:bodyPr/>
+          <a:lstStyle/>
+          <a:p>
+            <a:r>
+              <a:rPr lang="ko-KR" altLang="en-US" dirty="0"/>
+              <a:t>거미 스킬</a:t>
+            </a:r>
+            <a:r>
+              <a:rPr lang="en-US" altLang="ko-KR" dirty="0"/>
+              <a:t>: </a:t>
+            </a:r>
+            <a:r>
+              <a:rPr lang="ko-KR" altLang="en-US" dirty="0"/>
+              <a:t>거미줄을 설치하여</a:t>
+            </a:r>
+            <a:r>
+              <a:rPr lang="en-US" altLang="ko-KR" dirty="0"/>
+              <a:t>, </a:t>
+            </a:r>
+            <a:r>
+              <a:rPr lang="ko-KR" altLang="en-US" dirty="0"/>
+              <a:t>거미줄이 파괴되거나 플레이어가 거미줄에 닿았을 때 이를 감지하여 추적할 수 있다</a:t>
+            </a:r>
+            <a:r>
+              <a:rPr lang="en-US" altLang="ko-KR"/>
+              <a:t>.</a:t>
+            </a:r>
+            <a:endParaRPr lang="ko-KR" altLang="en-US"/>
+          </a:p>
+        </p:txBody>
+      </p:sp>
+    </p:spTree>
+    <p:extLst>
+      <p:ext uri="{BB962C8B-B14F-4D97-AF65-F5344CB8AC3E}">
+        <p14:creationId xmlns:p14="http://schemas.microsoft.com/office/powerpoint/2010/main" val="3324608471"/>
       </p:ext>
     </p:extLst>
   </p:cSld>
@@ -5104,6 +5601,69 @@
               <a:t>원거리 무기</a:t>
             </a:r>
             <a:endParaRPr lang="en-US" altLang="ko-KR" dirty="0"/>
+          </a:p>
+          <a:p>
+            <a:endParaRPr lang="en-US" altLang="ko-KR" sz="1800" dirty="0"/>
+          </a:p>
+          <a:p>
+            <a:r>
+              <a:rPr lang="ko-KR" altLang="en-US" dirty="0"/>
+              <a:t>플레이어</a:t>
+            </a:r>
+            <a:endParaRPr lang="en-US" altLang="ko-KR" dirty="0"/>
+          </a:p>
+          <a:p>
+            <a:pPr lvl="1"/>
+            <a:r>
+              <a:rPr lang="ko-KR" altLang="en-US" dirty="0" err="1"/>
+              <a:t>스탯</a:t>
+            </a:r>
+            <a:endParaRPr lang="en-US" altLang="ko-KR" dirty="0"/>
+          </a:p>
+          <a:p>
+            <a:endParaRPr lang="en-US" altLang="ko-KR" sz="1800" dirty="0"/>
+          </a:p>
+          <a:p>
+            <a:r>
+              <a:rPr lang="ko-KR" altLang="en-US" dirty="0"/>
+              <a:t>거미</a:t>
+            </a:r>
+            <a:endParaRPr lang="en-US" altLang="ko-KR" dirty="0"/>
+          </a:p>
+          <a:p>
+            <a:pPr lvl="1"/>
+            <a:r>
+              <a:rPr lang="ko-KR" altLang="en-US" dirty="0" err="1"/>
+              <a:t>스탯</a:t>
+            </a:r>
+            <a:endParaRPr lang="en-US" altLang="ko-KR" dirty="0"/>
+          </a:p>
+          <a:p>
+            <a:pPr lvl="1"/>
+            <a:r>
+              <a:rPr lang="en-US" altLang="ko-KR" dirty="0"/>
+              <a:t>FSM</a:t>
+            </a:r>
+          </a:p>
+          <a:p>
+            <a:pPr lvl="1"/>
+            <a:r>
+              <a:rPr lang="ko-KR" altLang="en-US" dirty="0"/>
+              <a:t>스킬</a:t>
+            </a:r>
+            <a:endParaRPr lang="en-US" altLang="ko-KR" dirty="0"/>
+          </a:p>
+          <a:p>
+            <a:endParaRPr lang="en-US" altLang="ko-KR" dirty="0"/>
+          </a:p>
+          <a:p>
+            <a:endParaRPr lang="en-US" altLang="ko-KR" sz="1800" dirty="0"/>
+          </a:p>
+          <a:p>
+            <a:endParaRPr lang="en-US" altLang="ko-KR" dirty="0"/>
+          </a:p>
+          <a:p>
+            <a:endParaRPr lang="en-US" altLang="ko-KR" sz="1800" dirty="0"/>
           </a:p>
           <a:p>
             <a:endParaRPr lang="en-US" altLang="ko-KR" sz="1800" dirty="0"/>
@@ -5371,6 +5931,16 @@
             <a:r>
               <a:rPr lang="en-US" altLang="ko-KR" dirty="0"/>
               <a:t>: 20</a:t>
+            </a:r>
+          </a:p>
+          <a:p>
+            <a:r>
+              <a:rPr lang="ko-KR" altLang="en-US" dirty="0"/>
+              <a:t>공격 속도</a:t>
+            </a:r>
+            <a:r>
+              <a:rPr lang="en-US" altLang="ko-KR" dirty="0"/>
+              <a:t>: </a:t>
             </a:r>
           </a:p>
           <a:p>
@@ -5752,6 +6322,16 @@
           <a:p>
             <a:r>
               <a:rPr lang="ko-KR" altLang="en-US" dirty="0"/>
+              <a:t>공격 속도</a:t>
+            </a:r>
+            <a:r>
+              <a:rPr lang="en-US" altLang="ko-KR" dirty="0"/>
+              <a:t>: </a:t>
+            </a:r>
+          </a:p>
+          <a:p>
+            <a:r>
+              <a:rPr lang="ko-KR" altLang="en-US" dirty="0"/>
               <a:t>추가 효과</a:t>
             </a:r>
             <a:r>
@@ -6075,6 +6655,16 @@
             <a:r>
               <a:rPr lang="en-US" altLang="ko-KR" dirty="0"/>
               <a:t>: 40</a:t>
+            </a:r>
+          </a:p>
+          <a:p>
+            <a:r>
+              <a:rPr lang="ko-KR" altLang="en-US" dirty="0"/>
+              <a:t>공격 속도</a:t>
+            </a:r>
+            <a:r>
+              <a:rPr lang="en-US" altLang="ko-KR" dirty="0"/>
+              <a:t>: </a:t>
             </a:r>
           </a:p>
           <a:p>
@@ -6554,6 +7144,16 @@
           <a:p>
             <a:r>
               <a:rPr lang="ko-KR" altLang="en-US" dirty="0"/>
+              <a:t>공격 속도</a:t>
+            </a:r>
+            <a:r>
+              <a:rPr lang="en-US" altLang="ko-KR" dirty="0"/>
+              <a:t>: </a:t>
+            </a:r>
+          </a:p>
+          <a:p>
+            <a:r>
+              <a:rPr lang="ko-KR" altLang="en-US" dirty="0"/>
               <a:t>장탄 수</a:t>
             </a:r>
             <a:r>
@@ -6710,6 +7310,3445 @@
     <p:extLst>
       <p:ext uri="{BB962C8B-B14F-4D97-AF65-F5344CB8AC3E}">
         <p14:creationId xmlns:p14="http://schemas.microsoft.com/office/powerpoint/2010/main" val="341395478"/>
+      </p:ext>
+    </p:extLst>
+  </p:cSld>
+  <p:clrMapOvr>
+    <a:masterClrMapping/>
+  </p:clrMapOvr>
+</p:sld>
+</file>
+
+<file path=ppt/slides/slide7.xml><?xml version="1.0" encoding="utf-8"?>
+<p:sld xmlns:a="http://schemas.openxmlformats.org/drawingml/2006/main" xmlns:r="http://schemas.openxmlformats.org/officeDocument/2006/relationships" xmlns:p="http://schemas.openxmlformats.org/presentationml/2006/main">
+  <p:cSld>
+    <p:spTree>
+      <p:nvGrpSpPr>
+        <p:cNvPr id="1" name=""/>
+        <p:cNvGrpSpPr/>
+        <p:nvPr/>
+      </p:nvGrpSpPr>
+      <p:grpSpPr>
+        <a:xfrm>
+          <a:off x="0" y="0"/>
+          <a:ext cx="0" cy="0"/>
+          <a:chOff x="0" y="0"/>
+          <a:chExt cx="0" cy="0"/>
+        </a:xfrm>
+      </p:grpSpPr>
+      <p:sp>
+        <p:nvSpPr>
+          <p:cNvPr id="2" name="텍스트 개체 틀 1">
+            <a:extLst>
+              <a:ext uri="{FF2B5EF4-FFF2-40B4-BE49-F238E27FC236}">
+                <a16:creationId xmlns:a16="http://schemas.microsoft.com/office/drawing/2014/main" id="{A505DC85-97EC-3C15-BF84-A0EF7476D8A7}"/>
+              </a:ext>
+            </a:extLst>
+          </p:cNvPr>
+          <p:cNvSpPr>
+            <a:spLocks noGrp="1"/>
+          </p:cNvSpPr>
+          <p:nvPr>
+            <p:ph type="body" sz="quarter" idx="13"/>
+          </p:nvPr>
+        </p:nvSpPr>
+        <p:spPr>
+          <a:xfrm>
+            <a:off x="0" y="654689"/>
+            <a:ext cx="1600200" cy="2349500"/>
+          </a:xfrm>
+        </p:spPr>
+        <p:txBody>
+          <a:bodyPr/>
+          <a:lstStyle/>
+          <a:p>
+            <a:r>
+              <a:rPr lang="ko-KR" altLang="en-US" b="1" dirty="0" err="1"/>
+              <a:t>스탯</a:t>
+            </a:r>
+            <a:endParaRPr lang="ko-KR" altLang="en-US" b="1" dirty="0"/>
+          </a:p>
+        </p:txBody>
+      </p:sp>
+      <p:sp>
+        <p:nvSpPr>
+          <p:cNvPr id="3" name="제목 2">
+            <a:extLst>
+              <a:ext uri="{FF2B5EF4-FFF2-40B4-BE49-F238E27FC236}">
+                <a16:creationId xmlns:a16="http://schemas.microsoft.com/office/drawing/2014/main" id="{42D5F7D5-9A32-C9CB-26C1-9174544DFC93}"/>
+              </a:ext>
+            </a:extLst>
+          </p:cNvPr>
+          <p:cNvSpPr>
+            <a:spLocks noGrp="1"/>
+          </p:cNvSpPr>
+          <p:nvPr>
+            <p:ph type="title"/>
+          </p:nvPr>
+        </p:nvSpPr>
+        <p:spPr>
+          <a:xfrm>
+            <a:off x="0" y="119158"/>
+            <a:ext cx="1892300" cy="535531"/>
+          </a:xfrm>
+        </p:spPr>
+        <p:txBody>
+          <a:bodyPr/>
+          <a:lstStyle/>
+          <a:p>
+            <a:r>
+              <a:rPr lang="ko-KR" altLang="en-US" dirty="0"/>
+              <a:t>플레이어</a:t>
+            </a:r>
+          </a:p>
+        </p:txBody>
+      </p:sp>
+      <p:sp>
+        <p:nvSpPr>
+          <p:cNvPr id="4" name="내용 개체 틀 3">
+            <a:extLst>
+              <a:ext uri="{FF2B5EF4-FFF2-40B4-BE49-F238E27FC236}">
+                <a16:creationId xmlns:a16="http://schemas.microsoft.com/office/drawing/2014/main" id="{79913FB2-72E7-61AC-16CD-8C20E73AAAEE}"/>
+              </a:ext>
+            </a:extLst>
+          </p:cNvPr>
+          <p:cNvSpPr>
+            <a:spLocks noGrp="1"/>
+          </p:cNvSpPr>
+          <p:nvPr>
+            <p:ph idx="1"/>
+          </p:nvPr>
+        </p:nvSpPr>
+        <p:spPr/>
+        <p:txBody>
+          <a:bodyPr/>
+          <a:lstStyle/>
+          <a:p>
+            <a:r>
+              <a:rPr lang="en-US" altLang="ko-KR" dirty="0"/>
+              <a:t>HP, </a:t>
+            </a:r>
+            <a:r>
+              <a:rPr lang="ko-KR" altLang="en-US" dirty="0"/>
+              <a:t>이동속도</a:t>
+            </a:r>
+            <a:r>
+              <a:rPr lang="en-US" altLang="ko-KR" dirty="0"/>
+              <a:t>, </a:t>
+            </a:r>
+            <a:r>
+              <a:rPr lang="ko-KR" altLang="en-US" dirty="0"/>
+              <a:t>공격속도</a:t>
+            </a:r>
+            <a:r>
+              <a:rPr lang="en-US" altLang="ko-KR" dirty="0"/>
+              <a:t>, </a:t>
+            </a:r>
+            <a:r>
+              <a:rPr lang="ko-KR" altLang="en-US" dirty="0"/>
+              <a:t>데미지</a:t>
+            </a:r>
+            <a:r>
+              <a:rPr lang="en-US" altLang="ko-KR" dirty="0"/>
+              <a:t>)</a:t>
+            </a:r>
+          </a:p>
+          <a:p>
+            <a:endParaRPr lang="ko-KR" altLang="en-US" dirty="0"/>
+          </a:p>
+        </p:txBody>
+      </p:sp>
+      <p:sp>
+        <p:nvSpPr>
+          <p:cNvPr id="5" name="슬라이드 번호 개체 틀 4">
+            <a:extLst>
+              <a:ext uri="{FF2B5EF4-FFF2-40B4-BE49-F238E27FC236}">
+                <a16:creationId xmlns:a16="http://schemas.microsoft.com/office/drawing/2014/main" id="{F3C4F19D-96C7-4D79-007B-A481A44F90EE}"/>
+              </a:ext>
+            </a:extLst>
+          </p:cNvPr>
+          <p:cNvSpPr>
+            <a:spLocks noGrp="1"/>
+          </p:cNvSpPr>
+          <p:nvPr>
+            <p:ph type="sldNum" sz="quarter" idx="12"/>
+          </p:nvPr>
+        </p:nvSpPr>
+        <p:spPr/>
+        <p:txBody>
+          <a:bodyPr/>
+          <a:lstStyle/>
+          <a:p>
+            <a:fld id="{2A226FEB-661D-4181-84CB-C53DCFE1931A}" type="slidenum">
+              <a:rPr lang="ko-KR" altLang="en-US" smtClean="0"/>
+              <a:t>7</a:t>
+            </a:fld>
+            <a:endParaRPr lang="ko-KR" altLang="en-US"/>
+          </a:p>
+        </p:txBody>
+      </p:sp>
+      <p:graphicFrame>
+        <p:nvGraphicFramePr>
+          <p:cNvPr id="6" name="표 5">
+            <a:extLst>
+              <a:ext uri="{FF2B5EF4-FFF2-40B4-BE49-F238E27FC236}">
+                <a16:creationId xmlns:a16="http://schemas.microsoft.com/office/drawing/2014/main" id="{DCF701A9-572B-D7F3-874E-C77C002B7781}"/>
+              </a:ext>
+            </a:extLst>
+          </p:cNvPr>
+          <p:cNvGraphicFramePr>
+            <a:graphicFrameLocks noGrp="1"/>
+          </p:cNvGraphicFramePr>
+          <p:nvPr>
+            <p:extLst>
+              <p:ext uri="{D42A27DB-BD31-4B8C-83A1-F6EECF244321}">
+                <p14:modId xmlns:p14="http://schemas.microsoft.com/office/powerpoint/2010/main" val="2001845298"/>
+              </p:ext>
+            </p:extLst>
+          </p:nvPr>
+        </p:nvGraphicFramePr>
+        <p:xfrm>
+          <a:off x="2032000" y="719666"/>
+          <a:ext cx="8807646" cy="1112520"/>
+        </p:xfrm>
+        <a:graphic>
+          <a:graphicData uri="http://schemas.openxmlformats.org/drawingml/2006/table">
+            <a:tbl>
+              <a:tblPr firstRow="1" bandRow="1">
+                <a:tableStyleId>{5C22544A-7EE6-4342-B048-85BDC9FD1C3A}</a:tableStyleId>
+              </a:tblPr>
+              <a:tblGrid>
+                <a:gridCol w="1870393">
+                  <a:extLst>
+                    <a:ext uri="{9D8B030D-6E8A-4147-A177-3AD203B41FA5}">
+                      <a16:colId xmlns:a16="http://schemas.microsoft.com/office/drawing/2014/main" val="1240864632"/>
+                    </a:ext>
+                  </a:extLst>
+                </a:gridCol>
+                <a:gridCol w="962191">
+                  <a:extLst>
+                    <a:ext uri="{9D8B030D-6E8A-4147-A177-3AD203B41FA5}">
+                      <a16:colId xmlns:a16="http://schemas.microsoft.com/office/drawing/2014/main" val="2669217487"/>
+                    </a:ext>
+                  </a:extLst>
+                </a:gridCol>
+                <a:gridCol w="5975062">
+                  <a:extLst>
+                    <a:ext uri="{9D8B030D-6E8A-4147-A177-3AD203B41FA5}">
+                      <a16:colId xmlns:a16="http://schemas.microsoft.com/office/drawing/2014/main" val="644144632"/>
+                    </a:ext>
+                  </a:extLst>
+                </a:gridCol>
+              </a:tblGrid>
+              <a:tr h="370840">
+                <a:tc>
+                  <a:txBody>
+                    <a:bodyPr/>
+                    <a:lstStyle/>
+                    <a:p>
+                      <a:pPr algn="ctr" latinLnBrk="1"/>
+                      <a:r>
+                        <a:rPr lang="ko-KR" altLang="en-US" dirty="0" err="1">
+                          <a:solidFill>
+                            <a:schemeClr val="tx1"/>
+                          </a:solidFill>
+                        </a:rPr>
+                        <a:t>스탯</a:t>
+                      </a:r>
+                      <a:endParaRPr lang="ko-KR" altLang="en-US" dirty="0">
+                        <a:solidFill>
+                          <a:schemeClr val="tx1"/>
+                        </a:solidFill>
+                      </a:endParaRPr>
+                    </a:p>
+                  </a:txBody>
+                  <a:tcPr anchor="ctr">
+                    <a:lnL w="12700" cap="flat" cmpd="sng" algn="ctr">
+                      <a:solidFill>
+                        <a:schemeClr val="tx1"/>
+                      </a:solidFill>
+                      <a:prstDash val="solid"/>
+                      <a:round/>
+                      <a:headEnd type="none" w="med" len="med"/>
+                      <a:tailEnd type="none" w="med" len="med"/>
+                    </a:lnL>
+                    <a:lnR w="12700" cap="flat" cmpd="sng" algn="ctr">
+                      <a:solidFill>
+                        <a:schemeClr val="tx1"/>
+                      </a:solidFill>
+                      <a:prstDash val="solid"/>
+                      <a:round/>
+                      <a:headEnd type="none" w="med" len="med"/>
+                      <a:tailEnd type="none" w="med" len="med"/>
+                    </a:lnR>
+                    <a:lnT w="12700" cap="flat" cmpd="sng" algn="ctr">
+                      <a:solidFill>
+                        <a:schemeClr val="tx1"/>
+                      </a:solidFill>
+                      <a:prstDash val="solid"/>
+                      <a:round/>
+                      <a:headEnd type="none" w="med" len="med"/>
+                      <a:tailEnd type="none" w="med" len="med"/>
+                    </a:lnT>
+                    <a:lnB w="12700" cap="flat" cmpd="sng" algn="ctr">
+                      <a:solidFill>
+                        <a:schemeClr val="tx1"/>
+                      </a:solidFill>
+                      <a:prstDash val="solid"/>
+                      <a:round/>
+                      <a:headEnd type="none" w="med" len="med"/>
+                      <a:tailEnd type="none" w="med" len="med"/>
+                    </a:lnB>
+                    <a:solidFill>
+                      <a:schemeClr val="bg2">
+                        <a:lumMod val="75000"/>
+                      </a:schemeClr>
+                    </a:solidFill>
+                  </a:tcPr>
+                </a:tc>
+                <a:tc>
+                  <a:txBody>
+                    <a:bodyPr/>
+                    <a:lstStyle/>
+                    <a:p>
+                      <a:pPr algn="ctr" latinLnBrk="1"/>
+                      <a:r>
+                        <a:rPr lang="ko-KR" altLang="en-US" dirty="0">
+                          <a:solidFill>
+                            <a:schemeClr val="tx1"/>
+                          </a:solidFill>
+                        </a:rPr>
+                        <a:t>값</a:t>
+                      </a:r>
+                    </a:p>
+                  </a:txBody>
+                  <a:tcPr anchor="ctr">
+                    <a:lnL w="12700" cap="flat" cmpd="sng" algn="ctr">
+                      <a:solidFill>
+                        <a:schemeClr val="tx1"/>
+                      </a:solidFill>
+                      <a:prstDash val="solid"/>
+                      <a:round/>
+                      <a:headEnd type="none" w="med" len="med"/>
+                      <a:tailEnd type="none" w="med" len="med"/>
+                    </a:lnL>
+                    <a:lnR w="12700" cap="flat" cmpd="sng" algn="ctr">
+                      <a:solidFill>
+                        <a:schemeClr val="tx1"/>
+                      </a:solidFill>
+                      <a:prstDash val="solid"/>
+                      <a:round/>
+                      <a:headEnd type="none" w="med" len="med"/>
+                      <a:tailEnd type="none" w="med" len="med"/>
+                    </a:lnR>
+                    <a:lnT w="12700" cap="flat" cmpd="sng" algn="ctr">
+                      <a:solidFill>
+                        <a:schemeClr val="tx1"/>
+                      </a:solidFill>
+                      <a:prstDash val="solid"/>
+                      <a:round/>
+                      <a:headEnd type="none" w="med" len="med"/>
+                      <a:tailEnd type="none" w="med" len="med"/>
+                    </a:lnT>
+                    <a:lnB w="12700" cap="flat" cmpd="sng" algn="ctr">
+                      <a:solidFill>
+                        <a:schemeClr val="tx1"/>
+                      </a:solidFill>
+                      <a:prstDash val="solid"/>
+                      <a:round/>
+                      <a:headEnd type="none" w="med" len="med"/>
+                      <a:tailEnd type="none" w="med" len="med"/>
+                    </a:lnB>
+                    <a:solidFill>
+                      <a:schemeClr val="bg2">
+                        <a:lumMod val="75000"/>
+                      </a:schemeClr>
+                    </a:solidFill>
+                  </a:tcPr>
+                </a:tc>
+                <a:tc>
+                  <a:txBody>
+                    <a:bodyPr/>
+                    <a:lstStyle/>
+                    <a:p>
+                      <a:pPr algn="ctr" latinLnBrk="1"/>
+                      <a:r>
+                        <a:rPr lang="ko-KR" altLang="en-US" dirty="0">
+                          <a:solidFill>
+                            <a:schemeClr val="tx1"/>
+                          </a:solidFill>
+                        </a:rPr>
+                        <a:t>설명</a:t>
+                      </a:r>
+                    </a:p>
+                  </a:txBody>
+                  <a:tcPr anchor="ctr">
+                    <a:lnL w="12700" cap="flat" cmpd="sng" algn="ctr">
+                      <a:solidFill>
+                        <a:schemeClr val="tx1"/>
+                      </a:solidFill>
+                      <a:prstDash val="solid"/>
+                      <a:round/>
+                      <a:headEnd type="none" w="med" len="med"/>
+                      <a:tailEnd type="none" w="med" len="med"/>
+                    </a:lnL>
+                    <a:lnR w="12700" cap="flat" cmpd="sng" algn="ctr">
+                      <a:solidFill>
+                        <a:schemeClr val="tx1"/>
+                      </a:solidFill>
+                      <a:prstDash val="solid"/>
+                      <a:round/>
+                      <a:headEnd type="none" w="med" len="med"/>
+                      <a:tailEnd type="none" w="med" len="med"/>
+                    </a:lnR>
+                    <a:lnT w="12700" cap="flat" cmpd="sng" algn="ctr">
+                      <a:solidFill>
+                        <a:schemeClr val="tx1"/>
+                      </a:solidFill>
+                      <a:prstDash val="solid"/>
+                      <a:round/>
+                      <a:headEnd type="none" w="med" len="med"/>
+                      <a:tailEnd type="none" w="med" len="med"/>
+                    </a:lnT>
+                    <a:lnB w="12700" cap="flat" cmpd="sng" algn="ctr">
+                      <a:solidFill>
+                        <a:schemeClr val="tx1"/>
+                      </a:solidFill>
+                      <a:prstDash val="solid"/>
+                      <a:round/>
+                      <a:headEnd type="none" w="med" len="med"/>
+                      <a:tailEnd type="none" w="med" len="med"/>
+                    </a:lnB>
+                    <a:solidFill>
+                      <a:schemeClr val="bg2">
+                        <a:lumMod val="75000"/>
+                      </a:schemeClr>
+                    </a:solidFill>
+                  </a:tcPr>
+                </a:tc>
+                <a:extLst>
+                  <a:ext uri="{0D108BD9-81ED-4DB2-BD59-A6C34878D82A}">
+                    <a16:rowId xmlns:a16="http://schemas.microsoft.com/office/drawing/2014/main" val="1862464088"/>
+                  </a:ext>
+                </a:extLst>
+              </a:tr>
+              <a:tr h="370840">
+                <a:tc>
+                  <a:txBody>
+                    <a:bodyPr/>
+                    <a:lstStyle/>
+                    <a:p>
+                      <a:pPr algn="ctr" latinLnBrk="1"/>
+                      <a:r>
+                        <a:rPr lang="en-US" altLang="ko-KR" dirty="0">
+                          <a:solidFill>
+                            <a:schemeClr val="tx1"/>
+                          </a:solidFill>
+                        </a:rPr>
+                        <a:t>HP</a:t>
+                      </a:r>
+                    </a:p>
+                  </a:txBody>
+                  <a:tcPr anchor="ctr">
+                    <a:lnL w="12700" cap="flat" cmpd="sng" algn="ctr">
+                      <a:solidFill>
+                        <a:schemeClr val="tx1"/>
+                      </a:solidFill>
+                      <a:prstDash val="solid"/>
+                      <a:round/>
+                      <a:headEnd type="none" w="med" len="med"/>
+                      <a:tailEnd type="none" w="med" len="med"/>
+                    </a:lnL>
+                    <a:lnR w="12700" cap="flat" cmpd="sng" algn="ctr">
+                      <a:solidFill>
+                        <a:schemeClr val="tx1"/>
+                      </a:solidFill>
+                      <a:prstDash val="solid"/>
+                      <a:round/>
+                      <a:headEnd type="none" w="med" len="med"/>
+                      <a:tailEnd type="none" w="med" len="med"/>
+                    </a:lnR>
+                    <a:lnT w="12700" cap="flat" cmpd="sng" algn="ctr">
+                      <a:solidFill>
+                        <a:schemeClr val="tx1"/>
+                      </a:solidFill>
+                      <a:prstDash val="solid"/>
+                      <a:round/>
+                      <a:headEnd type="none" w="med" len="med"/>
+                      <a:tailEnd type="none" w="med" len="med"/>
+                    </a:lnT>
+                    <a:lnB w="12700" cap="flat" cmpd="sng" algn="ctr">
+                      <a:solidFill>
+                        <a:schemeClr val="tx1"/>
+                      </a:solidFill>
+                      <a:prstDash val="solid"/>
+                      <a:round/>
+                      <a:headEnd type="none" w="med" len="med"/>
+                      <a:tailEnd type="none" w="med" len="med"/>
+                    </a:lnB>
+                    <a:solidFill>
+                      <a:schemeClr val="bg2">
+                        <a:lumMod val="90000"/>
+                      </a:schemeClr>
+                    </a:solidFill>
+                  </a:tcPr>
+                </a:tc>
+                <a:tc>
+                  <a:txBody>
+                    <a:bodyPr/>
+                    <a:lstStyle/>
+                    <a:p>
+                      <a:pPr algn="ctr" latinLnBrk="1"/>
+                      <a:r>
+                        <a:rPr lang="en-US" altLang="ko-KR" dirty="0">
+                          <a:solidFill>
+                            <a:schemeClr val="tx1"/>
+                          </a:solidFill>
+                        </a:rPr>
+                        <a:t>100</a:t>
+                      </a:r>
+                      <a:endParaRPr lang="ko-KR" altLang="en-US" dirty="0">
+                        <a:solidFill>
+                          <a:schemeClr val="tx1"/>
+                        </a:solidFill>
+                      </a:endParaRPr>
+                    </a:p>
+                  </a:txBody>
+                  <a:tcPr anchor="ctr">
+                    <a:lnL w="12700" cap="flat" cmpd="sng" algn="ctr">
+                      <a:solidFill>
+                        <a:schemeClr val="tx1"/>
+                      </a:solidFill>
+                      <a:prstDash val="solid"/>
+                      <a:round/>
+                      <a:headEnd type="none" w="med" len="med"/>
+                      <a:tailEnd type="none" w="med" len="med"/>
+                    </a:lnL>
+                    <a:lnR w="12700" cap="flat" cmpd="sng" algn="ctr">
+                      <a:solidFill>
+                        <a:schemeClr val="tx1"/>
+                      </a:solidFill>
+                      <a:prstDash val="solid"/>
+                      <a:round/>
+                      <a:headEnd type="none" w="med" len="med"/>
+                      <a:tailEnd type="none" w="med" len="med"/>
+                    </a:lnR>
+                    <a:lnT w="12700" cap="flat" cmpd="sng" algn="ctr">
+                      <a:solidFill>
+                        <a:schemeClr val="tx1"/>
+                      </a:solidFill>
+                      <a:prstDash val="solid"/>
+                      <a:round/>
+                      <a:headEnd type="none" w="med" len="med"/>
+                      <a:tailEnd type="none" w="med" len="med"/>
+                    </a:lnT>
+                    <a:lnB w="12700" cap="flat" cmpd="sng" algn="ctr">
+                      <a:solidFill>
+                        <a:schemeClr val="tx1"/>
+                      </a:solidFill>
+                      <a:prstDash val="solid"/>
+                      <a:round/>
+                      <a:headEnd type="none" w="med" len="med"/>
+                      <a:tailEnd type="none" w="med" len="med"/>
+                    </a:lnB>
+                    <a:solidFill>
+                      <a:schemeClr val="bg1"/>
+                    </a:solidFill>
+                  </a:tcPr>
+                </a:tc>
+                <a:tc>
+                  <a:txBody>
+                    <a:bodyPr/>
+                    <a:lstStyle/>
+                    <a:p>
+                      <a:pPr algn="l" latinLnBrk="1"/>
+                      <a:endParaRPr lang="ko-KR" altLang="en-US" dirty="0">
+                        <a:solidFill>
+                          <a:schemeClr val="tx1"/>
+                        </a:solidFill>
+                      </a:endParaRPr>
+                    </a:p>
+                  </a:txBody>
+                  <a:tcPr anchor="ctr">
+                    <a:lnL w="12700" cap="flat" cmpd="sng" algn="ctr">
+                      <a:solidFill>
+                        <a:schemeClr val="tx1"/>
+                      </a:solidFill>
+                      <a:prstDash val="solid"/>
+                      <a:round/>
+                      <a:headEnd type="none" w="med" len="med"/>
+                      <a:tailEnd type="none" w="med" len="med"/>
+                    </a:lnL>
+                    <a:lnR w="12700" cap="flat" cmpd="sng" algn="ctr">
+                      <a:solidFill>
+                        <a:schemeClr val="tx1"/>
+                      </a:solidFill>
+                      <a:prstDash val="solid"/>
+                      <a:round/>
+                      <a:headEnd type="none" w="med" len="med"/>
+                      <a:tailEnd type="none" w="med" len="med"/>
+                    </a:lnR>
+                    <a:lnT w="12700" cap="flat" cmpd="sng" algn="ctr">
+                      <a:solidFill>
+                        <a:schemeClr val="tx1"/>
+                      </a:solidFill>
+                      <a:prstDash val="solid"/>
+                      <a:round/>
+                      <a:headEnd type="none" w="med" len="med"/>
+                      <a:tailEnd type="none" w="med" len="med"/>
+                    </a:lnT>
+                    <a:lnB w="12700" cap="flat" cmpd="sng" algn="ctr">
+                      <a:solidFill>
+                        <a:schemeClr val="tx1"/>
+                      </a:solidFill>
+                      <a:prstDash val="solid"/>
+                      <a:round/>
+                      <a:headEnd type="none" w="med" len="med"/>
+                      <a:tailEnd type="none" w="med" len="med"/>
+                    </a:lnB>
+                    <a:solidFill>
+                      <a:schemeClr val="bg1"/>
+                    </a:solidFill>
+                  </a:tcPr>
+                </a:tc>
+                <a:extLst>
+                  <a:ext uri="{0D108BD9-81ED-4DB2-BD59-A6C34878D82A}">
+                    <a16:rowId xmlns:a16="http://schemas.microsoft.com/office/drawing/2014/main" val="992783964"/>
+                  </a:ext>
+                </a:extLst>
+              </a:tr>
+              <a:tr h="370840">
+                <a:tc>
+                  <a:txBody>
+                    <a:bodyPr/>
+                    <a:lstStyle/>
+                    <a:p>
+                      <a:pPr algn="ctr" latinLnBrk="1"/>
+                      <a:r>
+                        <a:rPr lang="ko-KR" altLang="en-US" dirty="0">
+                          <a:solidFill>
+                            <a:schemeClr val="tx1"/>
+                          </a:solidFill>
+                        </a:rPr>
+                        <a:t>이동 속도 </a:t>
+                      </a:r>
+                      <a:r>
+                        <a:rPr lang="en-US" altLang="ko-KR" dirty="0">
+                          <a:solidFill>
+                            <a:schemeClr val="tx1"/>
+                          </a:solidFill>
+                        </a:rPr>
+                        <a:t>(m/s)</a:t>
+                      </a:r>
+                      <a:endParaRPr lang="ko-KR" altLang="en-US" dirty="0">
+                        <a:solidFill>
+                          <a:schemeClr val="tx1"/>
+                        </a:solidFill>
+                      </a:endParaRPr>
+                    </a:p>
+                  </a:txBody>
+                  <a:tcPr anchor="ctr">
+                    <a:lnL w="12700" cap="flat" cmpd="sng" algn="ctr">
+                      <a:solidFill>
+                        <a:schemeClr val="tx1"/>
+                      </a:solidFill>
+                      <a:prstDash val="solid"/>
+                      <a:round/>
+                      <a:headEnd type="none" w="med" len="med"/>
+                      <a:tailEnd type="none" w="med" len="med"/>
+                    </a:lnL>
+                    <a:lnR w="12700" cap="flat" cmpd="sng" algn="ctr">
+                      <a:solidFill>
+                        <a:schemeClr val="tx1"/>
+                      </a:solidFill>
+                      <a:prstDash val="solid"/>
+                      <a:round/>
+                      <a:headEnd type="none" w="med" len="med"/>
+                      <a:tailEnd type="none" w="med" len="med"/>
+                    </a:lnR>
+                    <a:lnT w="12700" cap="flat" cmpd="sng" algn="ctr">
+                      <a:solidFill>
+                        <a:schemeClr val="tx1"/>
+                      </a:solidFill>
+                      <a:prstDash val="solid"/>
+                      <a:round/>
+                      <a:headEnd type="none" w="med" len="med"/>
+                      <a:tailEnd type="none" w="med" len="med"/>
+                    </a:lnT>
+                    <a:lnB w="12700" cap="flat" cmpd="sng" algn="ctr">
+                      <a:solidFill>
+                        <a:schemeClr val="tx1"/>
+                      </a:solidFill>
+                      <a:prstDash val="solid"/>
+                      <a:round/>
+                      <a:headEnd type="none" w="med" len="med"/>
+                      <a:tailEnd type="none" w="med" len="med"/>
+                    </a:lnB>
+                    <a:solidFill>
+                      <a:schemeClr val="bg2">
+                        <a:lumMod val="90000"/>
+                      </a:schemeClr>
+                    </a:solidFill>
+                  </a:tcPr>
+                </a:tc>
+                <a:tc>
+                  <a:txBody>
+                    <a:bodyPr/>
+                    <a:lstStyle/>
+                    <a:p>
+                      <a:pPr algn="ctr" latinLnBrk="1"/>
+                      <a:r>
+                        <a:rPr lang="en-US" altLang="ko-KR" dirty="0">
+                          <a:solidFill>
+                            <a:schemeClr val="tx1"/>
+                          </a:solidFill>
+                        </a:rPr>
+                        <a:t>5</a:t>
+                      </a:r>
+                      <a:endParaRPr lang="ko-KR" altLang="en-US" dirty="0">
+                        <a:solidFill>
+                          <a:schemeClr val="tx1"/>
+                        </a:solidFill>
+                      </a:endParaRPr>
+                    </a:p>
+                  </a:txBody>
+                  <a:tcPr anchor="ctr">
+                    <a:lnL w="12700" cap="flat" cmpd="sng" algn="ctr">
+                      <a:solidFill>
+                        <a:schemeClr val="tx1"/>
+                      </a:solidFill>
+                      <a:prstDash val="solid"/>
+                      <a:round/>
+                      <a:headEnd type="none" w="med" len="med"/>
+                      <a:tailEnd type="none" w="med" len="med"/>
+                    </a:lnL>
+                    <a:lnR w="12700" cap="flat" cmpd="sng" algn="ctr">
+                      <a:solidFill>
+                        <a:schemeClr val="tx1"/>
+                      </a:solidFill>
+                      <a:prstDash val="solid"/>
+                      <a:round/>
+                      <a:headEnd type="none" w="med" len="med"/>
+                      <a:tailEnd type="none" w="med" len="med"/>
+                    </a:lnR>
+                    <a:lnT w="12700" cap="flat" cmpd="sng" algn="ctr">
+                      <a:solidFill>
+                        <a:schemeClr val="tx1"/>
+                      </a:solidFill>
+                      <a:prstDash val="solid"/>
+                      <a:round/>
+                      <a:headEnd type="none" w="med" len="med"/>
+                      <a:tailEnd type="none" w="med" len="med"/>
+                    </a:lnT>
+                    <a:lnB w="12700" cap="flat" cmpd="sng" algn="ctr">
+                      <a:solidFill>
+                        <a:schemeClr val="tx1"/>
+                      </a:solidFill>
+                      <a:prstDash val="solid"/>
+                      <a:round/>
+                      <a:headEnd type="none" w="med" len="med"/>
+                      <a:tailEnd type="none" w="med" len="med"/>
+                    </a:lnB>
+                    <a:solidFill>
+                      <a:schemeClr val="bg1"/>
+                    </a:solidFill>
+                  </a:tcPr>
+                </a:tc>
+                <a:tc>
+                  <a:txBody>
+                    <a:bodyPr/>
+                    <a:lstStyle/>
+                    <a:p>
+                      <a:pPr algn="l" latinLnBrk="1"/>
+                      <a:endParaRPr lang="ko-KR" altLang="en-US" dirty="0">
+                        <a:solidFill>
+                          <a:schemeClr val="tx1"/>
+                        </a:solidFill>
+                      </a:endParaRPr>
+                    </a:p>
+                  </a:txBody>
+                  <a:tcPr anchor="ctr">
+                    <a:lnL w="12700" cap="flat" cmpd="sng" algn="ctr">
+                      <a:solidFill>
+                        <a:schemeClr val="tx1"/>
+                      </a:solidFill>
+                      <a:prstDash val="solid"/>
+                      <a:round/>
+                      <a:headEnd type="none" w="med" len="med"/>
+                      <a:tailEnd type="none" w="med" len="med"/>
+                    </a:lnL>
+                    <a:lnR w="12700" cap="flat" cmpd="sng" algn="ctr">
+                      <a:solidFill>
+                        <a:schemeClr val="tx1"/>
+                      </a:solidFill>
+                      <a:prstDash val="solid"/>
+                      <a:round/>
+                      <a:headEnd type="none" w="med" len="med"/>
+                      <a:tailEnd type="none" w="med" len="med"/>
+                    </a:lnR>
+                    <a:lnT w="12700" cap="flat" cmpd="sng" algn="ctr">
+                      <a:solidFill>
+                        <a:schemeClr val="tx1"/>
+                      </a:solidFill>
+                      <a:prstDash val="solid"/>
+                      <a:round/>
+                      <a:headEnd type="none" w="med" len="med"/>
+                      <a:tailEnd type="none" w="med" len="med"/>
+                    </a:lnT>
+                    <a:lnB w="12700" cap="flat" cmpd="sng" algn="ctr">
+                      <a:solidFill>
+                        <a:schemeClr val="tx1"/>
+                      </a:solidFill>
+                      <a:prstDash val="solid"/>
+                      <a:round/>
+                      <a:headEnd type="none" w="med" len="med"/>
+                      <a:tailEnd type="none" w="med" len="med"/>
+                    </a:lnB>
+                    <a:solidFill>
+                      <a:schemeClr val="bg1"/>
+                    </a:solidFill>
+                  </a:tcPr>
+                </a:tc>
+                <a:extLst>
+                  <a:ext uri="{0D108BD9-81ED-4DB2-BD59-A6C34878D82A}">
+                    <a16:rowId xmlns:a16="http://schemas.microsoft.com/office/drawing/2014/main" val="4165556141"/>
+                  </a:ext>
+                </a:extLst>
+              </a:tr>
+            </a:tbl>
+          </a:graphicData>
+        </a:graphic>
+      </p:graphicFrame>
+    </p:spTree>
+    <p:extLst>
+      <p:ext uri="{BB962C8B-B14F-4D97-AF65-F5344CB8AC3E}">
+        <p14:creationId xmlns:p14="http://schemas.microsoft.com/office/powerpoint/2010/main" val="3387152185"/>
+      </p:ext>
+    </p:extLst>
+  </p:cSld>
+  <p:clrMapOvr>
+    <a:masterClrMapping/>
+  </p:clrMapOvr>
+</p:sld>
+</file>
+
+<file path=ppt/slides/slide8.xml><?xml version="1.0" encoding="utf-8"?>
+<p:sld xmlns:a="http://schemas.openxmlformats.org/drawingml/2006/main" xmlns:r="http://schemas.openxmlformats.org/officeDocument/2006/relationships" xmlns:p="http://schemas.openxmlformats.org/presentationml/2006/main">
+  <p:cSld>
+    <p:spTree>
+      <p:nvGrpSpPr>
+        <p:cNvPr id="1" name=""/>
+        <p:cNvGrpSpPr/>
+        <p:nvPr/>
+      </p:nvGrpSpPr>
+      <p:grpSpPr>
+        <a:xfrm>
+          <a:off x="0" y="0"/>
+          <a:ext cx="0" cy="0"/>
+          <a:chOff x="0" y="0"/>
+          <a:chExt cx="0" cy="0"/>
+        </a:xfrm>
+      </p:grpSpPr>
+      <p:sp>
+        <p:nvSpPr>
+          <p:cNvPr id="2" name="텍스트 개체 틀 1">
+            <a:extLst>
+              <a:ext uri="{FF2B5EF4-FFF2-40B4-BE49-F238E27FC236}">
+                <a16:creationId xmlns:a16="http://schemas.microsoft.com/office/drawing/2014/main" id="{FAA54CC2-59AB-0E80-3695-A9D923BB04AC}"/>
+              </a:ext>
+            </a:extLst>
+          </p:cNvPr>
+          <p:cNvSpPr>
+            <a:spLocks noGrp="1"/>
+          </p:cNvSpPr>
+          <p:nvPr>
+            <p:ph type="body" sz="quarter" idx="13"/>
+          </p:nvPr>
+        </p:nvSpPr>
+        <p:spPr>
+          <a:xfrm>
+            <a:off x="0" y="654689"/>
+            <a:ext cx="1600200" cy="2349500"/>
+          </a:xfrm>
+        </p:spPr>
+        <p:txBody>
+          <a:bodyPr/>
+          <a:lstStyle/>
+          <a:p>
+            <a:r>
+              <a:rPr lang="ko-KR" altLang="en-US" b="1" dirty="0" err="1"/>
+              <a:t>스탯</a:t>
+            </a:r>
+            <a:endParaRPr lang="en-US" altLang="ko-KR" b="1" dirty="0"/>
+          </a:p>
+          <a:p>
+            <a:r>
+              <a:rPr lang="en-US" altLang="ko-KR" dirty="0"/>
+              <a:t>FSM</a:t>
+            </a:r>
+          </a:p>
+          <a:p>
+            <a:r>
+              <a:rPr lang="ko-KR" altLang="en-US" dirty="0"/>
+              <a:t>스킬</a:t>
+            </a:r>
+          </a:p>
+        </p:txBody>
+      </p:sp>
+      <p:sp>
+        <p:nvSpPr>
+          <p:cNvPr id="3" name="제목 2">
+            <a:extLst>
+              <a:ext uri="{FF2B5EF4-FFF2-40B4-BE49-F238E27FC236}">
+                <a16:creationId xmlns:a16="http://schemas.microsoft.com/office/drawing/2014/main" id="{02315CFE-E06C-070F-2D5C-4B65B4BA4C52}"/>
+              </a:ext>
+            </a:extLst>
+          </p:cNvPr>
+          <p:cNvSpPr>
+            <a:spLocks noGrp="1"/>
+          </p:cNvSpPr>
+          <p:nvPr>
+            <p:ph type="title"/>
+          </p:nvPr>
+        </p:nvSpPr>
+        <p:spPr>
+          <a:xfrm>
+            <a:off x="0" y="119158"/>
+            <a:ext cx="1600200" cy="535531"/>
+          </a:xfrm>
+        </p:spPr>
+        <p:txBody>
+          <a:bodyPr/>
+          <a:lstStyle/>
+          <a:p>
+            <a:r>
+              <a:rPr lang="ko-KR" altLang="en-US" dirty="0"/>
+              <a:t>거미</a:t>
+            </a:r>
+          </a:p>
+        </p:txBody>
+      </p:sp>
+      <p:sp>
+        <p:nvSpPr>
+          <p:cNvPr id="4" name="내용 개체 틀 3">
+            <a:extLst>
+              <a:ext uri="{FF2B5EF4-FFF2-40B4-BE49-F238E27FC236}">
+                <a16:creationId xmlns:a16="http://schemas.microsoft.com/office/drawing/2014/main" id="{35A0BB1C-32DD-7B4F-2286-F3A98C04D97A}"/>
+              </a:ext>
+            </a:extLst>
+          </p:cNvPr>
+          <p:cNvSpPr>
+            <a:spLocks noGrp="1"/>
+          </p:cNvSpPr>
+          <p:nvPr>
+            <p:ph idx="1"/>
+          </p:nvPr>
+        </p:nvSpPr>
+        <p:spPr/>
+        <p:txBody>
+          <a:bodyPr/>
+          <a:lstStyle/>
+          <a:p>
+            <a:r>
+              <a:rPr lang="en-US" altLang="ko-KR" dirty="0"/>
+              <a:t>HP, </a:t>
+            </a:r>
+            <a:r>
+              <a:rPr lang="ko-KR" altLang="en-US" dirty="0"/>
+              <a:t>이동속도</a:t>
+            </a:r>
+            <a:r>
+              <a:rPr lang="en-US" altLang="ko-KR" dirty="0"/>
+              <a:t>, </a:t>
+            </a:r>
+            <a:r>
+              <a:rPr lang="ko-KR" altLang="en-US" dirty="0"/>
+              <a:t>공격속도</a:t>
+            </a:r>
+            <a:r>
+              <a:rPr lang="en-US" altLang="ko-KR" dirty="0"/>
+              <a:t>, </a:t>
+            </a:r>
+            <a:r>
+              <a:rPr lang="ko-KR" altLang="en-US" dirty="0"/>
+              <a:t>데미지</a:t>
+            </a:r>
+            <a:r>
+              <a:rPr lang="en-US" altLang="ko-KR" dirty="0"/>
+              <a:t>, </a:t>
+            </a:r>
+            <a:r>
+              <a:rPr lang="ko-KR" altLang="en-US" dirty="0"/>
+              <a:t>몬스터</a:t>
+            </a:r>
+            <a:r>
+              <a:rPr lang="en-US" altLang="ko-KR" dirty="0"/>
+              <a:t>1 </a:t>
+            </a:r>
+            <a:r>
+              <a:rPr lang="ko-KR" altLang="en-US" dirty="0"/>
+              <a:t>스킬</a:t>
+            </a:r>
+            <a:endParaRPr lang="en-US" altLang="ko-KR" dirty="0"/>
+          </a:p>
+          <a:p>
+            <a:endParaRPr lang="ko-KR" altLang="en-US" dirty="0"/>
+          </a:p>
+          <a:p>
+            <a:endParaRPr lang="ko-KR" altLang="en-US" dirty="0"/>
+          </a:p>
+        </p:txBody>
+      </p:sp>
+      <p:sp>
+        <p:nvSpPr>
+          <p:cNvPr id="5" name="슬라이드 번호 개체 틀 4">
+            <a:extLst>
+              <a:ext uri="{FF2B5EF4-FFF2-40B4-BE49-F238E27FC236}">
+                <a16:creationId xmlns:a16="http://schemas.microsoft.com/office/drawing/2014/main" id="{67BAB029-49CE-01EE-23B6-0D37813A3BE7}"/>
+              </a:ext>
+            </a:extLst>
+          </p:cNvPr>
+          <p:cNvSpPr>
+            <a:spLocks noGrp="1"/>
+          </p:cNvSpPr>
+          <p:nvPr>
+            <p:ph type="sldNum" sz="quarter" idx="12"/>
+          </p:nvPr>
+        </p:nvSpPr>
+        <p:spPr/>
+        <p:txBody>
+          <a:bodyPr/>
+          <a:lstStyle/>
+          <a:p>
+            <a:fld id="{2A226FEB-661D-4181-84CB-C53DCFE1931A}" type="slidenum">
+              <a:rPr lang="ko-KR" altLang="en-US" smtClean="0"/>
+              <a:t>8</a:t>
+            </a:fld>
+            <a:endParaRPr lang="ko-KR" altLang="en-US"/>
+          </a:p>
+        </p:txBody>
+      </p:sp>
+      <p:graphicFrame>
+        <p:nvGraphicFramePr>
+          <p:cNvPr id="6" name="표 5">
+            <a:extLst>
+              <a:ext uri="{FF2B5EF4-FFF2-40B4-BE49-F238E27FC236}">
+                <a16:creationId xmlns:a16="http://schemas.microsoft.com/office/drawing/2014/main" id="{AE1875A4-B894-7A56-CFDD-613522DA0E28}"/>
+              </a:ext>
+            </a:extLst>
+          </p:cNvPr>
+          <p:cNvGraphicFramePr>
+            <a:graphicFrameLocks noGrp="1"/>
+          </p:cNvGraphicFramePr>
+          <p:nvPr>
+            <p:extLst>
+              <p:ext uri="{D42A27DB-BD31-4B8C-83A1-F6EECF244321}">
+                <p14:modId xmlns:p14="http://schemas.microsoft.com/office/powerpoint/2010/main" val="1091865970"/>
+              </p:ext>
+            </p:extLst>
+          </p:nvPr>
+        </p:nvGraphicFramePr>
+        <p:xfrm>
+          <a:off x="2032000" y="719666"/>
+          <a:ext cx="8923216" cy="5323840"/>
+        </p:xfrm>
+        <a:graphic>
+          <a:graphicData uri="http://schemas.openxmlformats.org/drawingml/2006/table">
+            <a:tbl>
+              <a:tblPr firstRow="1" bandRow="1">
+                <a:tableStyleId>{5C22544A-7EE6-4342-B048-85BDC9FD1C3A}</a:tableStyleId>
+              </a:tblPr>
+              <a:tblGrid>
+                <a:gridCol w="1985963">
+                  <a:extLst>
+                    <a:ext uri="{9D8B030D-6E8A-4147-A177-3AD203B41FA5}">
+                      <a16:colId xmlns:a16="http://schemas.microsoft.com/office/drawing/2014/main" val="1240864632"/>
+                    </a:ext>
+                  </a:extLst>
+                </a:gridCol>
+                <a:gridCol w="962191">
+                  <a:extLst>
+                    <a:ext uri="{9D8B030D-6E8A-4147-A177-3AD203B41FA5}">
+                      <a16:colId xmlns:a16="http://schemas.microsoft.com/office/drawing/2014/main" val="2669217487"/>
+                    </a:ext>
+                  </a:extLst>
+                </a:gridCol>
+                <a:gridCol w="5975062">
+                  <a:extLst>
+                    <a:ext uri="{9D8B030D-6E8A-4147-A177-3AD203B41FA5}">
+                      <a16:colId xmlns:a16="http://schemas.microsoft.com/office/drawing/2014/main" val="644144632"/>
+                    </a:ext>
+                  </a:extLst>
+                </a:gridCol>
+              </a:tblGrid>
+              <a:tr h="370840">
+                <a:tc>
+                  <a:txBody>
+                    <a:bodyPr/>
+                    <a:lstStyle/>
+                    <a:p>
+                      <a:pPr algn="ctr" latinLnBrk="1"/>
+                      <a:r>
+                        <a:rPr lang="ko-KR" altLang="en-US" dirty="0" err="1">
+                          <a:solidFill>
+                            <a:schemeClr val="tx1"/>
+                          </a:solidFill>
+                        </a:rPr>
+                        <a:t>스탯</a:t>
+                      </a:r>
+                      <a:endParaRPr lang="ko-KR" altLang="en-US" dirty="0">
+                        <a:solidFill>
+                          <a:schemeClr val="tx1"/>
+                        </a:solidFill>
+                      </a:endParaRPr>
+                    </a:p>
+                  </a:txBody>
+                  <a:tcPr anchor="ctr">
+                    <a:lnL w="12700" cap="flat" cmpd="sng" algn="ctr">
+                      <a:solidFill>
+                        <a:schemeClr val="tx1"/>
+                      </a:solidFill>
+                      <a:prstDash val="solid"/>
+                      <a:round/>
+                      <a:headEnd type="none" w="med" len="med"/>
+                      <a:tailEnd type="none" w="med" len="med"/>
+                    </a:lnL>
+                    <a:lnR w="12700" cap="flat" cmpd="sng" algn="ctr">
+                      <a:solidFill>
+                        <a:schemeClr val="tx1"/>
+                      </a:solidFill>
+                      <a:prstDash val="solid"/>
+                      <a:round/>
+                      <a:headEnd type="none" w="med" len="med"/>
+                      <a:tailEnd type="none" w="med" len="med"/>
+                    </a:lnR>
+                    <a:lnT w="12700" cap="flat" cmpd="sng" algn="ctr">
+                      <a:solidFill>
+                        <a:schemeClr val="tx1"/>
+                      </a:solidFill>
+                      <a:prstDash val="solid"/>
+                      <a:round/>
+                      <a:headEnd type="none" w="med" len="med"/>
+                      <a:tailEnd type="none" w="med" len="med"/>
+                    </a:lnT>
+                    <a:lnB w="12700" cap="flat" cmpd="sng" algn="ctr">
+                      <a:solidFill>
+                        <a:schemeClr val="tx1"/>
+                      </a:solidFill>
+                      <a:prstDash val="solid"/>
+                      <a:round/>
+                      <a:headEnd type="none" w="med" len="med"/>
+                      <a:tailEnd type="none" w="med" len="med"/>
+                    </a:lnB>
+                    <a:solidFill>
+                      <a:schemeClr val="bg2">
+                        <a:lumMod val="75000"/>
+                      </a:schemeClr>
+                    </a:solidFill>
+                  </a:tcPr>
+                </a:tc>
+                <a:tc>
+                  <a:txBody>
+                    <a:bodyPr/>
+                    <a:lstStyle/>
+                    <a:p>
+                      <a:pPr algn="ctr" latinLnBrk="1"/>
+                      <a:r>
+                        <a:rPr lang="ko-KR" altLang="en-US" dirty="0">
+                          <a:solidFill>
+                            <a:schemeClr val="tx1"/>
+                          </a:solidFill>
+                        </a:rPr>
+                        <a:t>값</a:t>
+                      </a:r>
+                    </a:p>
+                  </a:txBody>
+                  <a:tcPr anchor="ctr">
+                    <a:lnL w="12700" cap="flat" cmpd="sng" algn="ctr">
+                      <a:solidFill>
+                        <a:schemeClr val="tx1"/>
+                      </a:solidFill>
+                      <a:prstDash val="solid"/>
+                      <a:round/>
+                      <a:headEnd type="none" w="med" len="med"/>
+                      <a:tailEnd type="none" w="med" len="med"/>
+                    </a:lnL>
+                    <a:lnR w="12700" cap="flat" cmpd="sng" algn="ctr">
+                      <a:solidFill>
+                        <a:schemeClr val="tx1"/>
+                      </a:solidFill>
+                      <a:prstDash val="solid"/>
+                      <a:round/>
+                      <a:headEnd type="none" w="med" len="med"/>
+                      <a:tailEnd type="none" w="med" len="med"/>
+                    </a:lnR>
+                    <a:lnT w="12700" cap="flat" cmpd="sng" algn="ctr">
+                      <a:solidFill>
+                        <a:schemeClr val="tx1"/>
+                      </a:solidFill>
+                      <a:prstDash val="solid"/>
+                      <a:round/>
+                      <a:headEnd type="none" w="med" len="med"/>
+                      <a:tailEnd type="none" w="med" len="med"/>
+                    </a:lnT>
+                    <a:lnB w="12700" cap="flat" cmpd="sng" algn="ctr">
+                      <a:solidFill>
+                        <a:schemeClr val="tx1"/>
+                      </a:solidFill>
+                      <a:prstDash val="solid"/>
+                      <a:round/>
+                      <a:headEnd type="none" w="med" len="med"/>
+                      <a:tailEnd type="none" w="med" len="med"/>
+                    </a:lnB>
+                    <a:solidFill>
+                      <a:schemeClr val="bg2">
+                        <a:lumMod val="75000"/>
+                      </a:schemeClr>
+                    </a:solidFill>
+                  </a:tcPr>
+                </a:tc>
+                <a:tc>
+                  <a:txBody>
+                    <a:bodyPr/>
+                    <a:lstStyle/>
+                    <a:p>
+                      <a:pPr algn="ctr" latinLnBrk="1"/>
+                      <a:r>
+                        <a:rPr lang="ko-KR" altLang="en-US" dirty="0">
+                          <a:solidFill>
+                            <a:schemeClr val="tx1"/>
+                          </a:solidFill>
+                        </a:rPr>
+                        <a:t>설명</a:t>
+                      </a:r>
+                    </a:p>
+                  </a:txBody>
+                  <a:tcPr anchor="ctr">
+                    <a:lnL w="12700" cap="flat" cmpd="sng" algn="ctr">
+                      <a:solidFill>
+                        <a:schemeClr val="tx1"/>
+                      </a:solidFill>
+                      <a:prstDash val="solid"/>
+                      <a:round/>
+                      <a:headEnd type="none" w="med" len="med"/>
+                      <a:tailEnd type="none" w="med" len="med"/>
+                    </a:lnL>
+                    <a:lnR w="12700" cap="flat" cmpd="sng" algn="ctr">
+                      <a:solidFill>
+                        <a:schemeClr val="tx1"/>
+                      </a:solidFill>
+                      <a:prstDash val="solid"/>
+                      <a:round/>
+                      <a:headEnd type="none" w="med" len="med"/>
+                      <a:tailEnd type="none" w="med" len="med"/>
+                    </a:lnR>
+                    <a:lnT w="12700" cap="flat" cmpd="sng" algn="ctr">
+                      <a:solidFill>
+                        <a:schemeClr val="tx1"/>
+                      </a:solidFill>
+                      <a:prstDash val="solid"/>
+                      <a:round/>
+                      <a:headEnd type="none" w="med" len="med"/>
+                      <a:tailEnd type="none" w="med" len="med"/>
+                    </a:lnT>
+                    <a:lnB w="12700" cap="flat" cmpd="sng" algn="ctr">
+                      <a:solidFill>
+                        <a:schemeClr val="tx1"/>
+                      </a:solidFill>
+                      <a:prstDash val="solid"/>
+                      <a:round/>
+                      <a:headEnd type="none" w="med" len="med"/>
+                      <a:tailEnd type="none" w="med" len="med"/>
+                    </a:lnB>
+                    <a:solidFill>
+                      <a:schemeClr val="bg2">
+                        <a:lumMod val="75000"/>
+                      </a:schemeClr>
+                    </a:solidFill>
+                  </a:tcPr>
+                </a:tc>
+                <a:extLst>
+                  <a:ext uri="{0D108BD9-81ED-4DB2-BD59-A6C34878D82A}">
+                    <a16:rowId xmlns:a16="http://schemas.microsoft.com/office/drawing/2014/main" val="1862464088"/>
+                  </a:ext>
+                </a:extLst>
+              </a:tr>
+              <a:tr h="370840">
+                <a:tc>
+                  <a:txBody>
+                    <a:bodyPr/>
+                    <a:lstStyle/>
+                    <a:p>
+                      <a:pPr algn="ctr" latinLnBrk="1"/>
+                      <a:r>
+                        <a:rPr lang="en-US" altLang="ko-KR" dirty="0">
+                          <a:solidFill>
+                            <a:schemeClr val="tx1"/>
+                          </a:solidFill>
+                        </a:rPr>
+                        <a:t>HP</a:t>
+                      </a:r>
+                    </a:p>
+                  </a:txBody>
+                  <a:tcPr anchor="ctr">
+                    <a:lnL w="12700" cap="flat" cmpd="sng" algn="ctr">
+                      <a:solidFill>
+                        <a:schemeClr val="tx1"/>
+                      </a:solidFill>
+                      <a:prstDash val="solid"/>
+                      <a:round/>
+                      <a:headEnd type="none" w="med" len="med"/>
+                      <a:tailEnd type="none" w="med" len="med"/>
+                    </a:lnL>
+                    <a:lnR w="12700" cap="flat" cmpd="sng" algn="ctr">
+                      <a:solidFill>
+                        <a:schemeClr val="tx1"/>
+                      </a:solidFill>
+                      <a:prstDash val="solid"/>
+                      <a:round/>
+                      <a:headEnd type="none" w="med" len="med"/>
+                      <a:tailEnd type="none" w="med" len="med"/>
+                    </a:lnR>
+                    <a:lnT w="12700" cap="flat" cmpd="sng" algn="ctr">
+                      <a:solidFill>
+                        <a:schemeClr val="tx1"/>
+                      </a:solidFill>
+                      <a:prstDash val="solid"/>
+                      <a:round/>
+                      <a:headEnd type="none" w="med" len="med"/>
+                      <a:tailEnd type="none" w="med" len="med"/>
+                    </a:lnT>
+                    <a:lnB w="12700" cap="flat" cmpd="sng" algn="ctr">
+                      <a:solidFill>
+                        <a:schemeClr val="tx1"/>
+                      </a:solidFill>
+                      <a:prstDash val="solid"/>
+                      <a:round/>
+                      <a:headEnd type="none" w="med" len="med"/>
+                      <a:tailEnd type="none" w="med" len="med"/>
+                    </a:lnB>
+                    <a:solidFill>
+                      <a:schemeClr val="bg2">
+                        <a:lumMod val="90000"/>
+                      </a:schemeClr>
+                    </a:solidFill>
+                  </a:tcPr>
+                </a:tc>
+                <a:tc>
+                  <a:txBody>
+                    <a:bodyPr/>
+                    <a:lstStyle/>
+                    <a:p>
+                      <a:pPr algn="ctr" latinLnBrk="1"/>
+                      <a:r>
+                        <a:rPr lang="en-US" altLang="ko-KR" dirty="0">
+                          <a:solidFill>
+                            <a:schemeClr val="tx1"/>
+                          </a:solidFill>
+                        </a:rPr>
+                        <a:t>80</a:t>
+                      </a:r>
+                      <a:endParaRPr lang="ko-KR" altLang="en-US" dirty="0">
+                        <a:solidFill>
+                          <a:schemeClr val="tx1"/>
+                        </a:solidFill>
+                      </a:endParaRPr>
+                    </a:p>
+                  </a:txBody>
+                  <a:tcPr anchor="ctr">
+                    <a:lnL w="12700" cap="flat" cmpd="sng" algn="ctr">
+                      <a:solidFill>
+                        <a:schemeClr val="tx1"/>
+                      </a:solidFill>
+                      <a:prstDash val="solid"/>
+                      <a:round/>
+                      <a:headEnd type="none" w="med" len="med"/>
+                      <a:tailEnd type="none" w="med" len="med"/>
+                    </a:lnL>
+                    <a:lnR w="12700" cap="flat" cmpd="sng" algn="ctr">
+                      <a:solidFill>
+                        <a:schemeClr val="tx1"/>
+                      </a:solidFill>
+                      <a:prstDash val="solid"/>
+                      <a:round/>
+                      <a:headEnd type="none" w="med" len="med"/>
+                      <a:tailEnd type="none" w="med" len="med"/>
+                    </a:lnR>
+                    <a:lnT w="12700" cap="flat" cmpd="sng" algn="ctr">
+                      <a:solidFill>
+                        <a:schemeClr val="tx1"/>
+                      </a:solidFill>
+                      <a:prstDash val="solid"/>
+                      <a:round/>
+                      <a:headEnd type="none" w="med" len="med"/>
+                      <a:tailEnd type="none" w="med" len="med"/>
+                    </a:lnT>
+                    <a:lnB w="12700" cap="flat" cmpd="sng" algn="ctr">
+                      <a:solidFill>
+                        <a:schemeClr val="tx1"/>
+                      </a:solidFill>
+                      <a:prstDash val="solid"/>
+                      <a:round/>
+                      <a:headEnd type="none" w="med" len="med"/>
+                      <a:tailEnd type="none" w="med" len="med"/>
+                    </a:lnB>
+                    <a:solidFill>
+                      <a:schemeClr val="bg1"/>
+                    </a:solidFill>
+                  </a:tcPr>
+                </a:tc>
+                <a:tc>
+                  <a:txBody>
+                    <a:bodyPr/>
+                    <a:lstStyle/>
+                    <a:p>
+                      <a:pPr algn="l" latinLnBrk="1"/>
+                      <a:endParaRPr lang="ko-KR" altLang="en-US" dirty="0">
+                        <a:solidFill>
+                          <a:schemeClr val="tx1"/>
+                        </a:solidFill>
+                      </a:endParaRPr>
+                    </a:p>
+                  </a:txBody>
+                  <a:tcPr anchor="ctr">
+                    <a:lnL w="12700" cap="flat" cmpd="sng" algn="ctr">
+                      <a:solidFill>
+                        <a:schemeClr val="tx1"/>
+                      </a:solidFill>
+                      <a:prstDash val="solid"/>
+                      <a:round/>
+                      <a:headEnd type="none" w="med" len="med"/>
+                      <a:tailEnd type="none" w="med" len="med"/>
+                    </a:lnL>
+                    <a:lnR w="12700" cap="flat" cmpd="sng" algn="ctr">
+                      <a:solidFill>
+                        <a:schemeClr val="tx1"/>
+                      </a:solidFill>
+                      <a:prstDash val="solid"/>
+                      <a:round/>
+                      <a:headEnd type="none" w="med" len="med"/>
+                      <a:tailEnd type="none" w="med" len="med"/>
+                    </a:lnR>
+                    <a:lnT w="12700" cap="flat" cmpd="sng" algn="ctr">
+                      <a:solidFill>
+                        <a:schemeClr val="tx1"/>
+                      </a:solidFill>
+                      <a:prstDash val="solid"/>
+                      <a:round/>
+                      <a:headEnd type="none" w="med" len="med"/>
+                      <a:tailEnd type="none" w="med" len="med"/>
+                    </a:lnT>
+                    <a:lnB w="12700" cap="flat" cmpd="sng" algn="ctr">
+                      <a:solidFill>
+                        <a:schemeClr val="tx1"/>
+                      </a:solidFill>
+                      <a:prstDash val="solid"/>
+                      <a:round/>
+                      <a:headEnd type="none" w="med" len="med"/>
+                      <a:tailEnd type="none" w="med" len="med"/>
+                    </a:lnB>
+                    <a:solidFill>
+                      <a:schemeClr val="bg1"/>
+                    </a:solidFill>
+                  </a:tcPr>
+                </a:tc>
+                <a:extLst>
+                  <a:ext uri="{0D108BD9-81ED-4DB2-BD59-A6C34878D82A}">
+                    <a16:rowId xmlns:a16="http://schemas.microsoft.com/office/drawing/2014/main" val="992783964"/>
+                  </a:ext>
+                </a:extLst>
+              </a:tr>
+              <a:tr h="370840">
+                <a:tc>
+                  <a:txBody>
+                    <a:bodyPr/>
+                    <a:lstStyle/>
+                    <a:p>
+                      <a:pPr algn="ctr" latinLnBrk="1"/>
+                      <a:r>
+                        <a:rPr lang="en-US" altLang="ko-KR" dirty="0">
+                          <a:solidFill>
+                            <a:schemeClr val="tx1"/>
+                          </a:solidFill>
+                        </a:rPr>
+                        <a:t>Roaming, Return</a:t>
+                      </a:r>
+                      <a:br>
+                        <a:rPr lang="en-US" altLang="ko-KR" dirty="0">
+                          <a:solidFill>
+                            <a:schemeClr val="tx1"/>
+                          </a:solidFill>
+                        </a:rPr>
+                      </a:br>
+                      <a:r>
+                        <a:rPr lang="ko-KR" altLang="en-US" dirty="0">
+                          <a:solidFill>
+                            <a:schemeClr val="tx1"/>
+                          </a:solidFill>
+                        </a:rPr>
+                        <a:t>이동 속도 </a:t>
+                      </a:r>
+                      <a:r>
+                        <a:rPr lang="en-US" altLang="ko-KR" dirty="0">
+                          <a:solidFill>
+                            <a:schemeClr val="tx1"/>
+                          </a:solidFill>
+                        </a:rPr>
+                        <a:t>(m/s)</a:t>
+                      </a:r>
+                      <a:endParaRPr lang="ko-KR" altLang="en-US" dirty="0">
+                        <a:solidFill>
+                          <a:schemeClr val="tx1"/>
+                        </a:solidFill>
+                      </a:endParaRPr>
+                    </a:p>
+                  </a:txBody>
+                  <a:tcPr anchor="ctr">
+                    <a:lnL w="12700" cap="flat" cmpd="sng" algn="ctr">
+                      <a:solidFill>
+                        <a:schemeClr val="tx1"/>
+                      </a:solidFill>
+                      <a:prstDash val="solid"/>
+                      <a:round/>
+                      <a:headEnd type="none" w="med" len="med"/>
+                      <a:tailEnd type="none" w="med" len="med"/>
+                    </a:lnL>
+                    <a:lnR w="12700" cap="flat" cmpd="sng" algn="ctr">
+                      <a:solidFill>
+                        <a:schemeClr val="tx1"/>
+                      </a:solidFill>
+                      <a:prstDash val="solid"/>
+                      <a:round/>
+                      <a:headEnd type="none" w="med" len="med"/>
+                      <a:tailEnd type="none" w="med" len="med"/>
+                    </a:lnR>
+                    <a:lnT w="12700" cap="flat" cmpd="sng" algn="ctr">
+                      <a:solidFill>
+                        <a:schemeClr val="tx1"/>
+                      </a:solidFill>
+                      <a:prstDash val="solid"/>
+                      <a:round/>
+                      <a:headEnd type="none" w="med" len="med"/>
+                      <a:tailEnd type="none" w="med" len="med"/>
+                    </a:lnT>
+                    <a:lnB w="12700" cap="flat" cmpd="sng" algn="ctr">
+                      <a:solidFill>
+                        <a:schemeClr val="tx1"/>
+                      </a:solidFill>
+                      <a:prstDash val="solid"/>
+                      <a:round/>
+                      <a:headEnd type="none" w="med" len="med"/>
+                      <a:tailEnd type="none" w="med" len="med"/>
+                    </a:lnB>
+                    <a:solidFill>
+                      <a:schemeClr val="bg2">
+                        <a:lumMod val="90000"/>
+                      </a:schemeClr>
+                    </a:solidFill>
+                  </a:tcPr>
+                </a:tc>
+                <a:tc>
+                  <a:txBody>
+                    <a:bodyPr/>
+                    <a:lstStyle/>
+                    <a:p>
+                      <a:pPr algn="ctr" latinLnBrk="1"/>
+                      <a:r>
+                        <a:rPr lang="en-US" altLang="ko-KR" dirty="0">
+                          <a:solidFill>
+                            <a:schemeClr val="tx1"/>
+                          </a:solidFill>
+                        </a:rPr>
+                        <a:t>2</a:t>
+                      </a:r>
+                      <a:endParaRPr lang="ko-KR" altLang="en-US" dirty="0">
+                        <a:solidFill>
+                          <a:schemeClr val="tx1"/>
+                        </a:solidFill>
+                      </a:endParaRPr>
+                    </a:p>
+                  </a:txBody>
+                  <a:tcPr anchor="ctr">
+                    <a:lnL w="12700" cap="flat" cmpd="sng" algn="ctr">
+                      <a:solidFill>
+                        <a:schemeClr val="tx1"/>
+                      </a:solidFill>
+                      <a:prstDash val="solid"/>
+                      <a:round/>
+                      <a:headEnd type="none" w="med" len="med"/>
+                      <a:tailEnd type="none" w="med" len="med"/>
+                    </a:lnL>
+                    <a:lnR w="12700" cap="flat" cmpd="sng" algn="ctr">
+                      <a:solidFill>
+                        <a:schemeClr val="tx1"/>
+                      </a:solidFill>
+                      <a:prstDash val="solid"/>
+                      <a:round/>
+                      <a:headEnd type="none" w="med" len="med"/>
+                      <a:tailEnd type="none" w="med" len="med"/>
+                    </a:lnR>
+                    <a:lnT w="12700" cap="flat" cmpd="sng" algn="ctr">
+                      <a:solidFill>
+                        <a:schemeClr val="tx1"/>
+                      </a:solidFill>
+                      <a:prstDash val="solid"/>
+                      <a:round/>
+                      <a:headEnd type="none" w="med" len="med"/>
+                      <a:tailEnd type="none" w="med" len="med"/>
+                    </a:lnT>
+                    <a:lnB w="12700" cap="flat" cmpd="sng" algn="ctr">
+                      <a:solidFill>
+                        <a:schemeClr val="tx1"/>
+                      </a:solidFill>
+                      <a:prstDash val="solid"/>
+                      <a:round/>
+                      <a:headEnd type="none" w="med" len="med"/>
+                      <a:tailEnd type="none" w="med" len="med"/>
+                    </a:lnB>
+                    <a:solidFill>
+                      <a:schemeClr val="bg1"/>
+                    </a:solidFill>
+                  </a:tcPr>
+                </a:tc>
+                <a:tc>
+                  <a:txBody>
+                    <a:bodyPr/>
+                    <a:lstStyle/>
+                    <a:p>
+                      <a:pPr algn="l" latinLnBrk="1"/>
+                      <a:endParaRPr lang="ko-KR" altLang="en-US" dirty="0">
+                        <a:solidFill>
+                          <a:schemeClr val="tx1"/>
+                        </a:solidFill>
+                      </a:endParaRPr>
+                    </a:p>
+                  </a:txBody>
+                  <a:tcPr anchor="ctr">
+                    <a:lnL w="12700" cap="flat" cmpd="sng" algn="ctr">
+                      <a:solidFill>
+                        <a:schemeClr val="tx1"/>
+                      </a:solidFill>
+                      <a:prstDash val="solid"/>
+                      <a:round/>
+                      <a:headEnd type="none" w="med" len="med"/>
+                      <a:tailEnd type="none" w="med" len="med"/>
+                    </a:lnL>
+                    <a:lnR w="12700" cap="flat" cmpd="sng" algn="ctr">
+                      <a:solidFill>
+                        <a:schemeClr val="tx1"/>
+                      </a:solidFill>
+                      <a:prstDash val="solid"/>
+                      <a:round/>
+                      <a:headEnd type="none" w="med" len="med"/>
+                      <a:tailEnd type="none" w="med" len="med"/>
+                    </a:lnR>
+                    <a:lnT w="12700" cap="flat" cmpd="sng" algn="ctr">
+                      <a:solidFill>
+                        <a:schemeClr val="tx1"/>
+                      </a:solidFill>
+                      <a:prstDash val="solid"/>
+                      <a:round/>
+                      <a:headEnd type="none" w="med" len="med"/>
+                      <a:tailEnd type="none" w="med" len="med"/>
+                    </a:lnT>
+                    <a:lnB w="12700" cap="flat" cmpd="sng" algn="ctr">
+                      <a:solidFill>
+                        <a:schemeClr val="tx1"/>
+                      </a:solidFill>
+                      <a:prstDash val="solid"/>
+                      <a:round/>
+                      <a:headEnd type="none" w="med" len="med"/>
+                      <a:tailEnd type="none" w="med" len="med"/>
+                    </a:lnB>
+                    <a:solidFill>
+                      <a:schemeClr val="bg1"/>
+                    </a:solidFill>
+                  </a:tcPr>
+                </a:tc>
+                <a:extLst>
+                  <a:ext uri="{0D108BD9-81ED-4DB2-BD59-A6C34878D82A}">
+                    <a16:rowId xmlns:a16="http://schemas.microsoft.com/office/drawing/2014/main" val="4165556141"/>
+                  </a:ext>
+                </a:extLst>
+              </a:tr>
+              <a:tr h="370840">
+                <a:tc>
+                  <a:txBody>
+                    <a:bodyPr/>
+                    <a:lstStyle/>
+                    <a:p>
+                      <a:pPr algn="ctr" latinLnBrk="1"/>
+                      <a:r>
+                        <a:rPr lang="en-US" altLang="ko-KR" dirty="0">
+                          <a:solidFill>
+                            <a:schemeClr val="tx1"/>
+                          </a:solidFill>
+                        </a:rPr>
+                        <a:t>Chase</a:t>
+                      </a:r>
+                      <a:br>
+                        <a:rPr lang="en-US" altLang="ko-KR" dirty="0">
+                          <a:solidFill>
+                            <a:schemeClr val="tx1"/>
+                          </a:solidFill>
+                        </a:rPr>
+                      </a:br>
+                      <a:r>
+                        <a:rPr lang="ko-KR" altLang="en-US" dirty="0">
+                          <a:solidFill>
+                            <a:schemeClr val="tx1"/>
+                          </a:solidFill>
+                        </a:rPr>
+                        <a:t>이동 속도</a:t>
+                      </a:r>
+                      <a:r>
+                        <a:rPr lang="en-US" altLang="ko-KR" dirty="0">
+                          <a:solidFill>
+                            <a:schemeClr val="tx1"/>
+                          </a:solidFill>
+                        </a:rPr>
+                        <a:t> (m/s)</a:t>
+                      </a:r>
+                      <a:endParaRPr lang="ko-KR" altLang="en-US" dirty="0">
+                        <a:solidFill>
+                          <a:schemeClr val="tx1"/>
+                        </a:solidFill>
+                      </a:endParaRPr>
+                    </a:p>
+                  </a:txBody>
+                  <a:tcPr anchor="ctr">
+                    <a:lnL w="12700" cap="flat" cmpd="sng" algn="ctr">
+                      <a:solidFill>
+                        <a:schemeClr val="tx1"/>
+                      </a:solidFill>
+                      <a:prstDash val="solid"/>
+                      <a:round/>
+                      <a:headEnd type="none" w="med" len="med"/>
+                      <a:tailEnd type="none" w="med" len="med"/>
+                    </a:lnL>
+                    <a:lnR w="12700" cap="flat" cmpd="sng" algn="ctr">
+                      <a:solidFill>
+                        <a:schemeClr val="tx1"/>
+                      </a:solidFill>
+                      <a:prstDash val="solid"/>
+                      <a:round/>
+                      <a:headEnd type="none" w="med" len="med"/>
+                      <a:tailEnd type="none" w="med" len="med"/>
+                    </a:lnR>
+                    <a:lnT w="12700" cap="flat" cmpd="sng" algn="ctr">
+                      <a:solidFill>
+                        <a:schemeClr val="tx1"/>
+                      </a:solidFill>
+                      <a:prstDash val="solid"/>
+                      <a:round/>
+                      <a:headEnd type="none" w="med" len="med"/>
+                      <a:tailEnd type="none" w="med" len="med"/>
+                    </a:lnT>
+                    <a:lnB w="12700" cap="flat" cmpd="sng" algn="ctr">
+                      <a:solidFill>
+                        <a:schemeClr val="tx1"/>
+                      </a:solidFill>
+                      <a:prstDash val="solid"/>
+                      <a:round/>
+                      <a:headEnd type="none" w="med" len="med"/>
+                      <a:tailEnd type="none" w="med" len="med"/>
+                    </a:lnB>
+                    <a:solidFill>
+                      <a:schemeClr val="bg2">
+                        <a:lumMod val="90000"/>
+                      </a:schemeClr>
+                    </a:solidFill>
+                  </a:tcPr>
+                </a:tc>
+                <a:tc>
+                  <a:txBody>
+                    <a:bodyPr/>
+                    <a:lstStyle/>
+                    <a:p>
+                      <a:pPr algn="ctr" latinLnBrk="1"/>
+                      <a:r>
+                        <a:rPr lang="en-US" altLang="ko-KR" dirty="0">
+                          <a:solidFill>
+                            <a:schemeClr val="tx1"/>
+                          </a:solidFill>
+                        </a:rPr>
+                        <a:t>3.5</a:t>
+                      </a:r>
+                      <a:endParaRPr lang="ko-KR" altLang="en-US" dirty="0">
+                        <a:solidFill>
+                          <a:schemeClr val="tx1"/>
+                        </a:solidFill>
+                      </a:endParaRPr>
+                    </a:p>
+                  </a:txBody>
+                  <a:tcPr anchor="ctr">
+                    <a:lnL w="12700" cap="flat" cmpd="sng" algn="ctr">
+                      <a:solidFill>
+                        <a:schemeClr val="tx1"/>
+                      </a:solidFill>
+                      <a:prstDash val="solid"/>
+                      <a:round/>
+                      <a:headEnd type="none" w="med" len="med"/>
+                      <a:tailEnd type="none" w="med" len="med"/>
+                    </a:lnL>
+                    <a:lnR w="12700" cap="flat" cmpd="sng" algn="ctr">
+                      <a:solidFill>
+                        <a:schemeClr val="tx1"/>
+                      </a:solidFill>
+                      <a:prstDash val="solid"/>
+                      <a:round/>
+                      <a:headEnd type="none" w="med" len="med"/>
+                      <a:tailEnd type="none" w="med" len="med"/>
+                    </a:lnR>
+                    <a:lnT w="12700" cap="flat" cmpd="sng" algn="ctr">
+                      <a:solidFill>
+                        <a:schemeClr val="tx1"/>
+                      </a:solidFill>
+                      <a:prstDash val="solid"/>
+                      <a:round/>
+                      <a:headEnd type="none" w="med" len="med"/>
+                      <a:tailEnd type="none" w="med" len="med"/>
+                    </a:lnT>
+                    <a:lnB w="12700" cap="flat" cmpd="sng" algn="ctr">
+                      <a:solidFill>
+                        <a:schemeClr val="tx1"/>
+                      </a:solidFill>
+                      <a:prstDash val="solid"/>
+                      <a:round/>
+                      <a:headEnd type="none" w="med" len="med"/>
+                      <a:tailEnd type="none" w="med" len="med"/>
+                    </a:lnB>
+                    <a:solidFill>
+                      <a:schemeClr val="bg1"/>
+                    </a:solidFill>
+                  </a:tcPr>
+                </a:tc>
+                <a:tc>
+                  <a:txBody>
+                    <a:bodyPr/>
+                    <a:lstStyle/>
+                    <a:p>
+                      <a:pPr algn="l" latinLnBrk="1"/>
+                      <a:endParaRPr lang="ko-KR" altLang="en-US" dirty="0">
+                        <a:solidFill>
+                          <a:schemeClr val="tx1"/>
+                        </a:solidFill>
+                      </a:endParaRPr>
+                    </a:p>
+                  </a:txBody>
+                  <a:tcPr anchor="ctr">
+                    <a:lnL w="12700" cap="flat" cmpd="sng" algn="ctr">
+                      <a:solidFill>
+                        <a:schemeClr val="tx1"/>
+                      </a:solidFill>
+                      <a:prstDash val="solid"/>
+                      <a:round/>
+                      <a:headEnd type="none" w="med" len="med"/>
+                      <a:tailEnd type="none" w="med" len="med"/>
+                    </a:lnL>
+                    <a:lnR w="12700" cap="flat" cmpd="sng" algn="ctr">
+                      <a:solidFill>
+                        <a:schemeClr val="tx1"/>
+                      </a:solidFill>
+                      <a:prstDash val="solid"/>
+                      <a:round/>
+                      <a:headEnd type="none" w="med" len="med"/>
+                      <a:tailEnd type="none" w="med" len="med"/>
+                    </a:lnR>
+                    <a:lnT w="12700" cap="flat" cmpd="sng" algn="ctr">
+                      <a:solidFill>
+                        <a:schemeClr val="tx1"/>
+                      </a:solidFill>
+                      <a:prstDash val="solid"/>
+                      <a:round/>
+                      <a:headEnd type="none" w="med" len="med"/>
+                      <a:tailEnd type="none" w="med" len="med"/>
+                    </a:lnT>
+                    <a:lnB w="12700" cap="flat" cmpd="sng" algn="ctr">
+                      <a:solidFill>
+                        <a:schemeClr val="tx1"/>
+                      </a:solidFill>
+                      <a:prstDash val="solid"/>
+                      <a:round/>
+                      <a:headEnd type="none" w="med" len="med"/>
+                      <a:tailEnd type="none" w="med" len="med"/>
+                    </a:lnB>
+                    <a:solidFill>
+                      <a:schemeClr val="bg1"/>
+                    </a:solidFill>
+                  </a:tcPr>
+                </a:tc>
+                <a:extLst>
+                  <a:ext uri="{0D108BD9-81ED-4DB2-BD59-A6C34878D82A}">
+                    <a16:rowId xmlns:a16="http://schemas.microsoft.com/office/drawing/2014/main" val="1604232886"/>
+                  </a:ext>
+                </a:extLst>
+              </a:tr>
+              <a:tr h="370840">
+                <a:tc>
+                  <a:txBody>
+                    <a:bodyPr/>
+                    <a:lstStyle/>
+                    <a:p>
+                      <a:pPr algn="ctr" latinLnBrk="1"/>
+                      <a:r>
+                        <a:rPr lang="en-US" altLang="ko-KR" dirty="0">
+                          <a:solidFill>
+                            <a:schemeClr val="tx1"/>
+                          </a:solidFill>
+                        </a:rPr>
+                        <a:t>Chase </a:t>
+                      </a:r>
+                      <a:r>
+                        <a:rPr lang="ko-KR" altLang="en-US" dirty="0">
+                          <a:solidFill>
+                            <a:schemeClr val="tx1"/>
+                          </a:solidFill>
+                        </a:rPr>
+                        <a:t>지속 시간 </a:t>
+                      </a:r>
+                      <a:r>
+                        <a:rPr lang="en-US" altLang="ko-KR" dirty="0">
+                          <a:solidFill>
+                            <a:schemeClr val="tx1"/>
+                          </a:solidFill>
+                        </a:rPr>
+                        <a:t>(s)</a:t>
+                      </a:r>
+                      <a:endParaRPr lang="ko-KR" altLang="en-US" dirty="0">
+                        <a:solidFill>
+                          <a:schemeClr val="tx1"/>
+                        </a:solidFill>
+                      </a:endParaRPr>
+                    </a:p>
+                  </a:txBody>
+                  <a:tcPr anchor="ctr">
+                    <a:lnL w="12700" cap="flat" cmpd="sng" algn="ctr">
+                      <a:solidFill>
+                        <a:schemeClr val="tx1"/>
+                      </a:solidFill>
+                      <a:prstDash val="solid"/>
+                      <a:round/>
+                      <a:headEnd type="none" w="med" len="med"/>
+                      <a:tailEnd type="none" w="med" len="med"/>
+                    </a:lnL>
+                    <a:lnR w="12700" cap="flat" cmpd="sng" algn="ctr">
+                      <a:solidFill>
+                        <a:schemeClr val="tx1"/>
+                      </a:solidFill>
+                      <a:prstDash val="solid"/>
+                      <a:round/>
+                      <a:headEnd type="none" w="med" len="med"/>
+                      <a:tailEnd type="none" w="med" len="med"/>
+                    </a:lnR>
+                    <a:lnT w="12700" cap="flat" cmpd="sng" algn="ctr">
+                      <a:solidFill>
+                        <a:schemeClr val="tx1"/>
+                      </a:solidFill>
+                      <a:prstDash val="solid"/>
+                      <a:round/>
+                      <a:headEnd type="none" w="med" len="med"/>
+                      <a:tailEnd type="none" w="med" len="med"/>
+                    </a:lnT>
+                    <a:lnB w="12700" cap="flat" cmpd="sng" algn="ctr">
+                      <a:solidFill>
+                        <a:schemeClr val="tx1"/>
+                      </a:solidFill>
+                      <a:prstDash val="solid"/>
+                      <a:round/>
+                      <a:headEnd type="none" w="med" len="med"/>
+                      <a:tailEnd type="none" w="med" len="med"/>
+                    </a:lnB>
+                    <a:solidFill>
+                      <a:schemeClr val="bg2">
+                        <a:lumMod val="90000"/>
+                      </a:schemeClr>
+                    </a:solidFill>
+                  </a:tcPr>
+                </a:tc>
+                <a:tc>
+                  <a:txBody>
+                    <a:bodyPr/>
+                    <a:lstStyle/>
+                    <a:p>
+                      <a:pPr algn="ctr" latinLnBrk="1"/>
+                      <a:r>
+                        <a:rPr lang="en-US" altLang="ko-KR" dirty="0">
+                          <a:solidFill>
+                            <a:schemeClr val="tx1"/>
+                          </a:solidFill>
+                        </a:rPr>
+                        <a:t>7</a:t>
+                      </a:r>
+                      <a:endParaRPr lang="ko-KR" altLang="en-US" dirty="0">
+                        <a:solidFill>
+                          <a:schemeClr val="tx1"/>
+                        </a:solidFill>
+                      </a:endParaRPr>
+                    </a:p>
+                  </a:txBody>
+                  <a:tcPr anchor="ctr">
+                    <a:lnL w="12700" cap="flat" cmpd="sng" algn="ctr">
+                      <a:solidFill>
+                        <a:schemeClr val="tx1"/>
+                      </a:solidFill>
+                      <a:prstDash val="solid"/>
+                      <a:round/>
+                      <a:headEnd type="none" w="med" len="med"/>
+                      <a:tailEnd type="none" w="med" len="med"/>
+                    </a:lnL>
+                    <a:lnR w="12700" cap="flat" cmpd="sng" algn="ctr">
+                      <a:solidFill>
+                        <a:schemeClr val="tx1"/>
+                      </a:solidFill>
+                      <a:prstDash val="solid"/>
+                      <a:round/>
+                      <a:headEnd type="none" w="med" len="med"/>
+                      <a:tailEnd type="none" w="med" len="med"/>
+                    </a:lnR>
+                    <a:lnT w="12700" cap="flat" cmpd="sng" algn="ctr">
+                      <a:solidFill>
+                        <a:schemeClr val="tx1"/>
+                      </a:solidFill>
+                      <a:prstDash val="solid"/>
+                      <a:round/>
+                      <a:headEnd type="none" w="med" len="med"/>
+                      <a:tailEnd type="none" w="med" len="med"/>
+                    </a:lnT>
+                    <a:lnB w="12700" cap="flat" cmpd="sng" algn="ctr">
+                      <a:solidFill>
+                        <a:schemeClr val="tx1"/>
+                      </a:solidFill>
+                      <a:prstDash val="solid"/>
+                      <a:round/>
+                      <a:headEnd type="none" w="med" len="med"/>
+                      <a:tailEnd type="none" w="med" len="med"/>
+                    </a:lnB>
+                    <a:solidFill>
+                      <a:schemeClr val="bg1"/>
+                    </a:solidFill>
+                  </a:tcPr>
+                </a:tc>
+                <a:tc>
+                  <a:txBody>
+                    <a:bodyPr/>
+                    <a:lstStyle/>
+                    <a:p>
+                      <a:pPr algn="l" latinLnBrk="1"/>
+                      <a:endParaRPr lang="ko-KR" altLang="en-US" dirty="0">
+                        <a:solidFill>
+                          <a:schemeClr val="tx1"/>
+                        </a:solidFill>
+                      </a:endParaRPr>
+                    </a:p>
+                  </a:txBody>
+                  <a:tcPr anchor="ctr">
+                    <a:lnL w="12700" cap="flat" cmpd="sng" algn="ctr">
+                      <a:solidFill>
+                        <a:schemeClr val="tx1"/>
+                      </a:solidFill>
+                      <a:prstDash val="solid"/>
+                      <a:round/>
+                      <a:headEnd type="none" w="med" len="med"/>
+                      <a:tailEnd type="none" w="med" len="med"/>
+                    </a:lnL>
+                    <a:lnR w="12700" cap="flat" cmpd="sng" algn="ctr">
+                      <a:solidFill>
+                        <a:schemeClr val="tx1"/>
+                      </a:solidFill>
+                      <a:prstDash val="solid"/>
+                      <a:round/>
+                      <a:headEnd type="none" w="med" len="med"/>
+                      <a:tailEnd type="none" w="med" len="med"/>
+                    </a:lnR>
+                    <a:lnT w="12700" cap="flat" cmpd="sng" algn="ctr">
+                      <a:solidFill>
+                        <a:schemeClr val="tx1"/>
+                      </a:solidFill>
+                      <a:prstDash val="solid"/>
+                      <a:round/>
+                      <a:headEnd type="none" w="med" len="med"/>
+                      <a:tailEnd type="none" w="med" len="med"/>
+                    </a:lnT>
+                    <a:lnB w="12700" cap="flat" cmpd="sng" algn="ctr">
+                      <a:solidFill>
+                        <a:schemeClr val="tx1"/>
+                      </a:solidFill>
+                      <a:prstDash val="solid"/>
+                      <a:round/>
+                      <a:headEnd type="none" w="med" len="med"/>
+                      <a:tailEnd type="none" w="med" len="med"/>
+                    </a:lnB>
+                    <a:solidFill>
+                      <a:schemeClr val="bg1"/>
+                    </a:solidFill>
+                  </a:tcPr>
+                </a:tc>
+                <a:extLst>
+                  <a:ext uri="{0D108BD9-81ED-4DB2-BD59-A6C34878D82A}">
+                    <a16:rowId xmlns:a16="http://schemas.microsoft.com/office/drawing/2014/main" val="2798903270"/>
+                  </a:ext>
+                </a:extLst>
+              </a:tr>
+              <a:tr h="370840">
+                <a:tc>
+                  <a:txBody>
+                    <a:bodyPr/>
+                    <a:lstStyle/>
+                    <a:p>
+                      <a:pPr algn="ctr" latinLnBrk="1"/>
+                      <a:r>
+                        <a:rPr lang="ko-KR" altLang="en-US" dirty="0">
+                          <a:solidFill>
+                            <a:schemeClr val="tx1"/>
+                          </a:solidFill>
+                        </a:rPr>
+                        <a:t>공격 속도 </a:t>
+                      </a:r>
+                      <a:r>
+                        <a:rPr lang="en-US" altLang="ko-KR" dirty="0">
+                          <a:solidFill>
+                            <a:schemeClr val="tx1"/>
+                          </a:solidFill>
+                        </a:rPr>
+                        <a:t>(s)</a:t>
+                      </a:r>
+                      <a:endParaRPr lang="ko-KR" altLang="en-US" dirty="0">
+                        <a:solidFill>
+                          <a:schemeClr val="tx1"/>
+                        </a:solidFill>
+                      </a:endParaRPr>
+                    </a:p>
+                  </a:txBody>
+                  <a:tcPr anchor="ctr">
+                    <a:lnL w="12700" cap="flat" cmpd="sng" algn="ctr">
+                      <a:solidFill>
+                        <a:schemeClr val="tx1"/>
+                      </a:solidFill>
+                      <a:prstDash val="solid"/>
+                      <a:round/>
+                      <a:headEnd type="none" w="med" len="med"/>
+                      <a:tailEnd type="none" w="med" len="med"/>
+                    </a:lnL>
+                    <a:lnR w="12700" cap="flat" cmpd="sng" algn="ctr">
+                      <a:solidFill>
+                        <a:schemeClr val="tx1"/>
+                      </a:solidFill>
+                      <a:prstDash val="solid"/>
+                      <a:round/>
+                      <a:headEnd type="none" w="med" len="med"/>
+                      <a:tailEnd type="none" w="med" len="med"/>
+                    </a:lnR>
+                    <a:lnT w="12700" cap="flat" cmpd="sng" algn="ctr">
+                      <a:solidFill>
+                        <a:schemeClr val="tx1"/>
+                      </a:solidFill>
+                      <a:prstDash val="solid"/>
+                      <a:round/>
+                      <a:headEnd type="none" w="med" len="med"/>
+                      <a:tailEnd type="none" w="med" len="med"/>
+                    </a:lnT>
+                    <a:lnB w="12700" cap="flat" cmpd="sng" algn="ctr">
+                      <a:solidFill>
+                        <a:schemeClr val="tx1"/>
+                      </a:solidFill>
+                      <a:prstDash val="solid"/>
+                      <a:round/>
+                      <a:headEnd type="none" w="med" len="med"/>
+                      <a:tailEnd type="none" w="med" len="med"/>
+                    </a:lnB>
+                    <a:solidFill>
+                      <a:schemeClr val="bg2">
+                        <a:lumMod val="90000"/>
+                      </a:schemeClr>
+                    </a:solidFill>
+                  </a:tcPr>
+                </a:tc>
+                <a:tc>
+                  <a:txBody>
+                    <a:bodyPr/>
+                    <a:lstStyle/>
+                    <a:p>
+                      <a:pPr algn="ctr" latinLnBrk="1"/>
+                      <a:r>
+                        <a:rPr lang="en-US" altLang="ko-KR" dirty="0">
+                          <a:solidFill>
+                            <a:schemeClr val="tx1"/>
+                          </a:solidFill>
+                        </a:rPr>
+                        <a:t>3</a:t>
+                      </a:r>
+                      <a:endParaRPr lang="ko-KR" altLang="en-US" dirty="0">
+                        <a:solidFill>
+                          <a:schemeClr val="tx1"/>
+                        </a:solidFill>
+                      </a:endParaRPr>
+                    </a:p>
+                  </a:txBody>
+                  <a:tcPr anchor="ctr">
+                    <a:lnL w="12700" cap="flat" cmpd="sng" algn="ctr">
+                      <a:solidFill>
+                        <a:schemeClr val="tx1"/>
+                      </a:solidFill>
+                      <a:prstDash val="solid"/>
+                      <a:round/>
+                      <a:headEnd type="none" w="med" len="med"/>
+                      <a:tailEnd type="none" w="med" len="med"/>
+                    </a:lnL>
+                    <a:lnR w="12700" cap="flat" cmpd="sng" algn="ctr">
+                      <a:solidFill>
+                        <a:schemeClr val="tx1"/>
+                      </a:solidFill>
+                      <a:prstDash val="solid"/>
+                      <a:round/>
+                      <a:headEnd type="none" w="med" len="med"/>
+                      <a:tailEnd type="none" w="med" len="med"/>
+                    </a:lnR>
+                    <a:lnT w="12700" cap="flat" cmpd="sng" algn="ctr">
+                      <a:solidFill>
+                        <a:schemeClr val="tx1"/>
+                      </a:solidFill>
+                      <a:prstDash val="solid"/>
+                      <a:round/>
+                      <a:headEnd type="none" w="med" len="med"/>
+                      <a:tailEnd type="none" w="med" len="med"/>
+                    </a:lnT>
+                    <a:lnB w="12700" cap="flat" cmpd="sng" algn="ctr">
+                      <a:solidFill>
+                        <a:schemeClr val="tx1"/>
+                      </a:solidFill>
+                      <a:prstDash val="solid"/>
+                      <a:round/>
+                      <a:headEnd type="none" w="med" len="med"/>
+                      <a:tailEnd type="none" w="med" len="med"/>
+                    </a:lnB>
+                    <a:solidFill>
+                      <a:schemeClr val="bg1"/>
+                    </a:solidFill>
+                  </a:tcPr>
+                </a:tc>
+                <a:tc>
+                  <a:txBody>
+                    <a:bodyPr/>
+                    <a:lstStyle/>
+                    <a:p>
+                      <a:pPr algn="l" latinLnBrk="1"/>
+                      <a:endParaRPr lang="ko-KR" altLang="en-US" dirty="0">
+                        <a:solidFill>
+                          <a:schemeClr val="tx1"/>
+                        </a:solidFill>
+                      </a:endParaRPr>
+                    </a:p>
+                  </a:txBody>
+                  <a:tcPr anchor="ctr">
+                    <a:lnL w="12700" cap="flat" cmpd="sng" algn="ctr">
+                      <a:solidFill>
+                        <a:schemeClr val="tx1"/>
+                      </a:solidFill>
+                      <a:prstDash val="solid"/>
+                      <a:round/>
+                      <a:headEnd type="none" w="med" len="med"/>
+                      <a:tailEnd type="none" w="med" len="med"/>
+                    </a:lnL>
+                    <a:lnR w="12700" cap="flat" cmpd="sng" algn="ctr">
+                      <a:solidFill>
+                        <a:schemeClr val="tx1"/>
+                      </a:solidFill>
+                      <a:prstDash val="solid"/>
+                      <a:round/>
+                      <a:headEnd type="none" w="med" len="med"/>
+                      <a:tailEnd type="none" w="med" len="med"/>
+                    </a:lnR>
+                    <a:lnT w="12700" cap="flat" cmpd="sng" algn="ctr">
+                      <a:solidFill>
+                        <a:schemeClr val="tx1"/>
+                      </a:solidFill>
+                      <a:prstDash val="solid"/>
+                      <a:round/>
+                      <a:headEnd type="none" w="med" len="med"/>
+                      <a:tailEnd type="none" w="med" len="med"/>
+                    </a:lnT>
+                    <a:lnB w="12700" cap="flat" cmpd="sng" algn="ctr">
+                      <a:solidFill>
+                        <a:schemeClr val="tx1"/>
+                      </a:solidFill>
+                      <a:prstDash val="solid"/>
+                      <a:round/>
+                      <a:headEnd type="none" w="med" len="med"/>
+                      <a:tailEnd type="none" w="med" len="med"/>
+                    </a:lnB>
+                    <a:solidFill>
+                      <a:schemeClr val="bg1"/>
+                    </a:solidFill>
+                  </a:tcPr>
+                </a:tc>
+                <a:extLst>
+                  <a:ext uri="{0D108BD9-81ED-4DB2-BD59-A6C34878D82A}">
+                    <a16:rowId xmlns:a16="http://schemas.microsoft.com/office/drawing/2014/main" val="1207686723"/>
+                  </a:ext>
+                </a:extLst>
+              </a:tr>
+              <a:tr h="370840">
+                <a:tc>
+                  <a:txBody>
+                    <a:bodyPr/>
+                    <a:lstStyle/>
+                    <a:p>
+                      <a:pPr algn="ctr" latinLnBrk="1"/>
+                      <a:r>
+                        <a:rPr lang="ko-KR" altLang="en-US" dirty="0">
+                          <a:solidFill>
+                            <a:schemeClr val="tx1"/>
+                          </a:solidFill>
+                        </a:rPr>
+                        <a:t>공격력</a:t>
+                      </a:r>
+                    </a:p>
+                  </a:txBody>
+                  <a:tcPr anchor="ctr">
+                    <a:lnL w="12700" cap="flat" cmpd="sng" algn="ctr">
+                      <a:solidFill>
+                        <a:schemeClr val="tx1"/>
+                      </a:solidFill>
+                      <a:prstDash val="solid"/>
+                      <a:round/>
+                      <a:headEnd type="none" w="med" len="med"/>
+                      <a:tailEnd type="none" w="med" len="med"/>
+                    </a:lnL>
+                    <a:lnR w="12700" cap="flat" cmpd="sng" algn="ctr">
+                      <a:solidFill>
+                        <a:schemeClr val="tx1"/>
+                      </a:solidFill>
+                      <a:prstDash val="solid"/>
+                      <a:round/>
+                      <a:headEnd type="none" w="med" len="med"/>
+                      <a:tailEnd type="none" w="med" len="med"/>
+                    </a:lnR>
+                    <a:lnT w="12700" cap="flat" cmpd="sng" algn="ctr">
+                      <a:solidFill>
+                        <a:schemeClr val="tx1"/>
+                      </a:solidFill>
+                      <a:prstDash val="solid"/>
+                      <a:round/>
+                      <a:headEnd type="none" w="med" len="med"/>
+                      <a:tailEnd type="none" w="med" len="med"/>
+                    </a:lnT>
+                    <a:lnB w="12700" cap="flat" cmpd="sng" algn="ctr">
+                      <a:solidFill>
+                        <a:schemeClr val="tx1"/>
+                      </a:solidFill>
+                      <a:prstDash val="solid"/>
+                      <a:round/>
+                      <a:headEnd type="none" w="med" len="med"/>
+                      <a:tailEnd type="none" w="med" len="med"/>
+                    </a:lnB>
+                    <a:solidFill>
+                      <a:schemeClr val="bg2">
+                        <a:lumMod val="90000"/>
+                      </a:schemeClr>
+                    </a:solidFill>
+                  </a:tcPr>
+                </a:tc>
+                <a:tc>
+                  <a:txBody>
+                    <a:bodyPr/>
+                    <a:lstStyle/>
+                    <a:p>
+                      <a:pPr algn="ctr" latinLnBrk="1"/>
+                      <a:r>
+                        <a:rPr lang="en-US" altLang="ko-KR" dirty="0">
+                          <a:solidFill>
+                            <a:schemeClr val="tx1"/>
+                          </a:solidFill>
+                        </a:rPr>
+                        <a:t>33</a:t>
+                      </a:r>
+                      <a:endParaRPr lang="ko-KR" altLang="en-US" dirty="0">
+                        <a:solidFill>
+                          <a:schemeClr val="tx1"/>
+                        </a:solidFill>
+                      </a:endParaRPr>
+                    </a:p>
+                  </a:txBody>
+                  <a:tcPr anchor="ctr">
+                    <a:lnL w="12700" cap="flat" cmpd="sng" algn="ctr">
+                      <a:solidFill>
+                        <a:schemeClr val="tx1"/>
+                      </a:solidFill>
+                      <a:prstDash val="solid"/>
+                      <a:round/>
+                      <a:headEnd type="none" w="med" len="med"/>
+                      <a:tailEnd type="none" w="med" len="med"/>
+                    </a:lnL>
+                    <a:lnR w="12700" cap="flat" cmpd="sng" algn="ctr">
+                      <a:solidFill>
+                        <a:schemeClr val="tx1"/>
+                      </a:solidFill>
+                      <a:prstDash val="solid"/>
+                      <a:round/>
+                      <a:headEnd type="none" w="med" len="med"/>
+                      <a:tailEnd type="none" w="med" len="med"/>
+                    </a:lnR>
+                    <a:lnT w="12700" cap="flat" cmpd="sng" algn="ctr">
+                      <a:solidFill>
+                        <a:schemeClr val="tx1"/>
+                      </a:solidFill>
+                      <a:prstDash val="solid"/>
+                      <a:round/>
+                      <a:headEnd type="none" w="med" len="med"/>
+                      <a:tailEnd type="none" w="med" len="med"/>
+                    </a:lnT>
+                    <a:lnB w="12700" cap="flat" cmpd="sng" algn="ctr">
+                      <a:solidFill>
+                        <a:schemeClr val="tx1"/>
+                      </a:solidFill>
+                      <a:prstDash val="solid"/>
+                      <a:round/>
+                      <a:headEnd type="none" w="med" len="med"/>
+                      <a:tailEnd type="none" w="med" len="med"/>
+                    </a:lnB>
+                    <a:solidFill>
+                      <a:schemeClr val="bg1"/>
+                    </a:solidFill>
+                  </a:tcPr>
+                </a:tc>
+                <a:tc>
+                  <a:txBody>
+                    <a:bodyPr/>
+                    <a:lstStyle/>
+                    <a:p>
+                      <a:pPr algn="l" latinLnBrk="1"/>
+                      <a:endParaRPr lang="ko-KR" altLang="en-US" dirty="0">
+                        <a:solidFill>
+                          <a:schemeClr val="tx1"/>
+                        </a:solidFill>
+                      </a:endParaRPr>
+                    </a:p>
+                  </a:txBody>
+                  <a:tcPr anchor="ctr">
+                    <a:lnL w="12700" cap="flat" cmpd="sng" algn="ctr">
+                      <a:solidFill>
+                        <a:schemeClr val="tx1"/>
+                      </a:solidFill>
+                      <a:prstDash val="solid"/>
+                      <a:round/>
+                      <a:headEnd type="none" w="med" len="med"/>
+                      <a:tailEnd type="none" w="med" len="med"/>
+                    </a:lnL>
+                    <a:lnR w="12700" cap="flat" cmpd="sng" algn="ctr">
+                      <a:solidFill>
+                        <a:schemeClr val="tx1"/>
+                      </a:solidFill>
+                      <a:prstDash val="solid"/>
+                      <a:round/>
+                      <a:headEnd type="none" w="med" len="med"/>
+                      <a:tailEnd type="none" w="med" len="med"/>
+                    </a:lnR>
+                    <a:lnT w="12700" cap="flat" cmpd="sng" algn="ctr">
+                      <a:solidFill>
+                        <a:schemeClr val="tx1"/>
+                      </a:solidFill>
+                      <a:prstDash val="solid"/>
+                      <a:round/>
+                      <a:headEnd type="none" w="med" len="med"/>
+                      <a:tailEnd type="none" w="med" len="med"/>
+                    </a:lnT>
+                    <a:lnB w="12700" cap="flat" cmpd="sng" algn="ctr">
+                      <a:solidFill>
+                        <a:schemeClr val="tx1"/>
+                      </a:solidFill>
+                      <a:prstDash val="solid"/>
+                      <a:round/>
+                      <a:headEnd type="none" w="med" len="med"/>
+                      <a:tailEnd type="none" w="med" len="med"/>
+                    </a:lnB>
+                    <a:solidFill>
+                      <a:schemeClr val="bg1"/>
+                    </a:solidFill>
+                  </a:tcPr>
+                </a:tc>
+                <a:extLst>
+                  <a:ext uri="{0D108BD9-81ED-4DB2-BD59-A6C34878D82A}">
+                    <a16:rowId xmlns:a16="http://schemas.microsoft.com/office/drawing/2014/main" val="485183913"/>
+                  </a:ext>
+                </a:extLst>
+              </a:tr>
+              <a:tr h="370840">
+                <a:tc>
+                  <a:txBody>
+                    <a:bodyPr/>
+                    <a:lstStyle/>
+                    <a:p>
+                      <a:pPr algn="ctr" latinLnBrk="1"/>
+                      <a:r>
+                        <a:rPr lang="ko-KR" altLang="en-US" dirty="0">
+                          <a:solidFill>
+                            <a:schemeClr val="tx1"/>
+                          </a:solidFill>
+                        </a:rPr>
+                        <a:t>거미줄 설치 속도 </a:t>
+                      </a:r>
+                      <a:r>
+                        <a:rPr lang="en-US" altLang="ko-KR" dirty="0">
+                          <a:solidFill>
+                            <a:schemeClr val="tx1"/>
+                          </a:solidFill>
+                        </a:rPr>
+                        <a:t>(s)</a:t>
+                      </a:r>
+                      <a:endParaRPr lang="ko-KR" altLang="en-US" dirty="0">
+                        <a:solidFill>
+                          <a:schemeClr val="tx1"/>
+                        </a:solidFill>
+                      </a:endParaRPr>
+                    </a:p>
+                  </a:txBody>
+                  <a:tcPr anchor="ctr">
+                    <a:lnL w="12700" cap="flat" cmpd="sng" algn="ctr">
+                      <a:solidFill>
+                        <a:schemeClr val="tx1"/>
+                      </a:solidFill>
+                      <a:prstDash val="solid"/>
+                      <a:round/>
+                      <a:headEnd type="none" w="med" len="med"/>
+                      <a:tailEnd type="none" w="med" len="med"/>
+                    </a:lnL>
+                    <a:lnR w="12700" cap="flat" cmpd="sng" algn="ctr">
+                      <a:solidFill>
+                        <a:schemeClr val="tx1"/>
+                      </a:solidFill>
+                      <a:prstDash val="solid"/>
+                      <a:round/>
+                      <a:headEnd type="none" w="med" len="med"/>
+                      <a:tailEnd type="none" w="med" len="med"/>
+                    </a:lnR>
+                    <a:lnT w="12700" cap="flat" cmpd="sng" algn="ctr">
+                      <a:solidFill>
+                        <a:schemeClr val="tx1"/>
+                      </a:solidFill>
+                      <a:prstDash val="solid"/>
+                      <a:round/>
+                      <a:headEnd type="none" w="med" len="med"/>
+                      <a:tailEnd type="none" w="med" len="med"/>
+                    </a:lnT>
+                    <a:lnB w="12700" cap="flat" cmpd="sng" algn="ctr">
+                      <a:solidFill>
+                        <a:schemeClr val="tx1"/>
+                      </a:solidFill>
+                      <a:prstDash val="solid"/>
+                      <a:round/>
+                      <a:headEnd type="none" w="med" len="med"/>
+                      <a:tailEnd type="none" w="med" len="med"/>
+                    </a:lnB>
+                    <a:solidFill>
+                      <a:schemeClr val="bg2">
+                        <a:lumMod val="90000"/>
+                      </a:schemeClr>
+                    </a:solidFill>
+                  </a:tcPr>
+                </a:tc>
+                <a:tc>
+                  <a:txBody>
+                    <a:bodyPr/>
+                    <a:lstStyle/>
+                    <a:p>
+                      <a:pPr algn="ctr" latinLnBrk="1"/>
+                      <a:r>
+                        <a:rPr lang="en-US" altLang="ko-KR" dirty="0">
+                          <a:solidFill>
+                            <a:schemeClr val="tx1"/>
+                          </a:solidFill>
+                        </a:rPr>
+                        <a:t>1.5</a:t>
+                      </a:r>
+                      <a:endParaRPr lang="ko-KR" altLang="en-US" dirty="0">
+                        <a:solidFill>
+                          <a:schemeClr val="tx1"/>
+                        </a:solidFill>
+                      </a:endParaRPr>
+                    </a:p>
+                  </a:txBody>
+                  <a:tcPr anchor="ctr">
+                    <a:lnL w="12700" cap="flat" cmpd="sng" algn="ctr">
+                      <a:solidFill>
+                        <a:schemeClr val="tx1"/>
+                      </a:solidFill>
+                      <a:prstDash val="solid"/>
+                      <a:round/>
+                      <a:headEnd type="none" w="med" len="med"/>
+                      <a:tailEnd type="none" w="med" len="med"/>
+                    </a:lnL>
+                    <a:lnR w="12700" cap="flat" cmpd="sng" algn="ctr">
+                      <a:solidFill>
+                        <a:schemeClr val="tx1"/>
+                      </a:solidFill>
+                      <a:prstDash val="solid"/>
+                      <a:round/>
+                      <a:headEnd type="none" w="med" len="med"/>
+                      <a:tailEnd type="none" w="med" len="med"/>
+                    </a:lnR>
+                    <a:lnT w="12700" cap="flat" cmpd="sng" algn="ctr">
+                      <a:solidFill>
+                        <a:schemeClr val="tx1"/>
+                      </a:solidFill>
+                      <a:prstDash val="solid"/>
+                      <a:round/>
+                      <a:headEnd type="none" w="med" len="med"/>
+                      <a:tailEnd type="none" w="med" len="med"/>
+                    </a:lnT>
+                    <a:lnB w="12700" cap="flat" cmpd="sng" algn="ctr">
+                      <a:solidFill>
+                        <a:schemeClr val="tx1"/>
+                      </a:solidFill>
+                      <a:prstDash val="solid"/>
+                      <a:round/>
+                      <a:headEnd type="none" w="med" len="med"/>
+                      <a:tailEnd type="none" w="med" len="med"/>
+                    </a:lnB>
+                    <a:solidFill>
+                      <a:schemeClr val="bg1"/>
+                    </a:solidFill>
+                  </a:tcPr>
+                </a:tc>
+                <a:tc>
+                  <a:txBody>
+                    <a:bodyPr/>
+                    <a:lstStyle/>
+                    <a:p>
+                      <a:pPr algn="l" latinLnBrk="1"/>
+                      <a:endParaRPr lang="ko-KR" altLang="en-US" dirty="0">
+                        <a:solidFill>
+                          <a:schemeClr val="tx1"/>
+                        </a:solidFill>
+                      </a:endParaRPr>
+                    </a:p>
+                  </a:txBody>
+                  <a:tcPr anchor="ctr">
+                    <a:lnL w="12700" cap="flat" cmpd="sng" algn="ctr">
+                      <a:solidFill>
+                        <a:schemeClr val="tx1"/>
+                      </a:solidFill>
+                      <a:prstDash val="solid"/>
+                      <a:round/>
+                      <a:headEnd type="none" w="med" len="med"/>
+                      <a:tailEnd type="none" w="med" len="med"/>
+                    </a:lnL>
+                    <a:lnR w="12700" cap="flat" cmpd="sng" algn="ctr">
+                      <a:solidFill>
+                        <a:schemeClr val="tx1"/>
+                      </a:solidFill>
+                      <a:prstDash val="solid"/>
+                      <a:round/>
+                      <a:headEnd type="none" w="med" len="med"/>
+                      <a:tailEnd type="none" w="med" len="med"/>
+                    </a:lnR>
+                    <a:lnT w="12700" cap="flat" cmpd="sng" algn="ctr">
+                      <a:solidFill>
+                        <a:schemeClr val="tx1"/>
+                      </a:solidFill>
+                      <a:prstDash val="solid"/>
+                      <a:round/>
+                      <a:headEnd type="none" w="med" len="med"/>
+                      <a:tailEnd type="none" w="med" len="med"/>
+                    </a:lnT>
+                    <a:lnB w="12700" cap="flat" cmpd="sng" algn="ctr">
+                      <a:solidFill>
+                        <a:schemeClr val="tx1"/>
+                      </a:solidFill>
+                      <a:prstDash val="solid"/>
+                      <a:round/>
+                      <a:headEnd type="none" w="med" len="med"/>
+                      <a:tailEnd type="none" w="med" len="med"/>
+                    </a:lnB>
+                    <a:solidFill>
+                      <a:schemeClr val="bg1"/>
+                    </a:solidFill>
+                  </a:tcPr>
+                </a:tc>
+                <a:extLst>
+                  <a:ext uri="{0D108BD9-81ED-4DB2-BD59-A6C34878D82A}">
+                    <a16:rowId xmlns:a16="http://schemas.microsoft.com/office/drawing/2014/main" val="1559761273"/>
+                  </a:ext>
+                </a:extLst>
+              </a:tr>
+              <a:tr h="370840">
+                <a:tc>
+                  <a:txBody>
+                    <a:bodyPr/>
+                    <a:lstStyle/>
+                    <a:p>
+                      <a:pPr algn="ctr" latinLnBrk="1"/>
+                      <a:r>
+                        <a:rPr lang="ko-KR" altLang="en-US" dirty="0">
+                          <a:solidFill>
+                            <a:schemeClr val="tx1"/>
+                          </a:solidFill>
+                        </a:rPr>
+                        <a:t>거미줄 설치 개수</a:t>
+                      </a:r>
+                      <a:r>
+                        <a:rPr lang="en-US" altLang="ko-KR" dirty="0">
+                          <a:solidFill>
+                            <a:schemeClr val="tx1"/>
+                          </a:solidFill>
+                        </a:rPr>
+                        <a:t>_</a:t>
+                      </a:r>
+                      <a:r>
+                        <a:rPr lang="ko-KR" altLang="en-US" dirty="0">
+                          <a:solidFill>
+                            <a:schemeClr val="tx1"/>
+                          </a:solidFill>
+                        </a:rPr>
+                        <a:t>최소</a:t>
+                      </a:r>
+                    </a:p>
+                  </a:txBody>
+                  <a:tcPr anchor="ctr">
+                    <a:lnL w="12700" cap="flat" cmpd="sng" algn="ctr">
+                      <a:solidFill>
+                        <a:schemeClr val="tx1"/>
+                      </a:solidFill>
+                      <a:prstDash val="solid"/>
+                      <a:round/>
+                      <a:headEnd type="none" w="med" len="med"/>
+                      <a:tailEnd type="none" w="med" len="med"/>
+                    </a:lnL>
+                    <a:lnR w="12700" cap="flat" cmpd="sng" algn="ctr">
+                      <a:solidFill>
+                        <a:schemeClr val="tx1"/>
+                      </a:solidFill>
+                      <a:prstDash val="solid"/>
+                      <a:round/>
+                      <a:headEnd type="none" w="med" len="med"/>
+                      <a:tailEnd type="none" w="med" len="med"/>
+                    </a:lnR>
+                    <a:lnT w="12700" cap="flat" cmpd="sng" algn="ctr">
+                      <a:solidFill>
+                        <a:schemeClr val="tx1"/>
+                      </a:solidFill>
+                      <a:prstDash val="solid"/>
+                      <a:round/>
+                      <a:headEnd type="none" w="med" len="med"/>
+                      <a:tailEnd type="none" w="med" len="med"/>
+                    </a:lnT>
+                    <a:lnB w="12700" cap="flat" cmpd="sng" algn="ctr">
+                      <a:solidFill>
+                        <a:schemeClr val="tx1"/>
+                      </a:solidFill>
+                      <a:prstDash val="solid"/>
+                      <a:round/>
+                      <a:headEnd type="none" w="med" len="med"/>
+                      <a:tailEnd type="none" w="med" len="med"/>
+                    </a:lnB>
+                    <a:solidFill>
+                      <a:schemeClr val="bg2">
+                        <a:lumMod val="90000"/>
+                      </a:schemeClr>
+                    </a:solidFill>
+                  </a:tcPr>
+                </a:tc>
+                <a:tc>
+                  <a:txBody>
+                    <a:bodyPr/>
+                    <a:lstStyle/>
+                    <a:p>
+                      <a:pPr algn="ctr" latinLnBrk="1"/>
+                      <a:r>
+                        <a:rPr lang="en-US" altLang="ko-KR" dirty="0">
+                          <a:solidFill>
+                            <a:schemeClr val="tx1"/>
+                          </a:solidFill>
+                        </a:rPr>
+                        <a:t>3</a:t>
+                      </a:r>
+                      <a:endParaRPr lang="ko-KR" altLang="en-US" dirty="0">
+                        <a:solidFill>
+                          <a:schemeClr val="tx1"/>
+                        </a:solidFill>
+                      </a:endParaRPr>
+                    </a:p>
+                  </a:txBody>
+                  <a:tcPr anchor="ctr">
+                    <a:lnL w="12700" cap="flat" cmpd="sng" algn="ctr">
+                      <a:solidFill>
+                        <a:schemeClr val="tx1"/>
+                      </a:solidFill>
+                      <a:prstDash val="solid"/>
+                      <a:round/>
+                      <a:headEnd type="none" w="med" len="med"/>
+                      <a:tailEnd type="none" w="med" len="med"/>
+                    </a:lnL>
+                    <a:lnR w="12700" cap="flat" cmpd="sng" algn="ctr">
+                      <a:solidFill>
+                        <a:schemeClr val="tx1"/>
+                      </a:solidFill>
+                      <a:prstDash val="solid"/>
+                      <a:round/>
+                      <a:headEnd type="none" w="med" len="med"/>
+                      <a:tailEnd type="none" w="med" len="med"/>
+                    </a:lnR>
+                    <a:lnT w="12700" cap="flat" cmpd="sng" algn="ctr">
+                      <a:solidFill>
+                        <a:schemeClr val="tx1"/>
+                      </a:solidFill>
+                      <a:prstDash val="solid"/>
+                      <a:round/>
+                      <a:headEnd type="none" w="med" len="med"/>
+                      <a:tailEnd type="none" w="med" len="med"/>
+                    </a:lnT>
+                    <a:lnB w="12700" cap="flat" cmpd="sng" algn="ctr">
+                      <a:solidFill>
+                        <a:schemeClr val="tx1"/>
+                      </a:solidFill>
+                      <a:prstDash val="solid"/>
+                      <a:round/>
+                      <a:headEnd type="none" w="med" len="med"/>
+                      <a:tailEnd type="none" w="med" len="med"/>
+                    </a:lnB>
+                    <a:solidFill>
+                      <a:schemeClr val="bg1"/>
+                    </a:solidFill>
+                  </a:tcPr>
+                </a:tc>
+                <a:tc>
+                  <a:txBody>
+                    <a:bodyPr/>
+                    <a:lstStyle/>
+                    <a:p>
+                      <a:pPr algn="l" latinLnBrk="1"/>
+                      <a:endParaRPr lang="ko-KR" altLang="en-US" dirty="0">
+                        <a:solidFill>
+                          <a:schemeClr val="tx1"/>
+                        </a:solidFill>
+                      </a:endParaRPr>
+                    </a:p>
+                  </a:txBody>
+                  <a:tcPr anchor="ctr">
+                    <a:lnL w="12700" cap="flat" cmpd="sng" algn="ctr">
+                      <a:solidFill>
+                        <a:schemeClr val="tx1"/>
+                      </a:solidFill>
+                      <a:prstDash val="solid"/>
+                      <a:round/>
+                      <a:headEnd type="none" w="med" len="med"/>
+                      <a:tailEnd type="none" w="med" len="med"/>
+                    </a:lnL>
+                    <a:lnR w="12700" cap="flat" cmpd="sng" algn="ctr">
+                      <a:solidFill>
+                        <a:schemeClr val="tx1"/>
+                      </a:solidFill>
+                      <a:prstDash val="solid"/>
+                      <a:round/>
+                      <a:headEnd type="none" w="med" len="med"/>
+                      <a:tailEnd type="none" w="med" len="med"/>
+                    </a:lnR>
+                    <a:lnT w="12700" cap="flat" cmpd="sng" algn="ctr">
+                      <a:solidFill>
+                        <a:schemeClr val="tx1"/>
+                      </a:solidFill>
+                      <a:prstDash val="solid"/>
+                      <a:round/>
+                      <a:headEnd type="none" w="med" len="med"/>
+                      <a:tailEnd type="none" w="med" len="med"/>
+                    </a:lnT>
+                    <a:lnB w="12700" cap="flat" cmpd="sng" algn="ctr">
+                      <a:solidFill>
+                        <a:schemeClr val="tx1"/>
+                      </a:solidFill>
+                      <a:prstDash val="solid"/>
+                      <a:round/>
+                      <a:headEnd type="none" w="med" len="med"/>
+                      <a:tailEnd type="none" w="med" len="med"/>
+                    </a:lnB>
+                    <a:solidFill>
+                      <a:schemeClr val="bg1"/>
+                    </a:solidFill>
+                  </a:tcPr>
+                </a:tc>
+                <a:extLst>
+                  <a:ext uri="{0D108BD9-81ED-4DB2-BD59-A6C34878D82A}">
+                    <a16:rowId xmlns:a16="http://schemas.microsoft.com/office/drawing/2014/main" val="2499511786"/>
+                  </a:ext>
+                </a:extLst>
+              </a:tr>
+              <a:tr h="370840">
+                <a:tc>
+                  <a:txBody>
+                    <a:bodyPr/>
+                    <a:lstStyle/>
+                    <a:p>
+                      <a:pPr algn="ctr" latinLnBrk="1"/>
+                      <a:r>
+                        <a:rPr lang="ko-KR" altLang="en-US" dirty="0">
+                          <a:solidFill>
+                            <a:schemeClr val="tx1"/>
+                          </a:solidFill>
+                        </a:rPr>
+                        <a:t>거미줄 설치 개수</a:t>
+                      </a:r>
+                      <a:r>
+                        <a:rPr lang="en-US" altLang="ko-KR" dirty="0">
+                          <a:solidFill>
+                            <a:schemeClr val="tx1"/>
+                          </a:solidFill>
+                        </a:rPr>
+                        <a:t>_</a:t>
+                      </a:r>
+                      <a:r>
+                        <a:rPr lang="ko-KR" altLang="en-US" dirty="0">
+                          <a:solidFill>
+                            <a:schemeClr val="tx1"/>
+                          </a:solidFill>
+                        </a:rPr>
+                        <a:t>최대</a:t>
+                      </a:r>
+                    </a:p>
+                  </a:txBody>
+                  <a:tcPr anchor="ctr">
+                    <a:lnL w="12700" cap="flat" cmpd="sng" algn="ctr">
+                      <a:solidFill>
+                        <a:schemeClr val="tx1"/>
+                      </a:solidFill>
+                      <a:prstDash val="solid"/>
+                      <a:round/>
+                      <a:headEnd type="none" w="med" len="med"/>
+                      <a:tailEnd type="none" w="med" len="med"/>
+                    </a:lnL>
+                    <a:lnR w="12700" cap="flat" cmpd="sng" algn="ctr">
+                      <a:solidFill>
+                        <a:schemeClr val="tx1"/>
+                      </a:solidFill>
+                      <a:prstDash val="solid"/>
+                      <a:round/>
+                      <a:headEnd type="none" w="med" len="med"/>
+                      <a:tailEnd type="none" w="med" len="med"/>
+                    </a:lnR>
+                    <a:lnT w="12700" cap="flat" cmpd="sng" algn="ctr">
+                      <a:solidFill>
+                        <a:schemeClr val="tx1"/>
+                      </a:solidFill>
+                      <a:prstDash val="solid"/>
+                      <a:round/>
+                      <a:headEnd type="none" w="med" len="med"/>
+                      <a:tailEnd type="none" w="med" len="med"/>
+                    </a:lnT>
+                    <a:lnB w="12700" cap="flat" cmpd="sng" algn="ctr">
+                      <a:solidFill>
+                        <a:schemeClr val="tx1"/>
+                      </a:solidFill>
+                      <a:prstDash val="solid"/>
+                      <a:round/>
+                      <a:headEnd type="none" w="med" len="med"/>
+                      <a:tailEnd type="none" w="med" len="med"/>
+                    </a:lnB>
+                    <a:solidFill>
+                      <a:schemeClr val="bg2">
+                        <a:lumMod val="90000"/>
+                      </a:schemeClr>
+                    </a:solidFill>
+                  </a:tcPr>
+                </a:tc>
+                <a:tc>
+                  <a:txBody>
+                    <a:bodyPr/>
+                    <a:lstStyle/>
+                    <a:p>
+                      <a:pPr algn="ctr" latinLnBrk="1"/>
+                      <a:r>
+                        <a:rPr lang="en-US" altLang="ko-KR" dirty="0">
+                          <a:solidFill>
+                            <a:schemeClr val="tx1"/>
+                          </a:solidFill>
+                        </a:rPr>
+                        <a:t>5</a:t>
+                      </a:r>
+                      <a:endParaRPr lang="ko-KR" altLang="en-US" dirty="0">
+                        <a:solidFill>
+                          <a:schemeClr val="tx1"/>
+                        </a:solidFill>
+                      </a:endParaRPr>
+                    </a:p>
+                  </a:txBody>
+                  <a:tcPr anchor="ctr">
+                    <a:lnL w="12700" cap="flat" cmpd="sng" algn="ctr">
+                      <a:solidFill>
+                        <a:schemeClr val="tx1"/>
+                      </a:solidFill>
+                      <a:prstDash val="solid"/>
+                      <a:round/>
+                      <a:headEnd type="none" w="med" len="med"/>
+                      <a:tailEnd type="none" w="med" len="med"/>
+                    </a:lnL>
+                    <a:lnR w="12700" cap="flat" cmpd="sng" algn="ctr">
+                      <a:solidFill>
+                        <a:schemeClr val="tx1"/>
+                      </a:solidFill>
+                      <a:prstDash val="solid"/>
+                      <a:round/>
+                      <a:headEnd type="none" w="med" len="med"/>
+                      <a:tailEnd type="none" w="med" len="med"/>
+                    </a:lnR>
+                    <a:lnT w="12700" cap="flat" cmpd="sng" algn="ctr">
+                      <a:solidFill>
+                        <a:schemeClr val="tx1"/>
+                      </a:solidFill>
+                      <a:prstDash val="solid"/>
+                      <a:round/>
+                      <a:headEnd type="none" w="med" len="med"/>
+                      <a:tailEnd type="none" w="med" len="med"/>
+                    </a:lnT>
+                    <a:lnB w="12700" cap="flat" cmpd="sng" algn="ctr">
+                      <a:solidFill>
+                        <a:schemeClr val="tx1"/>
+                      </a:solidFill>
+                      <a:prstDash val="solid"/>
+                      <a:round/>
+                      <a:headEnd type="none" w="med" len="med"/>
+                      <a:tailEnd type="none" w="med" len="med"/>
+                    </a:lnB>
+                    <a:solidFill>
+                      <a:schemeClr val="bg1"/>
+                    </a:solidFill>
+                  </a:tcPr>
+                </a:tc>
+                <a:tc>
+                  <a:txBody>
+                    <a:bodyPr/>
+                    <a:lstStyle/>
+                    <a:p>
+                      <a:pPr algn="l" latinLnBrk="1"/>
+                      <a:endParaRPr lang="ko-KR" altLang="en-US" dirty="0">
+                        <a:solidFill>
+                          <a:schemeClr val="tx1"/>
+                        </a:solidFill>
+                      </a:endParaRPr>
+                    </a:p>
+                  </a:txBody>
+                  <a:tcPr anchor="ctr">
+                    <a:lnL w="12700" cap="flat" cmpd="sng" algn="ctr">
+                      <a:solidFill>
+                        <a:schemeClr val="tx1"/>
+                      </a:solidFill>
+                      <a:prstDash val="solid"/>
+                      <a:round/>
+                      <a:headEnd type="none" w="med" len="med"/>
+                      <a:tailEnd type="none" w="med" len="med"/>
+                    </a:lnL>
+                    <a:lnR w="12700" cap="flat" cmpd="sng" algn="ctr">
+                      <a:solidFill>
+                        <a:schemeClr val="tx1"/>
+                      </a:solidFill>
+                      <a:prstDash val="solid"/>
+                      <a:round/>
+                      <a:headEnd type="none" w="med" len="med"/>
+                      <a:tailEnd type="none" w="med" len="med"/>
+                    </a:lnR>
+                    <a:lnT w="12700" cap="flat" cmpd="sng" algn="ctr">
+                      <a:solidFill>
+                        <a:schemeClr val="tx1"/>
+                      </a:solidFill>
+                      <a:prstDash val="solid"/>
+                      <a:round/>
+                      <a:headEnd type="none" w="med" len="med"/>
+                      <a:tailEnd type="none" w="med" len="med"/>
+                    </a:lnT>
+                    <a:lnB w="12700" cap="flat" cmpd="sng" algn="ctr">
+                      <a:solidFill>
+                        <a:schemeClr val="tx1"/>
+                      </a:solidFill>
+                      <a:prstDash val="solid"/>
+                      <a:round/>
+                      <a:headEnd type="none" w="med" len="med"/>
+                      <a:tailEnd type="none" w="med" len="med"/>
+                    </a:lnB>
+                    <a:solidFill>
+                      <a:schemeClr val="bg1"/>
+                    </a:solidFill>
+                  </a:tcPr>
+                </a:tc>
+                <a:extLst>
+                  <a:ext uri="{0D108BD9-81ED-4DB2-BD59-A6C34878D82A}">
+                    <a16:rowId xmlns:a16="http://schemas.microsoft.com/office/drawing/2014/main" val="2378314764"/>
+                  </a:ext>
+                </a:extLst>
+              </a:tr>
+            </a:tbl>
+          </a:graphicData>
+        </a:graphic>
+      </p:graphicFrame>
+      <p:grpSp>
+        <p:nvGrpSpPr>
+          <p:cNvPr id="10" name="그룹 9">
+            <a:extLst>
+              <a:ext uri="{FF2B5EF4-FFF2-40B4-BE49-F238E27FC236}">
+                <a16:creationId xmlns:a16="http://schemas.microsoft.com/office/drawing/2014/main" id="{B3928684-4281-A32A-0052-DD4464BBF1B2}"/>
+              </a:ext>
+            </a:extLst>
+          </p:cNvPr>
+          <p:cNvGrpSpPr/>
+          <p:nvPr/>
+        </p:nvGrpSpPr>
+        <p:grpSpPr>
+          <a:xfrm>
+            <a:off x="-188844" y="4123052"/>
+            <a:ext cx="2220844" cy="1920454"/>
+            <a:chOff x="-188844" y="3853813"/>
+            <a:chExt cx="2220844" cy="1920454"/>
+          </a:xfrm>
+        </p:grpSpPr>
+        <p:sp>
+          <p:nvSpPr>
+            <p:cNvPr id="8" name="왼쪽 대괄호 7">
+              <a:extLst>
+                <a:ext uri="{FF2B5EF4-FFF2-40B4-BE49-F238E27FC236}">
+                  <a16:creationId xmlns:a16="http://schemas.microsoft.com/office/drawing/2014/main" id="{3A00B2BA-98A1-2D64-87FA-B57F9314705D}"/>
+                </a:ext>
+              </a:extLst>
+            </p:cNvPr>
+            <p:cNvSpPr/>
+            <p:nvPr/>
+          </p:nvSpPr>
+          <p:spPr>
+            <a:xfrm>
+              <a:off x="1600200" y="3853813"/>
+              <a:ext cx="431800" cy="1920454"/>
+            </a:xfrm>
+            <a:prstGeom prst="leftBracket">
+              <a:avLst>
+                <a:gd name="adj" fmla="val 222378"/>
+              </a:avLst>
+            </a:prstGeom>
+            <a:ln>
+              <a:solidFill>
+                <a:srgbClr val="FF0000"/>
+              </a:solidFill>
+            </a:ln>
+          </p:spPr>
+          <p:style>
+            <a:lnRef idx="2">
+              <a:schemeClr val="accent1"/>
+            </a:lnRef>
+            <a:fillRef idx="0">
+              <a:schemeClr val="accent1"/>
+            </a:fillRef>
+            <a:effectRef idx="1">
+              <a:schemeClr val="accent1"/>
+            </a:effectRef>
+            <a:fontRef idx="minor">
+              <a:schemeClr val="tx1"/>
+            </a:fontRef>
+          </p:style>
+          <p:txBody>
+            <a:bodyPr rtlCol="0" anchor="ctr"/>
+            <a:lstStyle/>
+            <a:p>
+              <a:pPr algn="ctr"/>
+              <a:endParaRPr lang="ko-KR" altLang="en-US"/>
+            </a:p>
+          </p:txBody>
+        </p:sp>
+        <p:sp>
+          <p:nvSpPr>
+            <p:cNvPr id="9" name="TextBox 8">
+              <a:extLst>
+                <a:ext uri="{FF2B5EF4-FFF2-40B4-BE49-F238E27FC236}">
+                  <a16:creationId xmlns:a16="http://schemas.microsoft.com/office/drawing/2014/main" id="{43ACD007-4DC8-F3F8-63AC-FAE52D4CD21C}"/>
+                </a:ext>
+              </a:extLst>
+            </p:cNvPr>
+            <p:cNvSpPr txBox="1"/>
+            <p:nvPr/>
+          </p:nvSpPr>
+          <p:spPr>
+            <a:xfrm>
+              <a:off x="-188844" y="4629374"/>
+              <a:ext cx="1789044" cy="369332"/>
+            </a:xfrm>
+            <a:prstGeom prst="rect">
+              <a:avLst/>
+            </a:prstGeom>
+            <a:noFill/>
+          </p:spPr>
+          <p:txBody>
+            <a:bodyPr wrap="square" rtlCol="0">
+              <a:spAutoFit/>
+            </a:bodyPr>
+            <a:lstStyle/>
+            <a:p>
+              <a:pPr algn="r"/>
+              <a:r>
+                <a:rPr lang="ko-KR" altLang="en-US" dirty="0">
+                  <a:solidFill>
+                    <a:srgbClr val="FF0000"/>
+                  </a:solidFill>
+                </a:rPr>
+                <a:t>스킬 관련</a:t>
+              </a:r>
+              <a:endParaRPr lang="en-US" altLang="ko-KR" dirty="0">
+                <a:solidFill>
+                  <a:srgbClr val="FF0000"/>
+                </a:solidFill>
+              </a:endParaRPr>
+            </a:p>
+          </p:txBody>
+        </p:sp>
+      </p:grpSp>
+    </p:spTree>
+    <p:extLst>
+      <p:ext uri="{BB962C8B-B14F-4D97-AF65-F5344CB8AC3E}">
+        <p14:creationId xmlns:p14="http://schemas.microsoft.com/office/powerpoint/2010/main" val="3654646454"/>
+      </p:ext>
+    </p:extLst>
+  </p:cSld>
+  <p:clrMapOvr>
+    <a:masterClrMapping/>
+  </p:clrMapOvr>
+</p:sld>
+</file>
+
+<file path=ppt/slides/slide9.xml><?xml version="1.0" encoding="utf-8"?>
+<p:sld xmlns:a="http://schemas.openxmlformats.org/drawingml/2006/main" xmlns:r="http://schemas.openxmlformats.org/officeDocument/2006/relationships" xmlns:p="http://schemas.openxmlformats.org/presentationml/2006/main">
+  <p:cSld>
+    <p:spTree>
+      <p:nvGrpSpPr>
+        <p:cNvPr id="1" name="">
+          <a:extLst>
+            <a:ext uri="{FF2B5EF4-FFF2-40B4-BE49-F238E27FC236}">
+              <a16:creationId xmlns:a16="http://schemas.microsoft.com/office/drawing/2014/main" id="{7CA13028-44CE-BFC4-A265-F5457A885133}"/>
+            </a:ext>
+          </a:extLst>
+        </p:cNvPr>
+        <p:cNvGrpSpPr/>
+        <p:nvPr/>
+      </p:nvGrpSpPr>
+      <p:grpSpPr>
+        <a:xfrm>
+          <a:off x="0" y="0"/>
+          <a:ext cx="0" cy="0"/>
+          <a:chOff x="0" y="0"/>
+          <a:chExt cx="0" cy="0"/>
+        </a:xfrm>
+      </p:grpSpPr>
+      <p:sp>
+        <p:nvSpPr>
+          <p:cNvPr id="2" name="텍스트 개체 틀 1">
+            <a:extLst>
+              <a:ext uri="{FF2B5EF4-FFF2-40B4-BE49-F238E27FC236}">
+                <a16:creationId xmlns:a16="http://schemas.microsoft.com/office/drawing/2014/main" id="{07FFE341-FE08-7B09-2324-0107F1B02DD5}"/>
+              </a:ext>
+            </a:extLst>
+          </p:cNvPr>
+          <p:cNvSpPr>
+            <a:spLocks noGrp="1"/>
+          </p:cNvSpPr>
+          <p:nvPr>
+            <p:ph type="body" sz="quarter" idx="13"/>
+          </p:nvPr>
+        </p:nvSpPr>
+        <p:spPr>
+          <a:xfrm>
+            <a:off x="0" y="654689"/>
+            <a:ext cx="1600200" cy="2349500"/>
+          </a:xfrm>
+        </p:spPr>
+        <p:txBody>
+          <a:bodyPr/>
+          <a:lstStyle/>
+          <a:p>
+            <a:r>
+              <a:rPr lang="ko-KR" altLang="en-US" dirty="0" err="1"/>
+              <a:t>스탯</a:t>
+            </a:r>
+            <a:endParaRPr lang="en-US" altLang="ko-KR" dirty="0"/>
+          </a:p>
+          <a:p>
+            <a:r>
+              <a:rPr lang="en-US" altLang="ko-KR" b="1" dirty="0"/>
+              <a:t>FSM</a:t>
+            </a:r>
+          </a:p>
+          <a:p>
+            <a:r>
+              <a:rPr lang="ko-KR" altLang="en-US" dirty="0"/>
+              <a:t>스킬</a:t>
+            </a:r>
+          </a:p>
+        </p:txBody>
+      </p:sp>
+      <p:sp>
+        <p:nvSpPr>
+          <p:cNvPr id="3" name="제목 2">
+            <a:extLst>
+              <a:ext uri="{FF2B5EF4-FFF2-40B4-BE49-F238E27FC236}">
+                <a16:creationId xmlns:a16="http://schemas.microsoft.com/office/drawing/2014/main" id="{6667F00B-277C-E25F-63C3-57DBF0668D4B}"/>
+              </a:ext>
+            </a:extLst>
+          </p:cNvPr>
+          <p:cNvSpPr>
+            <a:spLocks noGrp="1"/>
+          </p:cNvSpPr>
+          <p:nvPr>
+            <p:ph type="title"/>
+          </p:nvPr>
+        </p:nvSpPr>
+        <p:spPr>
+          <a:xfrm>
+            <a:off x="0" y="119158"/>
+            <a:ext cx="1600200" cy="535531"/>
+          </a:xfrm>
+        </p:spPr>
+        <p:txBody>
+          <a:bodyPr/>
+          <a:lstStyle/>
+          <a:p>
+            <a:r>
+              <a:rPr lang="ko-KR" altLang="en-US" dirty="0"/>
+              <a:t>거미</a:t>
+            </a:r>
+          </a:p>
+        </p:txBody>
+      </p:sp>
+      <p:sp>
+        <p:nvSpPr>
+          <p:cNvPr id="4" name="내용 개체 틀 3">
+            <a:extLst>
+              <a:ext uri="{FF2B5EF4-FFF2-40B4-BE49-F238E27FC236}">
+                <a16:creationId xmlns:a16="http://schemas.microsoft.com/office/drawing/2014/main" id="{B25A9B00-26B0-B866-CE85-0370838DD09D}"/>
+              </a:ext>
+            </a:extLst>
+          </p:cNvPr>
+          <p:cNvSpPr>
+            <a:spLocks noGrp="1"/>
+          </p:cNvSpPr>
+          <p:nvPr>
+            <p:ph idx="1"/>
+          </p:nvPr>
+        </p:nvSpPr>
+        <p:spPr/>
+        <p:txBody>
+          <a:bodyPr/>
+          <a:lstStyle/>
+          <a:p>
+            <a:r>
+              <a:rPr lang="en-US" altLang="ko-KR" dirty="0"/>
+              <a:t>HP, </a:t>
+            </a:r>
+            <a:r>
+              <a:rPr lang="ko-KR" altLang="en-US" dirty="0"/>
+              <a:t>이동속도</a:t>
+            </a:r>
+            <a:r>
+              <a:rPr lang="en-US" altLang="ko-KR" dirty="0"/>
+              <a:t>, </a:t>
+            </a:r>
+            <a:r>
+              <a:rPr lang="ko-KR" altLang="en-US" dirty="0"/>
+              <a:t>공격속도</a:t>
+            </a:r>
+            <a:r>
+              <a:rPr lang="en-US" altLang="ko-KR" dirty="0"/>
+              <a:t>, </a:t>
+            </a:r>
+            <a:r>
+              <a:rPr lang="ko-KR" altLang="en-US" dirty="0"/>
+              <a:t>데미지</a:t>
+            </a:r>
+            <a:r>
+              <a:rPr lang="en-US" altLang="ko-KR" dirty="0"/>
+              <a:t>, </a:t>
+            </a:r>
+            <a:r>
+              <a:rPr lang="ko-KR" altLang="en-US" dirty="0"/>
+              <a:t>몬스터</a:t>
+            </a:r>
+            <a:r>
+              <a:rPr lang="en-US" altLang="ko-KR" dirty="0"/>
+              <a:t>1 </a:t>
+            </a:r>
+            <a:r>
+              <a:rPr lang="ko-KR" altLang="en-US" dirty="0"/>
+              <a:t>스킬</a:t>
+            </a:r>
+            <a:endParaRPr lang="en-US" altLang="ko-KR" dirty="0"/>
+          </a:p>
+          <a:p>
+            <a:endParaRPr lang="ko-KR" altLang="en-US" dirty="0"/>
+          </a:p>
+          <a:p>
+            <a:endParaRPr lang="ko-KR" altLang="en-US" dirty="0"/>
+          </a:p>
+        </p:txBody>
+      </p:sp>
+      <p:sp>
+        <p:nvSpPr>
+          <p:cNvPr id="5" name="슬라이드 번호 개체 틀 4">
+            <a:extLst>
+              <a:ext uri="{FF2B5EF4-FFF2-40B4-BE49-F238E27FC236}">
+                <a16:creationId xmlns:a16="http://schemas.microsoft.com/office/drawing/2014/main" id="{AA97AAD5-0758-B5C4-780C-DF9E10E6ED14}"/>
+              </a:ext>
+            </a:extLst>
+          </p:cNvPr>
+          <p:cNvSpPr>
+            <a:spLocks noGrp="1"/>
+          </p:cNvSpPr>
+          <p:nvPr>
+            <p:ph type="sldNum" sz="quarter" idx="12"/>
+          </p:nvPr>
+        </p:nvSpPr>
+        <p:spPr/>
+        <p:txBody>
+          <a:bodyPr/>
+          <a:lstStyle/>
+          <a:p>
+            <a:fld id="{2A226FEB-661D-4181-84CB-C53DCFE1931A}" type="slidenum">
+              <a:rPr lang="ko-KR" altLang="en-US" smtClean="0"/>
+              <a:t>9</a:t>
+            </a:fld>
+            <a:endParaRPr lang="ko-KR" altLang="en-US"/>
+          </a:p>
+        </p:txBody>
+      </p:sp>
+      <p:pic>
+        <p:nvPicPr>
+          <p:cNvPr id="175" name="그림 174" descr="텍스트, 도표, 폰트, 지도이(가) 표시된 사진&#10;&#10;AI 생성 콘텐츠는 정확하지 않을 수 있습니다.">
+            <a:extLst>
+              <a:ext uri="{FF2B5EF4-FFF2-40B4-BE49-F238E27FC236}">
+                <a16:creationId xmlns:a16="http://schemas.microsoft.com/office/drawing/2014/main" id="{0C06DADE-7AF1-5951-9C6A-64467E67AE33}"/>
+              </a:ext>
+            </a:extLst>
+          </p:cNvPr>
+          <p:cNvPicPr>
+            <a:picLocks noChangeAspect="1"/>
+          </p:cNvPicPr>
+          <p:nvPr/>
+        </p:nvPicPr>
+        <p:blipFill>
+          <a:blip r:embed="rId2">
+            <a:extLst>
+              <a:ext uri="{28A0092B-C50C-407E-A947-70E740481C1C}">
+                <a14:useLocalDpi xmlns:a14="http://schemas.microsoft.com/office/drawing/2010/main" val="0"/>
+              </a:ext>
+            </a:extLst>
+          </a:blip>
+          <a:stretch>
+            <a:fillRect/>
+          </a:stretch>
+        </p:blipFill>
+        <p:spPr>
+          <a:xfrm>
+            <a:off x="2095715" y="0"/>
+            <a:ext cx="9702370" cy="6858000"/>
+          </a:xfrm>
+          <a:prstGeom prst="rect">
+            <a:avLst/>
+          </a:prstGeom>
+        </p:spPr>
+      </p:pic>
+    </p:spTree>
+    <p:extLst>
+      <p:ext uri="{BB962C8B-B14F-4D97-AF65-F5344CB8AC3E}">
+        <p14:creationId xmlns:p14="http://schemas.microsoft.com/office/powerpoint/2010/main" val="3756870264"/>
       </p:ext>
     </p:extLst>
   </p:cSld>

--- a/기획/전투 기획.pptx
+++ b/기획/전투 기획.pptx
@@ -5,10 +5,10 @@
     <p:sldMasterId id="2147483648" r:id="rId1"/>
   </p:sldMasterIdLst>
   <p:notesMasterIdLst>
-    <p:notesMasterId r:id="rId12"/>
+    <p:notesMasterId r:id="rId13"/>
   </p:notesMasterIdLst>
   <p:handoutMasterIdLst>
-    <p:handoutMasterId r:id="rId13"/>
+    <p:handoutMasterId r:id="rId14"/>
   </p:handoutMasterIdLst>
   <p:sldIdLst>
     <p:sldId id="256" r:id="rId2"/>
@@ -21,6 +21,7 @@
     <p:sldId id="286" r:id="rId9"/>
     <p:sldId id="288" r:id="rId10"/>
     <p:sldId id="289" r:id="rId11"/>
+    <p:sldId id="290" r:id="rId12"/>
   </p:sldIdLst>
   <p:sldSz cx="12192000" cy="6858000"/>
   <p:notesSz cx="6858000" cy="9144000"/>
@@ -151,250 +152,6 @@
 
 <file path=ppt/changesInfos/changesInfo1.xml><?xml version="1.0" encoding="utf-8"?>
 <pc:chgInfo xmlns:a="http://schemas.openxmlformats.org/drawingml/2006/main" xmlns:r="http://schemas.openxmlformats.org/officeDocument/2006/relationships" xmlns:ac="http://schemas.microsoft.com/office/drawing/2013/main/command" xmlns:pc="http://schemas.microsoft.com/office/powerpoint/2013/main/command">
-  <pc:docChgLst>
-    <pc:chgData name="이하나 윤" userId="f658f17427b35de9" providerId="LiveId" clId="{EE219EC4-0B48-4DAA-B6C8-F5305E865B87}"/>
-    <pc:docChg chg="undo custSel addSld delSld modSld sldOrd">
-      <pc:chgData name="이하나 윤" userId="f658f17427b35de9" providerId="LiveId" clId="{EE219EC4-0B48-4DAA-B6C8-F5305E865B87}" dt="2025-09-16T19:16:32.464" v="2721" actId="1076"/>
-      <pc:docMkLst>
-        <pc:docMk/>
-      </pc:docMkLst>
-      <pc:sldChg chg="modSp mod">
-        <pc:chgData name="이하나 윤" userId="f658f17427b35de9" providerId="LiveId" clId="{EE219EC4-0B48-4DAA-B6C8-F5305E865B87}" dt="2025-09-15T18:05:38.219" v="12" actId="20577"/>
-        <pc:sldMkLst>
-          <pc:docMk/>
-          <pc:sldMk cId="695329364" sldId="256"/>
-        </pc:sldMkLst>
-        <pc:spChg chg="mod">
-          <ac:chgData name="이하나 윤" userId="f658f17427b35de9" providerId="LiveId" clId="{EE219EC4-0B48-4DAA-B6C8-F5305E865B87}" dt="2025-09-15T18:05:18.916" v="5" actId="20577"/>
-          <ac:spMkLst>
-            <pc:docMk/>
-            <pc:sldMk cId="695329364" sldId="256"/>
-            <ac:spMk id="2" creationId="{279A97C8-12D7-ACBE-C5A4-75DBE4566ED8}"/>
-          </ac:spMkLst>
-        </pc:spChg>
-        <pc:spChg chg="mod">
-          <ac:chgData name="이하나 윤" userId="f658f17427b35de9" providerId="LiveId" clId="{EE219EC4-0B48-4DAA-B6C8-F5305E865B87}" dt="2025-09-15T18:05:38.219" v="12" actId="20577"/>
-          <ac:spMkLst>
-            <pc:docMk/>
-            <pc:sldMk cId="695329364" sldId="256"/>
-            <ac:spMk id="3" creationId="{F2DB0B14-7B93-035D-6893-C7A5FA5E3A1F}"/>
-          </ac:spMkLst>
-        </pc:spChg>
-        <pc:spChg chg="mod">
-          <ac:chgData name="이하나 윤" userId="f658f17427b35de9" providerId="LiveId" clId="{EE219EC4-0B48-4DAA-B6C8-F5305E865B87}" dt="2025-09-15T18:05:12.401" v="4" actId="20577"/>
-          <ac:spMkLst>
-            <pc:docMk/>
-            <pc:sldMk cId="695329364" sldId="256"/>
-            <ac:spMk id="4" creationId="{77A1A4CF-75CA-73D9-FBFB-9F192FB89E8E}"/>
-          </ac:spMkLst>
-        </pc:spChg>
-      </pc:sldChg>
-      <pc:sldChg chg="modSp mod">
-        <pc:chgData name="이하나 윤" userId="f658f17427b35de9" providerId="LiveId" clId="{EE219EC4-0B48-4DAA-B6C8-F5305E865B87}" dt="2025-09-16T18:55:04.403" v="2354" actId="20577"/>
-        <pc:sldMkLst>
-          <pc:docMk/>
-          <pc:sldMk cId="1843325994" sldId="257"/>
-        </pc:sldMkLst>
-        <pc:spChg chg="mod">
-          <ac:chgData name="이하나 윤" userId="f658f17427b35de9" providerId="LiveId" clId="{EE219EC4-0B48-4DAA-B6C8-F5305E865B87}" dt="2025-09-16T18:55:04.403" v="2354" actId="20577"/>
-          <ac:spMkLst>
-            <pc:docMk/>
-            <pc:sldMk cId="1843325994" sldId="257"/>
-            <ac:spMk id="4" creationId="{566C19CA-242E-6D40-AE00-592C2404271D}"/>
-          </ac:spMkLst>
-        </pc:spChg>
-      </pc:sldChg>
-      <pc:sldChg chg="del">
-        <pc:chgData name="이하나 윤" userId="f658f17427b35de9" providerId="LiveId" clId="{EE219EC4-0B48-4DAA-B6C8-F5305E865B87}" dt="2025-09-16T18:54:47.202" v="2312" actId="47"/>
-        <pc:sldMkLst>
-          <pc:docMk/>
-          <pc:sldMk cId="565639903" sldId="274"/>
-        </pc:sldMkLst>
-      </pc:sldChg>
-      <pc:sldChg chg="del">
-        <pc:chgData name="이하나 윤" userId="f658f17427b35de9" providerId="LiveId" clId="{EE219EC4-0B48-4DAA-B6C8-F5305E865B87}" dt="2025-09-16T18:54:47.202" v="2312" actId="47"/>
-        <pc:sldMkLst>
-          <pc:docMk/>
-          <pc:sldMk cId="663441846" sldId="275"/>
-        </pc:sldMkLst>
-      </pc:sldChg>
-      <pc:sldChg chg="del">
-        <pc:chgData name="이하나 윤" userId="f658f17427b35de9" providerId="LiveId" clId="{EE219EC4-0B48-4DAA-B6C8-F5305E865B87}" dt="2025-09-16T18:54:47.202" v="2312" actId="47"/>
-        <pc:sldMkLst>
-          <pc:docMk/>
-          <pc:sldMk cId="1894509827" sldId="276"/>
-        </pc:sldMkLst>
-      </pc:sldChg>
-      <pc:sldChg chg="del">
-        <pc:chgData name="이하나 윤" userId="f658f17427b35de9" providerId="LiveId" clId="{EE219EC4-0B48-4DAA-B6C8-F5305E865B87}" dt="2025-09-16T18:54:47.202" v="2312" actId="47"/>
-        <pc:sldMkLst>
-          <pc:docMk/>
-          <pc:sldMk cId="1664335280" sldId="278"/>
-        </pc:sldMkLst>
-      </pc:sldChg>
-      <pc:sldChg chg="del">
-        <pc:chgData name="이하나 윤" userId="f658f17427b35de9" providerId="LiveId" clId="{EE219EC4-0B48-4DAA-B6C8-F5305E865B87}" dt="2025-09-16T18:54:47.202" v="2312" actId="47"/>
-        <pc:sldMkLst>
-          <pc:docMk/>
-          <pc:sldMk cId="3952254055" sldId="279"/>
-        </pc:sldMkLst>
-      </pc:sldChg>
-      <pc:sldChg chg="addSp delSp modSp new mod ord">
-        <pc:chgData name="이하나 윤" userId="f658f17427b35de9" providerId="LiveId" clId="{EE219EC4-0B48-4DAA-B6C8-F5305E865B87}" dt="2025-09-16T19:11:38.307" v="2688" actId="1076"/>
-        <pc:sldMkLst>
-          <pc:docMk/>
-          <pc:sldMk cId="2467931347" sldId="280"/>
-        </pc:sldMkLst>
-        <pc:spChg chg="mod">
-          <ac:chgData name="이하나 윤" userId="f658f17427b35de9" providerId="LiveId" clId="{EE219EC4-0B48-4DAA-B6C8-F5305E865B87}" dt="2025-09-15T19:02:51.669" v="1073" actId="113"/>
-          <ac:spMkLst>
-            <pc:docMk/>
-            <pc:sldMk cId="2467931347" sldId="280"/>
-            <ac:spMk id="2" creationId="{88E5FA1D-825F-1565-5218-FAB64E09C09E}"/>
-          </ac:spMkLst>
-        </pc:spChg>
-        <pc:spChg chg="mod">
-          <ac:chgData name="이하나 윤" userId="f658f17427b35de9" providerId="LiveId" clId="{EE219EC4-0B48-4DAA-B6C8-F5305E865B87}" dt="2025-09-15T18:06:08.584" v="28" actId="20577"/>
-          <ac:spMkLst>
-            <pc:docMk/>
-            <pc:sldMk cId="2467931347" sldId="280"/>
-            <ac:spMk id="3" creationId="{8DC65DF5-0CBF-CAB8-34E8-FA354D7071C8}"/>
-          </ac:spMkLst>
-        </pc:spChg>
-        <pc:spChg chg="mod">
-          <ac:chgData name="이하나 윤" userId="f658f17427b35de9" providerId="LiveId" clId="{EE219EC4-0B48-4DAA-B6C8-F5305E865B87}" dt="2025-09-16T18:59:05.570" v="2587" actId="20577"/>
-          <ac:spMkLst>
-            <pc:docMk/>
-            <pc:sldMk cId="2467931347" sldId="280"/>
-            <ac:spMk id="4" creationId="{A65BED05-43EC-C289-3A55-8A21041F8B8B}"/>
-          </ac:spMkLst>
-        </pc:spChg>
-        <pc:picChg chg="add mod ord">
-          <ac:chgData name="이하나 윤" userId="f658f17427b35de9" providerId="LiveId" clId="{EE219EC4-0B48-4DAA-B6C8-F5305E865B87}" dt="2025-09-16T19:11:36.516" v="2687" actId="1076"/>
-          <ac:picMkLst>
-            <pc:docMk/>
-            <pc:sldMk cId="2467931347" sldId="280"/>
-            <ac:picMk id="8" creationId="{934DF991-C79E-EEB8-D132-8F188CF79091}"/>
-          </ac:picMkLst>
-        </pc:picChg>
-        <pc:picChg chg="add mod">
-          <ac:chgData name="이하나 윤" userId="f658f17427b35de9" providerId="LiveId" clId="{EE219EC4-0B48-4DAA-B6C8-F5305E865B87}" dt="2025-09-16T19:11:38.307" v="2688" actId="1076"/>
-          <ac:picMkLst>
-            <pc:docMk/>
-            <pc:sldMk cId="2467931347" sldId="280"/>
-            <ac:picMk id="18" creationId="{D31DD244-90B0-98A4-ACD7-91DBACE07F05}"/>
-          </ac:picMkLst>
-        </pc:picChg>
-      </pc:sldChg>
-      <pc:sldChg chg="add del">
-        <pc:chgData name="이하나 윤" userId="f658f17427b35de9" providerId="LiveId" clId="{EE219EC4-0B48-4DAA-B6C8-F5305E865B87}" dt="2025-09-15T18:24:05.060" v="713" actId="47"/>
-        <pc:sldMkLst>
-          <pc:docMk/>
-          <pc:sldMk cId="1204944444" sldId="281"/>
-        </pc:sldMkLst>
-      </pc:sldChg>
-      <pc:sldChg chg="addSp modSp add mod">
-        <pc:chgData name="이하나 윤" userId="f658f17427b35de9" providerId="LiveId" clId="{EE219EC4-0B48-4DAA-B6C8-F5305E865B87}" dt="2025-09-16T19:16:32.464" v="2721" actId="1076"/>
-        <pc:sldMkLst>
-          <pc:docMk/>
-          <pc:sldMk cId="1508756470" sldId="282"/>
-        </pc:sldMkLst>
-        <pc:spChg chg="mod">
-          <ac:chgData name="이하나 윤" userId="f658f17427b35de9" providerId="LiveId" clId="{EE219EC4-0B48-4DAA-B6C8-F5305E865B87}" dt="2025-09-15T19:02:48.521" v="1072" actId="113"/>
-          <ac:spMkLst>
-            <pc:docMk/>
-            <pc:sldMk cId="1508756470" sldId="282"/>
-            <ac:spMk id="2" creationId="{B3B6359F-B129-70C3-E6E3-8CDEA2B33BC3}"/>
-          </ac:spMkLst>
-        </pc:spChg>
-        <pc:spChg chg="mod">
-          <ac:chgData name="이하나 윤" userId="f658f17427b35de9" providerId="LiveId" clId="{EE219EC4-0B48-4DAA-B6C8-F5305E865B87}" dt="2025-09-16T18:57:27.110" v="2421" actId="20577"/>
-          <ac:spMkLst>
-            <pc:docMk/>
-            <pc:sldMk cId="1508756470" sldId="282"/>
-            <ac:spMk id="4" creationId="{0E71D581-27EE-8AD4-573D-997E70EC9BFC}"/>
-          </ac:spMkLst>
-        </pc:spChg>
-        <pc:picChg chg="add mod modCrop">
-          <ac:chgData name="이하나 윤" userId="f658f17427b35de9" providerId="LiveId" clId="{EE219EC4-0B48-4DAA-B6C8-F5305E865B87}" dt="2025-09-16T19:16:32.464" v="2721" actId="1076"/>
-          <ac:picMkLst>
-            <pc:docMk/>
-            <pc:sldMk cId="1508756470" sldId="282"/>
-            <ac:picMk id="7" creationId="{88512008-3E5B-24DE-CE71-099B6405D8AF}"/>
-          </ac:picMkLst>
-        </pc:picChg>
-        <pc:picChg chg="add mod">
-          <ac:chgData name="이하나 윤" userId="f658f17427b35de9" providerId="LiveId" clId="{EE219EC4-0B48-4DAA-B6C8-F5305E865B87}" dt="2025-09-15T19:24:39.331" v="1110" actId="1076"/>
-          <ac:picMkLst>
-            <pc:docMk/>
-            <pc:sldMk cId="1508756470" sldId="282"/>
-            <ac:picMk id="1026" creationId="{BF5DB6CE-C7CD-78DB-7DA7-264F8147E1CC}"/>
-          </ac:picMkLst>
-        </pc:picChg>
-      </pc:sldChg>
-      <pc:sldChg chg="modSp add del mod">
-        <pc:chgData name="이하나 윤" userId="f658f17427b35de9" providerId="LiveId" clId="{EE219EC4-0B48-4DAA-B6C8-F5305E865B87}" dt="2025-09-15T18:20:08.690" v="711" actId="47"/>
-        <pc:sldMkLst>
-          <pc:docMk/>
-          <pc:sldMk cId="1852330910" sldId="282"/>
-        </pc:sldMkLst>
-      </pc:sldChg>
-      <pc:sldChg chg="addSp delSp modSp add mod modNotesTx">
-        <pc:chgData name="이하나 윤" userId="f658f17427b35de9" providerId="LiveId" clId="{EE219EC4-0B48-4DAA-B6C8-F5305E865B87}" dt="2025-09-16T19:15:48.827" v="2713" actId="167"/>
-        <pc:sldMkLst>
-          <pc:docMk/>
-          <pc:sldMk cId="341395478" sldId="283"/>
-        </pc:sldMkLst>
-        <pc:spChg chg="mod">
-          <ac:chgData name="이하나 윤" userId="f658f17427b35de9" providerId="LiveId" clId="{EE219EC4-0B48-4DAA-B6C8-F5305E865B87}" dt="2025-09-16T16:26:26.231" v="2311" actId="20577"/>
-          <ac:spMkLst>
-            <pc:docMk/>
-            <pc:sldMk cId="341395478" sldId="283"/>
-            <ac:spMk id="4" creationId="{8B5E24BD-4D2E-7D2C-C488-EBBD442C4AD2}"/>
-          </ac:spMkLst>
-        </pc:spChg>
-        <pc:picChg chg="add mod ord">
-          <ac:chgData name="이하나 윤" userId="f658f17427b35de9" providerId="LiveId" clId="{EE219EC4-0B48-4DAA-B6C8-F5305E865B87}" dt="2025-09-16T19:15:40.893" v="2712" actId="1076"/>
-          <ac:picMkLst>
-            <pc:docMk/>
-            <pc:sldMk cId="341395478" sldId="283"/>
-            <ac:picMk id="8" creationId="{AAB94587-D72A-4395-6229-00BBD39ED9B2}"/>
-          </ac:picMkLst>
-        </pc:picChg>
-        <pc:picChg chg="add mod modCrop">
-          <ac:chgData name="이하나 윤" userId="f658f17427b35de9" providerId="LiveId" clId="{EE219EC4-0B48-4DAA-B6C8-F5305E865B87}" dt="2025-09-16T19:15:35.182" v="2709" actId="1076"/>
-          <ac:picMkLst>
-            <pc:docMk/>
-            <pc:sldMk cId="341395478" sldId="283"/>
-            <ac:picMk id="10" creationId="{6F1C8086-587C-C3F1-EEEE-4CA1B74B764B}"/>
-          </ac:picMkLst>
-        </pc:picChg>
-        <pc:picChg chg="add mod ord modCrop">
-          <ac:chgData name="이하나 윤" userId="f658f17427b35de9" providerId="LiveId" clId="{EE219EC4-0B48-4DAA-B6C8-F5305E865B87}" dt="2025-09-16T19:15:48.827" v="2713" actId="167"/>
-          <ac:picMkLst>
-            <pc:docMk/>
-            <pc:sldMk cId="341395478" sldId="283"/>
-            <ac:picMk id="11" creationId="{5F582FEE-6B42-4CD3-B919-B911F5215CE1}"/>
-          </ac:picMkLst>
-        </pc:picChg>
-      </pc:sldChg>
-      <pc:sldChg chg="modSp add mod">
-        <pc:chgData name="이하나 윤" userId="f658f17427b35de9" providerId="LiveId" clId="{EE219EC4-0B48-4DAA-B6C8-F5305E865B87}" dt="2025-09-16T18:59:09.049" v="2593" actId="20577"/>
-        <pc:sldMkLst>
-          <pc:docMk/>
-          <pc:sldMk cId="1852283351" sldId="284"/>
-        </pc:sldMkLst>
-        <pc:spChg chg="mod">
-          <ac:chgData name="이하나 윤" userId="f658f17427b35de9" providerId="LiveId" clId="{EE219EC4-0B48-4DAA-B6C8-F5305E865B87}" dt="2025-09-16T18:59:09.049" v="2593" actId="20577"/>
-          <ac:spMkLst>
-            <pc:docMk/>
-            <pc:sldMk cId="1852283351" sldId="284"/>
-            <ac:spMk id="4" creationId="{DEADCFFD-643A-E027-52D4-B3D607DE4A1A}"/>
-          </ac:spMkLst>
-        </pc:spChg>
-      </pc:sldChg>
-    </pc:docChg>
-  </pc:docChgLst>
   <pc:docChgLst>
     <pc:chgData name="이하나 윤" userId="f658f17427b35de9" providerId="LiveId" clId="{E9838EAF-D27B-40BD-973C-B669816E3ACD}"/>
     <pc:docChg chg="undo redo custSel addSld delSld modSld sldOrd">
@@ -800,6 +557,250 @@
       </pc:sldChg>
     </pc:docChg>
   </pc:docChgLst>
+  <pc:docChgLst>
+    <pc:chgData name="이하나 윤" userId="f658f17427b35de9" providerId="LiveId" clId="{EE219EC4-0B48-4DAA-B6C8-F5305E865B87}"/>
+    <pc:docChg chg="undo custSel addSld delSld modSld sldOrd">
+      <pc:chgData name="이하나 윤" userId="f658f17427b35de9" providerId="LiveId" clId="{EE219EC4-0B48-4DAA-B6C8-F5305E865B87}" dt="2025-09-16T19:16:32.464" v="2721" actId="1076"/>
+      <pc:docMkLst>
+        <pc:docMk/>
+      </pc:docMkLst>
+      <pc:sldChg chg="modSp mod">
+        <pc:chgData name="이하나 윤" userId="f658f17427b35de9" providerId="LiveId" clId="{EE219EC4-0B48-4DAA-B6C8-F5305E865B87}" dt="2025-09-15T18:05:38.219" v="12" actId="20577"/>
+        <pc:sldMkLst>
+          <pc:docMk/>
+          <pc:sldMk cId="695329364" sldId="256"/>
+        </pc:sldMkLst>
+        <pc:spChg chg="mod">
+          <ac:chgData name="이하나 윤" userId="f658f17427b35de9" providerId="LiveId" clId="{EE219EC4-0B48-4DAA-B6C8-F5305E865B87}" dt="2025-09-15T18:05:18.916" v="5" actId="20577"/>
+          <ac:spMkLst>
+            <pc:docMk/>
+            <pc:sldMk cId="695329364" sldId="256"/>
+            <ac:spMk id="2" creationId="{279A97C8-12D7-ACBE-C5A4-75DBE4566ED8}"/>
+          </ac:spMkLst>
+        </pc:spChg>
+        <pc:spChg chg="mod">
+          <ac:chgData name="이하나 윤" userId="f658f17427b35de9" providerId="LiveId" clId="{EE219EC4-0B48-4DAA-B6C8-F5305E865B87}" dt="2025-09-15T18:05:38.219" v="12" actId="20577"/>
+          <ac:spMkLst>
+            <pc:docMk/>
+            <pc:sldMk cId="695329364" sldId="256"/>
+            <ac:spMk id="3" creationId="{F2DB0B14-7B93-035D-6893-C7A5FA5E3A1F}"/>
+          </ac:spMkLst>
+        </pc:spChg>
+        <pc:spChg chg="mod">
+          <ac:chgData name="이하나 윤" userId="f658f17427b35de9" providerId="LiveId" clId="{EE219EC4-0B48-4DAA-B6C8-F5305E865B87}" dt="2025-09-15T18:05:12.401" v="4" actId="20577"/>
+          <ac:spMkLst>
+            <pc:docMk/>
+            <pc:sldMk cId="695329364" sldId="256"/>
+            <ac:spMk id="4" creationId="{77A1A4CF-75CA-73D9-FBFB-9F192FB89E8E}"/>
+          </ac:spMkLst>
+        </pc:spChg>
+      </pc:sldChg>
+      <pc:sldChg chg="modSp mod">
+        <pc:chgData name="이하나 윤" userId="f658f17427b35de9" providerId="LiveId" clId="{EE219EC4-0B48-4DAA-B6C8-F5305E865B87}" dt="2025-09-16T18:55:04.403" v="2354" actId="20577"/>
+        <pc:sldMkLst>
+          <pc:docMk/>
+          <pc:sldMk cId="1843325994" sldId="257"/>
+        </pc:sldMkLst>
+        <pc:spChg chg="mod">
+          <ac:chgData name="이하나 윤" userId="f658f17427b35de9" providerId="LiveId" clId="{EE219EC4-0B48-4DAA-B6C8-F5305E865B87}" dt="2025-09-16T18:55:04.403" v="2354" actId="20577"/>
+          <ac:spMkLst>
+            <pc:docMk/>
+            <pc:sldMk cId="1843325994" sldId="257"/>
+            <ac:spMk id="4" creationId="{566C19CA-242E-6D40-AE00-592C2404271D}"/>
+          </ac:spMkLst>
+        </pc:spChg>
+      </pc:sldChg>
+      <pc:sldChg chg="del">
+        <pc:chgData name="이하나 윤" userId="f658f17427b35de9" providerId="LiveId" clId="{EE219EC4-0B48-4DAA-B6C8-F5305E865B87}" dt="2025-09-16T18:54:47.202" v="2312" actId="47"/>
+        <pc:sldMkLst>
+          <pc:docMk/>
+          <pc:sldMk cId="565639903" sldId="274"/>
+        </pc:sldMkLst>
+      </pc:sldChg>
+      <pc:sldChg chg="del">
+        <pc:chgData name="이하나 윤" userId="f658f17427b35de9" providerId="LiveId" clId="{EE219EC4-0B48-4DAA-B6C8-F5305E865B87}" dt="2025-09-16T18:54:47.202" v="2312" actId="47"/>
+        <pc:sldMkLst>
+          <pc:docMk/>
+          <pc:sldMk cId="663441846" sldId="275"/>
+        </pc:sldMkLst>
+      </pc:sldChg>
+      <pc:sldChg chg="del">
+        <pc:chgData name="이하나 윤" userId="f658f17427b35de9" providerId="LiveId" clId="{EE219EC4-0B48-4DAA-B6C8-F5305E865B87}" dt="2025-09-16T18:54:47.202" v="2312" actId="47"/>
+        <pc:sldMkLst>
+          <pc:docMk/>
+          <pc:sldMk cId="1894509827" sldId="276"/>
+        </pc:sldMkLst>
+      </pc:sldChg>
+      <pc:sldChg chg="del">
+        <pc:chgData name="이하나 윤" userId="f658f17427b35de9" providerId="LiveId" clId="{EE219EC4-0B48-4DAA-B6C8-F5305E865B87}" dt="2025-09-16T18:54:47.202" v="2312" actId="47"/>
+        <pc:sldMkLst>
+          <pc:docMk/>
+          <pc:sldMk cId="1664335280" sldId="278"/>
+        </pc:sldMkLst>
+      </pc:sldChg>
+      <pc:sldChg chg="del">
+        <pc:chgData name="이하나 윤" userId="f658f17427b35de9" providerId="LiveId" clId="{EE219EC4-0B48-4DAA-B6C8-F5305E865B87}" dt="2025-09-16T18:54:47.202" v="2312" actId="47"/>
+        <pc:sldMkLst>
+          <pc:docMk/>
+          <pc:sldMk cId="3952254055" sldId="279"/>
+        </pc:sldMkLst>
+      </pc:sldChg>
+      <pc:sldChg chg="addSp delSp modSp new mod ord">
+        <pc:chgData name="이하나 윤" userId="f658f17427b35de9" providerId="LiveId" clId="{EE219EC4-0B48-4DAA-B6C8-F5305E865B87}" dt="2025-09-16T19:11:38.307" v="2688" actId="1076"/>
+        <pc:sldMkLst>
+          <pc:docMk/>
+          <pc:sldMk cId="2467931347" sldId="280"/>
+        </pc:sldMkLst>
+        <pc:spChg chg="mod">
+          <ac:chgData name="이하나 윤" userId="f658f17427b35de9" providerId="LiveId" clId="{EE219EC4-0B48-4DAA-B6C8-F5305E865B87}" dt="2025-09-15T19:02:51.669" v="1073" actId="113"/>
+          <ac:spMkLst>
+            <pc:docMk/>
+            <pc:sldMk cId="2467931347" sldId="280"/>
+            <ac:spMk id="2" creationId="{88E5FA1D-825F-1565-5218-FAB64E09C09E}"/>
+          </ac:spMkLst>
+        </pc:spChg>
+        <pc:spChg chg="mod">
+          <ac:chgData name="이하나 윤" userId="f658f17427b35de9" providerId="LiveId" clId="{EE219EC4-0B48-4DAA-B6C8-F5305E865B87}" dt="2025-09-15T18:06:08.584" v="28" actId="20577"/>
+          <ac:spMkLst>
+            <pc:docMk/>
+            <pc:sldMk cId="2467931347" sldId="280"/>
+            <ac:spMk id="3" creationId="{8DC65DF5-0CBF-CAB8-34E8-FA354D7071C8}"/>
+          </ac:spMkLst>
+        </pc:spChg>
+        <pc:spChg chg="mod">
+          <ac:chgData name="이하나 윤" userId="f658f17427b35de9" providerId="LiveId" clId="{EE219EC4-0B48-4DAA-B6C8-F5305E865B87}" dt="2025-09-16T18:59:05.570" v="2587" actId="20577"/>
+          <ac:spMkLst>
+            <pc:docMk/>
+            <pc:sldMk cId="2467931347" sldId="280"/>
+            <ac:spMk id="4" creationId="{A65BED05-43EC-C289-3A55-8A21041F8B8B}"/>
+          </ac:spMkLst>
+        </pc:spChg>
+        <pc:picChg chg="add mod ord">
+          <ac:chgData name="이하나 윤" userId="f658f17427b35de9" providerId="LiveId" clId="{EE219EC4-0B48-4DAA-B6C8-F5305E865B87}" dt="2025-09-16T19:11:36.516" v="2687" actId="1076"/>
+          <ac:picMkLst>
+            <pc:docMk/>
+            <pc:sldMk cId="2467931347" sldId="280"/>
+            <ac:picMk id="8" creationId="{934DF991-C79E-EEB8-D132-8F188CF79091}"/>
+          </ac:picMkLst>
+        </pc:picChg>
+        <pc:picChg chg="add mod">
+          <ac:chgData name="이하나 윤" userId="f658f17427b35de9" providerId="LiveId" clId="{EE219EC4-0B48-4DAA-B6C8-F5305E865B87}" dt="2025-09-16T19:11:38.307" v="2688" actId="1076"/>
+          <ac:picMkLst>
+            <pc:docMk/>
+            <pc:sldMk cId="2467931347" sldId="280"/>
+            <ac:picMk id="18" creationId="{D31DD244-90B0-98A4-ACD7-91DBACE07F05}"/>
+          </ac:picMkLst>
+        </pc:picChg>
+      </pc:sldChg>
+      <pc:sldChg chg="add del">
+        <pc:chgData name="이하나 윤" userId="f658f17427b35de9" providerId="LiveId" clId="{EE219EC4-0B48-4DAA-B6C8-F5305E865B87}" dt="2025-09-15T18:24:05.060" v="713" actId="47"/>
+        <pc:sldMkLst>
+          <pc:docMk/>
+          <pc:sldMk cId="1204944444" sldId="281"/>
+        </pc:sldMkLst>
+      </pc:sldChg>
+      <pc:sldChg chg="addSp modSp add mod">
+        <pc:chgData name="이하나 윤" userId="f658f17427b35de9" providerId="LiveId" clId="{EE219EC4-0B48-4DAA-B6C8-F5305E865B87}" dt="2025-09-16T19:16:32.464" v="2721" actId="1076"/>
+        <pc:sldMkLst>
+          <pc:docMk/>
+          <pc:sldMk cId="1508756470" sldId="282"/>
+        </pc:sldMkLst>
+        <pc:spChg chg="mod">
+          <ac:chgData name="이하나 윤" userId="f658f17427b35de9" providerId="LiveId" clId="{EE219EC4-0B48-4DAA-B6C8-F5305E865B87}" dt="2025-09-15T19:02:48.521" v="1072" actId="113"/>
+          <ac:spMkLst>
+            <pc:docMk/>
+            <pc:sldMk cId="1508756470" sldId="282"/>
+            <ac:spMk id="2" creationId="{B3B6359F-B129-70C3-E6E3-8CDEA2B33BC3}"/>
+          </ac:spMkLst>
+        </pc:spChg>
+        <pc:spChg chg="mod">
+          <ac:chgData name="이하나 윤" userId="f658f17427b35de9" providerId="LiveId" clId="{EE219EC4-0B48-4DAA-B6C8-F5305E865B87}" dt="2025-09-16T18:57:27.110" v="2421" actId="20577"/>
+          <ac:spMkLst>
+            <pc:docMk/>
+            <pc:sldMk cId="1508756470" sldId="282"/>
+            <ac:spMk id="4" creationId="{0E71D581-27EE-8AD4-573D-997E70EC9BFC}"/>
+          </ac:spMkLst>
+        </pc:spChg>
+        <pc:picChg chg="add mod modCrop">
+          <ac:chgData name="이하나 윤" userId="f658f17427b35de9" providerId="LiveId" clId="{EE219EC4-0B48-4DAA-B6C8-F5305E865B87}" dt="2025-09-16T19:16:32.464" v="2721" actId="1076"/>
+          <ac:picMkLst>
+            <pc:docMk/>
+            <pc:sldMk cId="1508756470" sldId="282"/>
+            <ac:picMk id="7" creationId="{88512008-3E5B-24DE-CE71-099B6405D8AF}"/>
+          </ac:picMkLst>
+        </pc:picChg>
+        <pc:picChg chg="add mod">
+          <ac:chgData name="이하나 윤" userId="f658f17427b35de9" providerId="LiveId" clId="{EE219EC4-0B48-4DAA-B6C8-F5305E865B87}" dt="2025-09-15T19:24:39.331" v="1110" actId="1076"/>
+          <ac:picMkLst>
+            <pc:docMk/>
+            <pc:sldMk cId="1508756470" sldId="282"/>
+            <ac:picMk id="1026" creationId="{BF5DB6CE-C7CD-78DB-7DA7-264F8147E1CC}"/>
+          </ac:picMkLst>
+        </pc:picChg>
+      </pc:sldChg>
+      <pc:sldChg chg="modSp add del mod">
+        <pc:chgData name="이하나 윤" userId="f658f17427b35de9" providerId="LiveId" clId="{EE219EC4-0B48-4DAA-B6C8-F5305E865B87}" dt="2025-09-15T18:20:08.690" v="711" actId="47"/>
+        <pc:sldMkLst>
+          <pc:docMk/>
+          <pc:sldMk cId="1852330910" sldId="282"/>
+        </pc:sldMkLst>
+      </pc:sldChg>
+      <pc:sldChg chg="addSp delSp modSp add mod modNotesTx">
+        <pc:chgData name="이하나 윤" userId="f658f17427b35de9" providerId="LiveId" clId="{EE219EC4-0B48-4DAA-B6C8-F5305E865B87}" dt="2025-09-16T19:15:48.827" v="2713" actId="167"/>
+        <pc:sldMkLst>
+          <pc:docMk/>
+          <pc:sldMk cId="341395478" sldId="283"/>
+        </pc:sldMkLst>
+        <pc:spChg chg="mod">
+          <ac:chgData name="이하나 윤" userId="f658f17427b35de9" providerId="LiveId" clId="{EE219EC4-0B48-4DAA-B6C8-F5305E865B87}" dt="2025-09-16T16:26:26.231" v="2311" actId="20577"/>
+          <ac:spMkLst>
+            <pc:docMk/>
+            <pc:sldMk cId="341395478" sldId="283"/>
+            <ac:spMk id="4" creationId="{8B5E24BD-4D2E-7D2C-C488-EBBD442C4AD2}"/>
+          </ac:spMkLst>
+        </pc:spChg>
+        <pc:picChg chg="add mod ord">
+          <ac:chgData name="이하나 윤" userId="f658f17427b35de9" providerId="LiveId" clId="{EE219EC4-0B48-4DAA-B6C8-F5305E865B87}" dt="2025-09-16T19:15:40.893" v="2712" actId="1076"/>
+          <ac:picMkLst>
+            <pc:docMk/>
+            <pc:sldMk cId="341395478" sldId="283"/>
+            <ac:picMk id="8" creationId="{AAB94587-D72A-4395-6229-00BBD39ED9B2}"/>
+          </ac:picMkLst>
+        </pc:picChg>
+        <pc:picChg chg="add mod modCrop">
+          <ac:chgData name="이하나 윤" userId="f658f17427b35de9" providerId="LiveId" clId="{EE219EC4-0B48-4DAA-B6C8-F5305E865B87}" dt="2025-09-16T19:15:35.182" v="2709" actId="1076"/>
+          <ac:picMkLst>
+            <pc:docMk/>
+            <pc:sldMk cId="341395478" sldId="283"/>
+            <ac:picMk id="10" creationId="{6F1C8086-587C-C3F1-EEEE-4CA1B74B764B}"/>
+          </ac:picMkLst>
+        </pc:picChg>
+        <pc:picChg chg="add mod ord modCrop">
+          <ac:chgData name="이하나 윤" userId="f658f17427b35de9" providerId="LiveId" clId="{EE219EC4-0B48-4DAA-B6C8-F5305E865B87}" dt="2025-09-16T19:15:48.827" v="2713" actId="167"/>
+          <ac:picMkLst>
+            <pc:docMk/>
+            <pc:sldMk cId="341395478" sldId="283"/>
+            <ac:picMk id="11" creationId="{5F582FEE-6B42-4CD3-B919-B911F5215CE1}"/>
+          </ac:picMkLst>
+        </pc:picChg>
+      </pc:sldChg>
+      <pc:sldChg chg="modSp add mod">
+        <pc:chgData name="이하나 윤" userId="f658f17427b35de9" providerId="LiveId" clId="{EE219EC4-0B48-4DAA-B6C8-F5305E865B87}" dt="2025-09-16T18:59:09.049" v="2593" actId="20577"/>
+        <pc:sldMkLst>
+          <pc:docMk/>
+          <pc:sldMk cId="1852283351" sldId="284"/>
+        </pc:sldMkLst>
+        <pc:spChg chg="mod">
+          <ac:chgData name="이하나 윤" userId="f658f17427b35de9" providerId="LiveId" clId="{EE219EC4-0B48-4DAA-B6C8-F5305E865B87}" dt="2025-09-16T18:59:09.049" v="2593" actId="20577"/>
+          <ac:spMkLst>
+            <pc:docMk/>
+            <pc:sldMk cId="1852283351" sldId="284"/>
+            <ac:spMk id="4" creationId="{DEADCFFD-643A-E027-52D4-B3D607DE4A1A}"/>
+          </ac:spMkLst>
+        </pc:spChg>
+      </pc:sldChg>
+    </pc:docChg>
+  </pc:docChgLst>
 </pc:chgInfo>
 </file>
 
@@ -897,7 +898,7 @@
           <a:p>
             <a:fld id="{90ADBB8C-8191-4AEC-B0E4-021A6DCC5E88}" type="datetimeFigureOut">
               <a:rPr lang="ko-KR" altLang="en-US" smtClean="0"/>
-              <a:t>2025-09-28</a:t>
+              <a:t>2025-10-14</a:t>
             </a:fld>
             <a:endParaRPr lang="ko-KR" altLang="en-US"/>
           </a:p>
@@ -1074,7 +1075,7 @@
           <a:p>
             <a:fld id="{9A139F74-74AF-4C37-AE84-1000E0D0E51D}" type="datetimeFigureOut">
               <a:rPr lang="ko-KR" altLang="en-US" smtClean="0"/>
-              <a:t>2025-09-28</a:t>
+              <a:t>2025-10-14</a:t>
             </a:fld>
             <a:endParaRPr lang="ko-KR" altLang="en-US"/>
           </a:p>
@@ -1716,7 +1717,7 @@
           <a:p>
             <a:fld id="{FBFF74CB-B97E-448A-8613-336F71D317F5}" type="datetime1">
               <a:rPr lang="ko-KR" altLang="en-US" smtClean="0"/>
-              <a:t>2025-09-28</a:t>
+              <a:t>2025-10-14</a:t>
             </a:fld>
             <a:endParaRPr lang="ko-KR" altLang="en-US"/>
           </a:p>
@@ -2004,7 +2005,7 @@
           <a:p>
             <a:fld id="{6D5A3F2E-880D-4AB2-BE87-1DABB4D9D36B}" type="datetime1">
               <a:rPr lang="ko-KR" altLang="en-US" smtClean="0"/>
-              <a:t>2025-09-28</a:t>
+              <a:t>2025-10-14</a:t>
             </a:fld>
             <a:endParaRPr lang="ko-KR" altLang="en-US"/>
           </a:p>
@@ -2202,7 +2203,7 @@
           <a:p>
             <a:fld id="{E225792B-2F2C-46B3-9536-A6BE584A3133}" type="datetime1">
               <a:rPr lang="ko-KR" altLang="en-US" smtClean="0"/>
-              <a:t>2025-09-28</a:t>
+              <a:t>2025-10-14</a:t>
             </a:fld>
             <a:endParaRPr lang="ko-KR" altLang="en-US"/>
           </a:p>
@@ -2410,7 +2411,7 @@
           <a:p>
             <a:fld id="{B959B1C4-1FB0-4ED1-88EC-81D9419D81DC}" type="datetime1">
               <a:rPr lang="ko-KR" altLang="en-US" smtClean="0"/>
-              <a:t>2025-09-28</a:t>
+              <a:t>2025-10-14</a:t>
             </a:fld>
             <a:endParaRPr lang="ko-KR" altLang="en-US"/>
           </a:p>
@@ -2679,7 +2680,7 @@
           <a:p>
             <a:fld id="{644DB65B-E6AE-4B39-8D08-8DC3DC9B3DE6}" type="datetime1">
               <a:rPr lang="ko-KR" altLang="en-US" smtClean="0"/>
-              <a:t>2025-09-28</a:t>
+              <a:t>2025-10-14</a:t>
             </a:fld>
             <a:endParaRPr lang="ko-KR" altLang="en-US"/>
           </a:p>
@@ -2948,7 +2949,7 @@
           <a:p>
             <a:fld id="{644DB65B-E6AE-4B39-8D08-8DC3DC9B3DE6}" type="datetime1">
               <a:rPr lang="ko-KR" altLang="en-US" smtClean="0"/>
-              <a:t>2025-09-28</a:t>
+              <a:t>2025-10-14</a:t>
             </a:fld>
             <a:endParaRPr lang="ko-KR" altLang="en-US"/>
           </a:p>
@@ -3260,7 +3261,7 @@
           <a:p>
             <a:fld id="{A80E6DAD-F59F-4DF2-B36E-B1403061A098}" type="datetime1">
               <a:rPr lang="ko-KR" altLang="en-US" smtClean="0"/>
-              <a:t>2025-09-28</a:t>
+              <a:t>2025-10-14</a:t>
             </a:fld>
             <a:endParaRPr lang="ko-KR" altLang="en-US"/>
           </a:p>
@@ -3525,7 +3526,7 @@
           <a:p>
             <a:fld id="{65E7A435-D09E-4012-8A5A-CB367CE86DE7}" type="datetime1">
               <a:rPr lang="ko-KR" altLang="en-US" smtClean="0"/>
-              <a:t>2025-09-28</a:t>
+              <a:t>2025-10-14</a:t>
             </a:fld>
             <a:endParaRPr lang="ko-KR" altLang="en-US"/>
           </a:p>
@@ -3937,7 +3938,7 @@
           <a:p>
             <a:fld id="{EAEE4FE5-8155-4A7B-B9F1-1277B556A678}" type="datetime1">
               <a:rPr lang="ko-KR" altLang="en-US" smtClean="0"/>
-              <a:t>2025-09-28</a:t>
+              <a:t>2025-10-14</a:t>
             </a:fld>
             <a:endParaRPr lang="ko-KR" altLang="en-US"/>
           </a:p>
@@ -4078,7 +4079,7 @@
           <a:p>
             <a:fld id="{A5DDFFB1-F462-49A1-A952-F86898531EFC}" type="datetime1">
               <a:rPr lang="ko-KR" altLang="en-US" smtClean="0"/>
-              <a:t>2025-09-28</a:t>
+              <a:t>2025-10-14</a:t>
             </a:fld>
             <a:endParaRPr lang="ko-KR" altLang="en-US"/>
           </a:p>
@@ -4191,7 +4192,7 @@
           <a:p>
             <a:fld id="{DF307744-A7EE-42A9-B4BD-A75049B592B9}" type="datetime1">
               <a:rPr lang="ko-KR" altLang="en-US" smtClean="0"/>
-              <a:t>2025-09-28</a:t>
+              <a:t>2025-10-14</a:t>
             </a:fld>
             <a:endParaRPr lang="ko-KR" altLang="en-US"/>
           </a:p>
@@ -4502,7 +4503,7 @@
           <a:p>
             <a:fld id="{DEB58597-5F16-46FB-9810-19206F29ADC7}" type="datetime1">
               <a:rPr lang="ko-KR" altLang="en-US" smtClean="0"/>
-              <a:t>2025-09-28</a:t>
+              <a:t>2025-10-14</a:t>
             </a:fld>
             <a:endParaRPr lang="ko-KR" altLang="en-US"/>
           </a:p>
@@ -4743,7 +4744,7 @@
           <a:p>
             <a:fld id="{F9163AAC-BAFF-4F5F-9CEA-0445F100C3E2}" type="datetime1">
               <a:rPr lang="ko-KR" altLang="en-US" smtClean="0"/>
-              <a:t>2025-09-28</a:t>
+              <a:t>2025-10-14</a:t>
             </a:fld>
             <a:endParaRPr lang="ko-KR" altLang="en-US"/>
           </a:p>
@@ -5301,7 +5302,7 @@
               <a:rPr lang="en-US" altLang="ko-KR" dirty="0">
                 <a:ea typeface="맑은 고딕"/>
               </a:rPr>
-              <a:t>2025.09.28</a:t>
+              <a:t>2025.10.14</a:t>
             </a:r>
           </a:p>
         </p:txBody>
@@ -5503,6 +5504,180 @@
     <p:extLst>
       <p:ext uri="{BB962C8B-B14F-4D97-AF65-F5344CB8AC3E}">
         <p14:creationId xmlns:p14="http://schemas.microsoft.com/office/powerpoint/2010/main" val="3324608471"/>
+      </p:ext>
+    </p:extLst>
+  </p:cSld>
+  <p:clrMapOvr>
+    <a:masterClrMapping/>
+  </p:clrMapOvr>
+</p:sld>
+</file>
+
+<file path=ppt/slides/slide11.xml><?xml version="1.0" encoding="utf-8"?>
+<p:sld xmlns:a="http://schemas.openxmlformats.org/drawingml/2006/main" xmlns:r="http://schemas.openxmlformats.org/officeDocument/2006/relationships" xmlns:p="http://schemas.openxmlformats.org/presentationml/2006/main">
+  <p:cSld>
+    <p:spTree>
+      <p:nvGrpSpPr>
+        <p:cNvPr id="1" name=""/>
+        <p:cNvGrpSpPr/>
+        <p:nvPr/>
+      </p:nvGrpSpPr>
+      <p:grpSpPr>
+        <a:xfrm>
+          <a:off x="0" y="0"/>
+          <a:ext cx="0" cy="0"/>
+          <a:chOff x="0" y="0"/>
+          <a:chExt cx="0" cy="0"/>
+        </a:xfrm>
+      </p:grpSpPr>
+      <p:sp>
+        <p:nvSpPr>
+          <p:cNvPr id="2" name="텍스트 개체 틀 1">
+            <a:extLst>
+              <a:ext uri="{FF2B5EF4-FFF2-40B4-BE49-F238E27FC236}">
+                <a16:creationId xmlns:a16="http://schemas.microsoft.com/office/drawing/2014/main" id="{523863D3-FE20-9DB2-0878-2D28D1E45D26}"/>
+              </a:ext>
+            </a:extLst>
+          </p:cNvPr>
+          <p:cNvSpPr>
+            <a:spLocks noGrp="1"/>
+          </p:cNvSpPr>
+          <p:nvPr>
+            <p:ph type="body" sz="quarter" idx="13"/>
+          </p:nvPr>
+        </p:nvSpPr>
+        <p:spPr>
+          <a:xfrm>
+            <a:off x="0" y="654689"/>
+            <a:ext cx="1600200" cy="2349500"/>
+          </a:xfrm>
+        </p:spPr>
+        <p:txBody>
+          <a:bodyPr/>
+          <a:lstStyle/>
+          <a:p>
+            <a:endParaRPr lang="ko-KR" altLang="en-US"/>
+          </a:p>
+        </p:txBody>
+      </p:sp>
+      <p:sp>
+        <p:nvSpPr>
+          <p:cNvPr id="3" name="제목 2">
+            <a:extLst>
+              <a:ext uri="{FF2B5EF4-FFF2-40B4-BE49-F238E27FC236}">
+                <a16:creationId xmlns:a16="http://schemas.microsoft.com/office/drawing/2014/main" id="{B6F5885D-0CF1-D070-6313-AF6AB04B2882}"/>
+              </a:ext>
+            </a:extLst>
+          </p:cNvPr>
+          <p:cNvSpPr>
+            <a:spLocks noGrp="1"/>
+          </p:cNvSpPr>
+          <p:nvPr>
+            <p:ph type="title"/>
+          </p:nvPr>
+        </p:nvSpPr>
+        <p:spPr>
+          <a:xfrm>
+            <a:off x="0" y="119158"/>
+            <a:ext cx="1600200" cy="535531"/>
+          </a:xfrm>
+        </p:spPr>
+        <p:txBody>
+          <a:bodyPr/>
+          <a:lstStyle/>
+          <a:p>
+            <a:r>
+              <a:rPr lang="ko-KR" altLang="en-US" dirty="0"/>
+              <a:t>로그</a:t>
+            </a:r>
+          </a:p>
+        </p:txBody>
+      </p:sp>
+      <p:sp>
+        <p:nvSpPr>
+          <p:cNvPr id="4" name="내용 개체 틀 3">
+            <a:extLst>
+              <a:ext uri="{FF2B5EF4-FFF2-40B4-BE49-F238E27FC236}">
+                <a16:creationId xmlns:a16="http://schemas.microsoft.com/office/drawing/2014/main" id="{6EBB37A3-1AD4-AC36-9855-C2F88ADC77CF}"/>
+              </a:ext>
+            </a:extLst>
+          </p:cNvPr>
+          <p:cNvSpPr>
+            <a:spLocks noGrp="1"/>
+          </p:cNvSpPr>
+          <p:nvPr>
+            <p:ph idx="1"/>
+          </p:nvPr>
+        </p:nvSpPr>
+        <p:spPr/>
+        <p:txBody>
+          <a:bodyPr/>
+          <a:lstStyle/>
+          <a:p>
+            <a:r>
+              <a:rPr lang="en-US" altLang="ko-KR" dirty="0"/>
+              <a:t>1014: </a:t>
+            </a:r>
+            <a:r>
+              <a:rPr lang="ko-KR" altLang="en-US" dirty="0"/>
+              <a:t>용어 변경</a:t>
+            </a:r>
+            <a:r>
+              <a:rPr lang="en-US" altLang="ko-KR" dirty="0"/>
+              <a:t>. </a:t>
+            </a:r>
+            <a:r>
+              <a:rPr lang="ko-KR" altLang="en-US" dirty="0" err="1"/>
+              <a:t>쿨타임</a:t>
+            </a:r>
+            <a:r>
+              <a:rPr lang="ko-KR" altLang="en-US" dirty="0"/>
+              <a:t> </a:t>
+            </a:r>
+            <a:r>
+              <a:rPr lang="en-US" altLang="ko-KR" dirty="0"/>
+              <a:t>-&gt; </a:t>
+            </a:r>
+            <a:r>
+              <a:rPr lang="ko-KR" altLang="en-US" dirty="0"/>
+              <a:t>장전 시간</a:t>
+            </a:r>
+          </a:p>
+        </p:txBody>
+      </p:sp>
+      <p:sp>
+        <p:nvSpPr>
+          <p:cNvPr id="5" name="슬라이드 번호 개체 틀 4">
+            <a:extLst>
+              <a:ext uri="{FF2B5EF4-FFF2-40B4-BE49-F238E27FC236}">
+                <a16:creationId xmlns:a16="http://schemas.microsoft.com/office/drawing/2014/main" id="{5065B350-110C-689F-9A0F-55E46CD19AC0}"/>
+              </a:ext>
+            </a:extLst>
+          </p:cNvPr>
+          <p:cNvSpPr>
+            <a:spLocks noGrp="1"/>
+          </p:cNvSpPr>
+          <p:nvPr>
+            <p:ph type="sldNum" sz="quarter" idx="12"/>
+          </p:nvPr>
+        </p:nvSpPr>
+        <p:spPr/>
+        <p:txBody>
+          <a:bodyPr/>
+          <a:lstStyle/>
+          <a:p>
+            <a:fld id="{2A226FEB-661D-4181-84CB-C53DCFE1931A}" type="slidenum">
+              <a:rPr lang="ko-KR" altLang="en-US" smtClean="0"/>
+              <a:t>11</a:t>
+            </a:fld>
+            <a:endParaRPr lang="ko-KR" altLang="en-US"/>
+          </a:p>
+        </p:txBody>
+      </p:sp>
+    </p:spTree>
+    <p:extLst>
+      <p:ext uri="{BB962C8B-B14F-4D97-AF65-F5344CB8AC3E}">
+        <p14:creationId xmlns:p14="http://schemas.microsoft.com/office/powerpoint/2010/main" val="1782247086"/>
       </p:ext>
     </p:extLst>
   </p:cSld>
@@ -6679,8 +6854,8 @@
           </a:p>
           <a:p>
             <a:r>
-              <a:rPr lang="ko-KR" altLang="en-US" dirty="0" err="1"/>
-              <a:t>쿨타임</a:t>
+              <a:rPr lang="ko-KR" altLang="en-US" dirty="0"/>
+              <a:t>장전 시간</a:t>
             </a:r>
             <a:r>
               <a:rPr lang="en-US" altLang="ko-KR" dirty="0"/>
@@ -7163,8 +7338,8 @@
           </a:p>
           <a:p>
             <a:r>
-              <a:rPr lang="ko-KR" altLang="en-US" dirty="0" err="1"/>
-              <a:t>쿨타임</a:t>
+              <a:rPr lang="ko-KR" altLang="en-US" dirty="0"/>
+              <a:t>장전 시간</a:t>
             </a:r>
             <a:r>
               <a:rPr lang="en-US" altLang="ko-KR" dirty="0"/>

--- a/기획/전투 기획.pptx
+++ b/기획/전투 기획.pptx
@@ -5,10 +5,10 @@
     <p:sldMasterId id="2147483648" r:id="rId1"/>
   </p:sldMasterIdLst>
   <p:notesMasterIdLst>
-    <p:notesMasterId r:id="rId13"/>
+    <p:notesMasterId r:id="rId12"/>
   </p:notesMasterIdLst>
   <p:handoutMasterIdLst>
-    <p:handoutMasterId r:id="rId14"/>
+    <p:handoutMasterId r:id="rId13"/>
   </p:handoutMasterIdLst>
   <p:sldIdLst>
     <p:sldId id="256" r:id="rId2"/>
@@ -17,11 +17,10 @@
     <p:sldId id="284" r:id="rId5"/>
     <p:sldId id="282" r:id="rId6"/>
     <p:sldId id="283" r:id="rId7"/>
-    <p:sldId id="285" r:id="rId8"/>
-    <p:sldId id="286" r:id="rId9"/>
-    <p:sldId id="288" r:id="rId10"/>
-    <p:sldId id="289" r:id="rId11"/>
-    <p:sldId id="290" r:id="rId12"/>
+    <p:sldId id="286" r:id="rId8"/>
+    <p:sldId id="288" r:id="rId9"/>
+    <p:sldId id="289" r:id="rId10"/>
+    <p:sldId id="290" r:id="rId11"/>
   </p:sldIdLst>
   <p:sldSz cx="12192000" cy="6858000"/>
   <p:notesSz cx="6858000" cy="9144000"/>
@@ -898,7 +897,7 @@
           <a:p>
             <a:fld id="{90ADBB8C-8191-4AEC-B0E4-021A6DCC5E88}" type="datetimeFigureOut">
               <a:rPr lang="ko-KR" altLang="en-US" smtClean="0"/>
-              <a:t>2025-10-14</a:t>
+              <a:t>2026-01-12</a:t>
             </a:fld>
             <a:endParaRPr lang="ko-KR" altLang="en-US"/>
           </a:p>
@@ -1075,7 +1074,7 @@
           <a:p>
             <a:fld id="{9A139F74-74AF-4C37-AE84-1000E0D0E51D}" type="datetimeFigureOut">
               <a:rPr lang="ko-KR" altLang="en-US" smtClean="0"/>
-              <a:t>2025-10-14</a:t>
+              <a:t>2026-01-12</a:t>
             </a:fld>
             <a:endParaRPr lang="ko-KR" altLang="en-US"/>
           </a:p>
@@ -1717,7 +1716,7 @@
           <a:p>
             <a:fld id="{FBFF74CB-B97E-448A-8613-336F71D317F5}" type="datetime1">
               <a:rPr lang="ko-KR" altLang="en-US" smtClean="0"/>
-              <a:t>2025-10-14</a:t>
+              <a:t>2026-01-12</a:t>
             </a:fld>
             <a:endParaRPr lang="ko-KR" altLang="en-US"/>
           </a:p>
@@ -2005,7 +2004,7 @@
           <a:p>
             <a:fld id="{6D5A3F2E-880D-4AB2-BE87-1DABB4D9D36B}" type="datetime1">
               <a:rPr lang="ko-KR" altLang="en-US" smtClean="0"/>
-              <a:t>2025-10-14</a:t>
+              <a:t>2026-01-12</a:t>
             </a:fld>
             <a:endParaRPr lang="ko-KR" altLang="en-US"/>
           </a:p>
@@ -2203,7 +2202,7 @@
           <a:p>
             <a:fld id="{E225792B-2F2C-46B3-9536-A6BE584A3133}" type="datetime1">
               <a:rPr lang="ko-KR" altLang="en-US" smtClean="0"/>
-              <a:t>2025-10-14</a:t>
+              <a:t>2026-01-12</a:t>
             </a:fld>
             <a:endParaRPr lang="ko-KR" altLang="en-US"/>
           </a:p>
@@ -2411,7 +2410,7 @@
           <a:p>
             <a:fld id="{B959B1C4-1FB0-4ED1-88EC-81D9419D81DC}" type="datetime1">
               <a:rPr lang="ko-KR" altLang="en-US" smtClean="0"/>
-              <a:t>2025-10-14</a:t>
+              <a:t>2026-01-12</a:t>
             </a:fld>
             <a:endParaRPr lang="ko-KR" altLang="en-US"/>
           </a:p>
@@ -2680,7 +2679,7 @@
           <a:p>
             <a:fld id="{644DB65B-E6AE-4B39-8D08-8DC3DC9B3DE6}" type="datetime1">
               <a:rPr lang="ko-KR" altLang="en-US" smtClean="0"/>
-              <a:t>2025-10-14</a:t>
+              <a:t>2026-01-12</a:t>
             </a:fld>
             <a:endParaRPr lang="ko-KR" altLang="en-US"/>
           </a:p>
@@ -2949,7 +2948,7 @@
           <a:p>
             <a:fld id="{644DB65B-E6AE-4B39-8D08-8DC3DC9B3DE6}" type="datetime1">
               <a:rPr lang="ko-KR" altLang="en-US" smtClean="0"/>
-              <a:t>2025-10-14</a:t>
+              <a:t>2026-01-12</a:t>
             </a:fld>
             <a:endParaRPr lang="ko-KR" altLang="en-US"/>
           </a:p>
@@ -3261,7 +3260,7 @@
           <a:p>
             <a:fld id="{A80E6DAD-F59F-4DF2-B36E-B1403061A098}" type="datetime1">
               <a:rPr lang="ko-KR" altLang="en-US" smtClean="0"/>
-              <a:t>2025-10-14</a:t>
+              <a:t>2026-01-12</a:t>
             </a:fld>
             <a:endParaRPr lang="ko-KR" altLang="en-US"/>
           </a:p>
@@ -3526,7 +3525,7 @@
           <a:p>
             <a:fld id="{65E7A435-D09E-4012-8A5A-CB367CE86DE7}" type="datetime1">
               <a:rPr lang="ko-KR" altLang="en-US" smtClean="0"/>
-              <a:t>2025-10-14</a:t>
+              <a:t>2026-01-12</a:t>
             </a:fld>
             <a:endParaRPr lang="ko-KR" altLang="en-US"/>
           </a:p>
@@ -3938,7 +3937,7 @@
           <a:p>
             <a:fld id="{EAEE4FE5-8155-4A7B-B9F1-1277B556A678}" type="datetime1">
               <a:rPr lang="ko-KR" altLang="en-US" smtClean="0"/>
-              <a:t>2025-10-14</a:t>
+              <a:t>2026-01-12</a:t>
             </a:fld>
             <a:endParaRPr lang="ko-KR" altLang="en-US"/>
           </a:p>
@@ -4079,7 +4078,7 @@
           <a:p>
             <a:fld id="{A5DDFFB1-F462-49A1-A952-F86898531EFC}" type="datetime1">
               <a:rPr lang="ko-KR" altLang="en-US" smtClean="0"/>
-              <a:t>2025-10-14</a:t>
+              <a:t>2026-01-12</a:t>
             </a:fld>
             <a:endParaRPr lang="ko-KR" altLang="en-US"/>
           </a:p>
@@ -4192,7 +4191,7 @@
           <a:p>
             <a:fld id="{DF307744-A7EE-42A9-B4BD-A75049B592B9}" type="datetime1">
               <a:rPr lang="ko-KR" altLang="en-US" smtClean="0"/>
-              <a:t>2025-10-14</a:t>
+              <a:t>2026-01-12</a:t>
             </a:fld>
             <a:endParaRPr lang="ko-KR" altLang="en-US"/>
           </a:p>
@@ -4503,7 +4502,7 @@
           <a:p>
             <a:fld id="{DEB58597-5F16-46FB-9810-19206F29ADC7}" type="datetime1">
               <a:rPr lang="ko-KR" altLang="en-US" smtClean="0"/>
-              <a:t>2025-10-14</a:t>
+              <a:t>2026-01-12</a:t>
             </a:fld>
             <a:endParaRPr lang="ko-KR" altLang="en-US"/>
           </a:p>
@@ -4744,7 +4743,7 @@
           <a:p>
             <a:fld id="{F9163AAC-BAFF-4F5F-9CEA-0445F100C3E2}" type="datetime1">
               <a:rPr lang="ko-KR" altLang="en-US" smtClean="0"/>
-              <a:t>2025-10-14</a:t>
+              <a:t>2026-01-12</a:t>
             </a:fld>
             <a:endParaRPr lang="ko-KR" altLang="en-US"/>
           </a:p>
@@ -5325,199 +5324,6 @@
   <p:cSld>
     <p:spTree>
       <p:nvGrpSpPr>
-        <p:cNvPr id="1" name="">
-          <a:extLst>
-            <a:ext uri="{FF2B5EF4-FFF2-40B4-BE49-F238E27FC236}">
-              <a16:creationId xmlns:a16="http://schemas.microsoft.com/office/drawing/2014/main" id="{31D2C7A6-B4F4-EF26-C3A5-025FBC77D235}"/>
-            </a:ext>
-          </a:extLst>
-        </p:cNvPr>
-        <p:cNvGrpSpPr/>
-        <p:nvPr/>
-      </p:nvGrpSpPr>
-      <p:grpSpPr>
-        <a:xfrm>
-          <a:off x="0" y="0"/>
-          <a:ext cx="0" cy="0"/>
-          <a:chOff x="0" y="0"/>
-          <a:chExt cx="0" cy="0"/>
-        </a:xfrm>
-      </p:grpSpPr>
-      <p:sp>
-        <p:nvSpPr>
-          <p:cNvPr id="2" name="텍스트 개체 틀 1">
-            <a:extLst>
-              <a:ext uri="{FF2B5EF4-FFF2-40B4-BE49-F238E27FC236}">
-                <a16:creationId xmlns:a16="http://schemas.microsoft.com/office/drawing/2014/main" id="{B208B376-0743-E8C9-E35B-BBF8AA656457}"/>
-              </a:ext>
-            </a:extLst>
-          </p:cNvPr>
-          <p:cNvSpPr>
-            <a:spLocks noGrp="1"/>
-          </p:cNvSpPr>
-          <p:nvPr>
-            <p:ph type="body" sz="quarter" idx="13"/>
-          </p:nvPr>
-        </p:nvSpPr>
-        <p:spPr>
-          <a:xfrm>
-            <a:off x="0" y="654689"/>
-            <a:ext cx="1600200" cy="2349500"/>
-          </a:xfrm>
-        </p:spPr>
-        <p:txBody>
-          <a:bodyPr/>
-          <a:lstStyle/>
-          <a:p>
-            <a:r>
-              <a:rPr lang="ko-KR" altLang="en-US" dirty="0" err="1"/>
-              <a:t>스탯</a:t>
-            </a:r>
-            <a:endParaRPr lang="en-US" altLang="ko-KR" dirty="0"/>
-          </a:p>
-          <a:p>
-            <a:r>
-              <a:rPr lang="en-US" altLang="ko-KR" dirty="0"/>
-              <a:t>FSM</a:t>
-            </a:r>
-          </a:p>
-          <a:p>
-            <a:r>
-              <a:rPr lang="ko-KR" altLang="en-US" b="1" dirty="0"/>
-              <a:t>스킬</a:t>
-            </a:r>
-          </a:p>
-        </p:txBody>
-      </p:sp>
-      <p:sp>
-        <p:nvSpPr>
-          <p:cNvPr id="3" name="제목 2">
-            <a:extLst>
-              <a:ext uri="{FF2B5EF4-FFF2-40B4-BE49-F238E27FC236}">
-                <a16:creationId xmlns:a16="http://schemas.microsoft.com/office/drawing/2014/main" id="{5BE9D689-69D2-7FB9-1E02-EA2DF933B80D}"/>
-              </a:ext>
-            </a:extLst>
-          </p:cNvPr>
-          <p:cNvSpPr>
-            <a:spLocks noGrp="1"/>
-          </p:cNvSpPr>
-          <p:nvPr>
-            <p:ph type="title"/>
-          </p:nvPr>
-        </p:nvSpPr>
-        <p:spPr>
-          <a:xfrm>
-            <a:off x="0" y="119158"/>
-            <a:ext cx="1600200" cy="535531"/>
-          </a:xfrm>
-        </p:spPr>
-        <p:txBody>
-          <a:bodyPr/>
-          <a:lstStyle/>
-          <a:p>
-            <a:r>
-              <a:rPr lang="ko-KR" altLang="en-US" dirty="0"/>
-              <a:t>거미</a:t>
-            </a:r>
-          </a:p>
-        </p:txBody>
-      </p:sp>
-      <p:sp>
-        <p:nvSpPr>
-          <p:cNvPr id="5" name="슬라이드 번호 개체 틀 4">
-            <a:extLst>
-              <a:ext uri="{FF2B5EF4-FFF2-40B4-BE49-F238E27FC236}">
-                <a16:creationId xmlns:a16="http://schemas.microsoft.com/office/drawing/2014/main" id="{9C1D64E5-28A3-6645-16F5-5F97C2E85C8A}"/>
-              </a:ext>
-            </a:extLst>
-          </p:cNvPr>
-          <p:cNvSpPr>
-            <a:spLocks noGrp="1"/>
-          </p:cNvSpPr>
-          <p:nvPr>
-            <p:ph type="sldNum" sz="quarter" idx="12"/>
-          </p:nvPr>
-        </p:nvSpPr>
-        <p:spPr/>
-        <p:txBody>
-          <a:bodyPr/>
-          <a:lstStyle/>
-          <a:p>
-            <a:fld id="{2A226FEB-661D-4181-84CB-C53DCFE1931A}" type="slidenum">
-              <a:rPr lang="ko-KR" altLang="en-US" smtClean="0"/>
-              <a:t>10</a:t>
-            </a:fld>
-            <a:endParaRPr lang="ko-KR" altLang="en-US"/>
-          </a:p>
-        </p:txBody>
-      </p:sp>
-      <p:sp>
-        <p:nvSpPr>
-          <p:cNvPr id="11" name="내용 개체 틀 10">
-            <a:extLst>
-              <a:ext uri="{FF2B5EF4-FFF2-40B4-BE49-F238E27FC236}">
-                <a16:creationId xmlns:a16="http://schemas.microsoft.com/office/drawing/2014/main" id="{161AB7A6-A663-B3DF-5EA4-62CEDB69FD83}"/>
-              </a:ext>
-            </a:extLst>
-          </p:cNvPr>
-          <p:cNvSpPr>
-            <a:spLocks noGrp="1"/>
-          </p:cNvSpPr>
-          <p:nvPr>
-            <p:ph idx="1"/>
-          </p:nvPr>
-        </p:nvSpPr>
-        <p:spPr/>
-        <p:txBody>
-          <a:bodyPr/>
-          <a:lstStyle/>
-          <a:p>
-            <a:r>
-              <a:rPr lang="ko-KR" altLang="en-US" dirty="0"/>
-              <a:t>거미 스킬</a:t>
-            </a:r>
-            <a:r>
-              <a:rPr lang="en-US" altLang="ko-KR" dirty="0"/>
-              <a:t>: </a:t>
-            </a:r>
-            <a:r>
-              <a:rPr lang="ko-KR" altLang="en-US" dirty="0"/>
-              <a:t>거미줄을 설치하여</a:t>
-            </a:r>
-            <a:r>
-              <a:rPr lang="en-US" altLang="ko-KR" dirty="0"/>
-              <a:t>, </a:t>
-            </a:r>
-            <a:r>
-              <a:rPr lang="ko-KR" altLang="en-US" dirty="0"/>
-              <a:t>거미줄이 파괴되거나 플레이어가 거미줄에 닿았을 때 이를 감지하여 추적할 수 있다</a:t>
-            </a:r>
-            <a:r>
-              <a:rPr lang="en-US" altLang="ko-KR"/>
-              <a:t>.</a:t>
-            </a:r>
-            <a:endParaRPr lang="ko-KR" altLang="en-US"/>
-          </a:p>
-        </p:txBody>
-      </p:sp>
-    </p:spTree>
-    <p:extLst>
-      <p:ext uri="{BB962C8B-B14F-4D97-AF65-F5344CB8AC3E}">
-        <p14:creationId xmlns:p14="http://schemas.microsoft.com/office/powerpoint/2010/main" val="3324608471"/>
-      </p:ext>
-    </p:extLst>
-  </p:cSld>
-  <p:clrMapOvr>
-    <a:masterClrMapping/>
-  </p:clrMapOvr>
-</p:sld>
-</file>
-
-<file path=ppt/slides/slide11.xml><?xml version="1.0" encoding="utf-8"?>
-<p:sld xmlns:a="http://schemas.openxmlformats.org/drawingml/2006/main" xmlns:r="http://schemas.openxmlformats.org/officeDocument/2006/relationships" xmlns:p="http://schemas.openxmlformats.org/presentationml/2006/main">
-  <p:cSld>
-    <p:spTree>
-      <p:nvGrpSpPr>
         <p:cNvPr id="1" name=""/>
         <p:cNvGrpSpPr/>
         <p:nvPr/>
@@ -5668,7 +5474,7 @@
           <a:p>
             <a:fld id="{2A226FEB-661D-4181-84CB-C53DCFE1931A}" type="slidenum">
               <a:rPr lang="ko-KR" altLang="en-US" smtClean="0"/>
-              <a:t>11</a:t>
+              <a:t>10</a:t>
             </a:fld>
             <a:endParaRPr lang="ko-KR" altLang="en-US"/>
           </a:p>
@@ -5774,24 +5580,6 @@
             <a:r>
               <a:rPr lang="ko-KR" altLang="en-US" dirty="0"/>
               <a:t>원거리 무기</a:t>
-            </a:r>
-            <a:endParaRPr lang="en-US" altLang="ko-KR" dirty="0"/>
-          </a:p>
-          <a:p>
-            <a:endParaRPr lang="en-US" altLang="ko-KR" sz="1800" dirty="0"/>
-          </a:p>
-          <a:p>
-            <a:r>
-              <a:rPr lang="ko-KR" altLang="en-US" dirty="0"/>
-              <a:t>플레이어</a:t>
-            </a:r>
-            <a:endParaRPr lang="en-US" altLang="ko-KR" dirty="0"/>
-          </a:p>
-          <a:p>
-            <a:pPr lvl="1"/>
-            <a:r>
-              <a:rPr lang="ko-KR" altLang="en-US" dirty="0" err="1"/>
-              <a:t>스탯</a:t>
             </a:r>
             <a:endParaRPr lang="en-US" altLang="ko-KR" dirty="0"/>
           </a:p>
@@ -7516,7 +7304,7 @@
           <p:cNvPr id="2" name="텍스트 개체 틀 1">
             <a:extLst>
               <a:ext uri="{FF2B5EF4-FFF2-40B4-BE49-F238E27FC236}">
-                <a16:creationId xmlns:a16="http://schemas.microsoft.com/office/drawing/2014/main" id="{A505DC85-97EC-3C15-BF84-A0EF7476D8A7}"/>
+                <a16:creationId xmlns:a16="http://schemas.microsoft.com/office/drawing/2014/main" id="{FAA54CC2-59AB-0E80-3695-A9D923BB04AC}"/>
               </a:ext>
             </a:extLst>
           </p:cNvPr>
@@ -7541,819 +7329,6 @@
               <a:rPr lang="ko-KR" altLang="en-US" b="1" dirty="0" err="1"/>
               <a:t>스탯</a:t>
             </a:r>
-            <a:endParaRPr lang="ko-KR" altLang="en-US" b="1" dirty="0"/>
-          </a:p>
-        </p:txBody>
-      </p:sp>
-      <p:sp>
-        <p:nvSpPr>
-          <p:cNvPr id="3" name="제목 2">
-            <a:extLst>
-              <a:ext uri="{FF2B5EF4-FFF2-40B4-BE49-F238E27FC236}">
-                <a16:creationId xmlns:a16="http://schemas.microsoft.com/office/drawing/2014/main" id="{42D5F7D5-9A32-C9CB-26C1-9174544DFC93}"/>
-              </a:ext>
-            </a:extLst>
-          </p:cNvPr>
-          <p:cNvSpPr>
-            <a:spLocks noGrp="1"/>
-          </p:cNvSpPr>
-          <p:nvPr>
-            <p:ph type="title"/>
-          </p:nvPr>
-        </p:nvSpPr>
-        <p:spPr>
-          <a:xfrm>
-            <a:off x="0" y="119158"/>
-            <a:ext cx="1892300" cy="535531"/>
-          </a:xfrm>
-        </p:spPr>
-        <p:txBody>
-          <a:bodyPr/>
-          <a:lstStyle/>
-          <a:p>
-            <a:r>
-              <a:rPr lang="ko-KR" altLang="en-US" dirty="0"/>
-              <a:t>플레이어</a:t>
-            </a:r>
-          </a:p>
-        </p:txBody>
-      </p:sp>
-      <p:sp>
-        <p:nvSpPr>
-          <p:cNvPr id="4" name="내용 개체 틀 3">
-            <a:extLst>
-              <a:ext uri="{FF2B5EF4-FFF2-40B4-BE49-F238E27FC236}">
-                <a16:creationId xmlns:a16="http://schemas.microsoft.com/office/drawing/2014/main" id="{79913FB2-72E7-61AC-16CD-8C20E73AAAEE}"/>
-              </a:ext>
-            </a:extLst>
-          </p:cNvPr>
-          <p:cNvSpPr>
-            <a:spLocks noGrp="1"/>
-          </p:cNvSpPr>
-          <p:nvPr>
-            <p:ph idx="1"/>
-          </p:nvPr>
-        </p:nvSpPr>
-        <p:spPr/>
-        <p:txBody>
-          <a:bodyPr/>
-          <a:lstStyle/>
-          <a:p>
-            <a:r>
-              <a:rPr lang="en-US" altLang="ko-KR" dirty="0"/>
-              <a:t>HP, </a:t>
-            </a:r>
-            <a:r>
-              <a:rPr lang="ko-KR" altLang="en-US" dirty="0"/>
-              <a:t>이동속도</a:t>
-            </a:r>
-            <a:r>
-              <a:rPr lang="en-US" altLang="ko-KR" dirty="0"/>
-              <a:t>, </a:t>
-            </a:r>
-            <a:r>
-              <a:rPr lang="ko-KR" altLang="en-US" dirty="0"/>
-              <a:t>공격속도</a:t>
-            </a:r>
-            <a:r>
-              <a:rPr lang="en-US" altLang="ko-KR" dirty="0"/>
-              <a:t>, </a:t>
-            </a:r>
-            <a:r>
-              <a:rPr lang="ko-KR" altLang="en-US" dirty="0"/>
-              <a:t>데미지</a:t>
-            </a:r>
-            <a:r>
-              <a:rPr lang="en-US" altLang="ko-KR" dirty="0"/>
-              <a:t>)</a:t>
-            </a:r>
-          </a:p>
-          <a:p>
-            <a:endParaRPr lang="ko-KR" altLang="en-US" dirty="0"/>
-          </a:p>
-        </p:txBody>
-      </p:sp>
-      <p:sp>
-        <p:nvSpPr>
-          <p:cNvPr id="5" name="슬라이드 번호 개체 틀 4">
-            <a:extLst>
-              <a:ext uri="{FF2B5EF4-FFF2-40B4-BE49-F238E27FC236}">
-                <a16:creationId xmlns:a16="http://schemas.microsoft.com/office/drawing/2014/main" id="{F3C4F19D-96C7-4D79-007B-A481A44F90EE}"/>
-              </a:ext>
-            </a:extLst>
-          </p:cNvPr>
-          <p:cNvSpPr>
-            <a:spLocks noGrp="1"/>
-          </p:cNvSpPr>
-          <p:nvPr>
-            <p:ph type="sldNum" sz="quarter" idx="12"/>
-          </p:nvPr>
-        </p:nvSpPr>
-        <p:spPr/>
-        <p:txBody>
-          <a:bodyPr/>
-          <a:lstStyle/>
-          <a:p>
-            <a:fld id="{2A226FEB-661D-4181-84CB-C53DCFE1931A}" type="slidenum">
-              <a:rPr lang="ko-KR" altLang="en-US" smtClean="0"/>
-              <a:t>7</a:t>
-            </a:fld>
-            <a:endParaRPr lang="ko-KR" altLang="en-US"/>
-          </a:p>
-        </p:txBody>
-      </p:sp>
-      <p:graphicFrame>
-        <p:nvGraphicFramePr>
-          <p:cNvPr id="6" name="표 5">
-            <a:extLst>
-              <a:ext uri="{FF2B5EF4-FFF2-40B4-BE49-F238E27FC236}">
-                <a16:creationId xmlns:a16="http://schemas.microsoft.com/office/drawing/2014/main" id="{DCF701A9-572B-D7F3-874E-C77C002B7781}"/>
-              </a:ext>
-            </a:extLst>
-          </p:cNvPr>
-          <p:cNvGraphicFramePr>
-            <a:graphicFrameLocks noGrp="1"/>
-          </p:cNvGraphicFramePr>
-          <p:nvPr>
-            <p:extLst>
-              <p:ext uri="{D42A27DB-BD31-4B8C-83A1-F6EECF244321}">
-                <p14:modId xmlns:p14="http://schemas.microsoft.com/office/powerpoint/2010/main" val="2001845298"/>
-              </p:ext>
-            </p:extLst>
-          </p:nvPr>
-        </p:nvGraphicFramePr>
-        <p:xfrm>
-          <a:off x="2032000" y="719666"/>
-          <a:ext cx="8807646" cy="1112520"/>
-        </p:xfrm>
-        <a:graphic>
-          <a:graphicData uri="http://schemas.openxmlformats.org/drawingml/2006/table">
-            <a:tbl>
-              <a:tblPr firstRow="1" bandRow="1">
-                <a:tableStyleId>{5C22544A-7EE6-4342-B048-85BDC9FD1C3A}</a:tableStyleId>
-              </a:tblPr>
-              <a:tblGrid>
-                <a:gridCol w="1870393">
-                  <a:extLst>
-                    <a:ext uri="{9D8B030D-6E8A-4147-A177-3AD203B41FA5}">
-                      <a16:colId xmlns:a16="http://schemas.microsoft.com/office/drawing/2014/main" val="1240864632"/>
-                    </a:ext>
-                  </a:extLst>
-                </a:gridCol>
-                <a:gridCol w="962191">
-                  <a:extLst>
-                    <a:ext uri="{9D8B030D-6E8A-4147-A177-3AD203B41FA5}">
-                      <a16:colId xmlns:a16="http://schemas.microsoft.com/office/drawing/2014/main" val="2669217487"/>
-                    </a:ext>
-                  </a:extLst>
-                </a:gridCol>
-                <a:gridCol w="5975062">
-                  <a:extLst>
-                    <a:ext uri="{9D8B030D-6E8A-4147-A177-3AD203B41FA5}">
-                      <a16:colId xmlns:a16="http://schemas.microsoft.com/office/drawing/2014/main" val="644144632"/>
-                    </a:ext>
-                  </a:extLst>
-                </a:gridCol>
-              </a:tblGrid>
-              <a:tr h="370840">
-                <a:tc>
-                  <a:txBody>
-                    <a:bodyPr/>
-                    <a:lstStyle/>
-                    <a:p>
-                      <a:pPr algn="ctr" latinLnBrk="1"/>
-                      <a:r>
-                        <a:rPr lang="ko-KR" altLang="en-US" dirty="0" err="1">
-                          <a:solidFill>
-                            <a:schemeClr val="tx1"/>
-                          </a:solidFill>
-                        </a:rPr>
-                        <a:t>스탯</a:t>
-                      </a:r>
-                      <a:endParaRPr lang="ko-KR" altLang="en-US" dirty="0">
-                        <a:solidFill>
-                          <a:schemeClr val="tx1"/>
-                        </a:solidFill>
-                      </a:endParaRPr>
-                    </a:p>
-                  </a:txBody>
-                  <a:tcPr anchor="ctr">
-                    <a:lnL w="12700" cap="flat" cmpd="sng" algn="ctr">
-                      <a:solidFill>
-                        <a:schemeClr val="tx1"/>
-                      </a:solidFill>
-                      <a:prstDash val="solid"/>
-                      <a:round/>
-                      <a:headEnd type="none" w="med" len="med"/>
-                      <a:tailEnd type="none" w="med" len="med"/>
-                    </a:lnL>
-                    <a:lnR w="12700" cap="flat" cmpd="sng" algn="ctr">
-                      <a:solidFill>
-                        <a:schemeClr val="tx1"/>
-                      </a:solidFill>
-                      <a:prstDash val="solid"/>
-                      <a:round/>
-                      <a:headEnd type="none" w="med" len="med"/>
-                      <a:tailEnd type="none" w="med" len="med"/>
-                    </a:lnR>
-                    <a:lnT w="12700" cap="flat" cmpd="sng" algn="ctr">
-                      <a:solidFill>
-                        <a:schemeClr val="tx1"/>
-                      </a:solidFill>
-                      <a:prstDash val="solid"/>
-                      <a:round/>
-                      <a:headEnd type="none" w="med" len="med"/>
-                      <a:tailEnd type="none" w="med" len="med"/>
-                    </a:lnT>
-                    <a:lnB w="12700" cap="flat" cmpd="sng" algn="ctr">
-                      <a:solidFill>
-                        <a:schemeClr val="tx1"/>
-                      </a:solidFill>
-                      <a:prstDash val="solid"/>
-                      <a:round/>
-                      <a:headEnd type="none" w="med" len="med"/>
-                      <a:tailEnd type="none" w="med" len="med"/>
-                    </a:lnB>
-                    <a:solidFill>
-                      <a:schemeClr val="bg2">
-                        <a:lumMod val="75000"/>
-                      </a:schemeClr>
-                    </a:solidFill>
-                  </a:tcPr>
-                </a:tc>
-                <a:tc>
-                  <a:txBody>
-                    <a:bodyPr/>
-                    <a:lstStyle/>
-                    <a:p>
-                      <a:pPr algn="ctr" latinLnBrk="1"/>
-                      <a:r>
-                        <a:rPr lang="ko-KR" altLang="en-US" dirty="0">
-                          <a:solidFill>
-                            <a:schemeClr val="tx1"/>
-                          </a:solidFill>
-                        </a:rPr>
-                        <a:t>값</a:t>
-                      </a:r>
-                    </a:p>
-                  </a:txBody>
-                  <a:tcPr anchor="ctr">
-                    <a:lnL w="12700" cap="flat" cmpd="sng" algn="ctr">
-                      <a:solidFill>
-                        <a:schemeClr val="tx1"/>
-                      </a:solidFill>
-                      <a:prstDash val="solid"/>
-                      <a:round/>
-                      <a:headEnd type="none" w="med" len="med"/>
-                      <a:tailEnd type="none" w="med" len="med"/>
-                    </a:lnL>
-                    <a:lnR w="12700" cap="flat" cmpd="sng" algn="ctr">
-                      <a:solidFill>
-                        <a:schemeClr val="tx1"/>
-                      </a:solidFill>
-                      <a:prstDash val="solid"/>
-                      <a:round/>
-                      <a:headEnd type="none" w="med" len="med"/>
-                      <a:tailEnd type="none" w="med" len="med"/>
-                    </a:lnR>
-                    <a:lnT w="12700" cap="flat" cmpd="sng" algn="ctr">
-                      <a:solidFill>
-                        <a:schemeClr val="tx1"/>
-                      </a:solidFill>
-                      <a:prstDash val="solid"/>
-                      <a:round/>
-                      <a:headEnd type="none" w="med" len="med"/>
-                      <a:tailEnd type="none" w="med" len="med"/>
-                    </a:lnT>
-                    <a:lnB w="12700" cap="flat" cmpd="sng" algn="ctr">
-                      <a:solidFill>
-                        <a:schemeClr val="tx1"/>
-                      </a:solidFill>
-                      <a:prstDash val="solid"/>
-                      <a:round/>
-                      <a:headEnd type="none" w="med" len="med"/>
-                      <a:tailEnd type="none" w="med" len="med"/>
-                    </a:lnB>
-                    <a:solidFill>
-                      <a:schemeClr val="bg2">
-                        <a:lumMod val="75000"/>
-                      </a:schemeClr>
-                    </a:solidFill>
-                  </a:tcPr>
-                </a:tc>
-                <a:tc>
-                  <a:txBody>
-                    <a:bodyPr/>
-                    <a:lstStyle/>
-                    <a:p>
-                      <a:pPr algn="ctr" latinLnBrk="1"/>
-                      <a:r>
-                        <a:rPr lang="ko-KR" altLang="en-US" dirty="0">
-                          <a:solidFill>
-                            <a:schemeClr val="tx1"/>
-                          </a:solidFill>
-                        </a:rPr>
-                        <a:t>설명</a:t>
-                      </a:r>
-                    </a:p>
-                  </a:txBody>
-                  <a:tcPr anchor="ctr">
-                    <a:lnL w="12700" cap="flat" cmpd="sng" algn="ctr">
-                      <a:solidFill>
-                        <a:schemeClr val="tx1"/>
-                      </a:solidFill>
-                      <a:prstDash val="solid"/>
-                      <a:round/>
-                      <a:headEnd type="none" w="med" len="med"/>
-                      <a:tailEnd type="none" w="med" len="med"/>
-                    </a:lnL>
-                    <a:lnR w="12700" cap="flat" cmpd="sng" algn="ctr">
-                      <a:solidFill>
-                        <a:schemeClr val="tx1"/>
-                      </a:solidFill>
-                      <a:prstDash val="solid"/>
-                      <a:round/>
-                      <a:headEnd type="none" w="med" len="med"/>
-                      <a:tailEnd type="none" w="med" len="med"/>
-                    </a:lnR>
-                    <a:lnT w="12700" cap="flat" cmpd="sng" algn="ctr">
-                      <a:solidFill>
-                        <a:schemeClr val="tx1"/>
-                      </a:solidFill>
-                      <a:prstDash val="solid"/>
-                      <a:round/>
-                      <a:headEnd type="none" w="med" len="med"/>
-                      <a:tailEnd type="none" w="med" len="med"/>
-                    </a:lnT>
-                    <a:lnB w="12700" cap="flat" cmpd="sng" algn="ctr">
-                      <a:solidFill>
-                        <a:schemeClr val="tx1"/>
-                      </a:solidFill>
-                      <a:prstDash val="solid"/>
-                      <a:round/>
-                      <a:headEnd type="none" w="med" len="med"/>
-                      <a:tailEnd type="none" w="med" len="med"/>
-                    </a:lnB>
-                    <a:solidFill>
-                      <a:schemeClr val="bg2">
-                        <a:lumMod val="75000"/>
-                      </a:schemeClr>
-                    </a:solidFill>
-                  </a:tcPr>
-                </a:tc>
-                <a:extLst>
-                  <a:ext uri="{0D108BD9-81ED-4DB2-BD59-A6C34878D82A}">
-                    <a16:rowId xmlns:a16="http://schemas.microsoft.com/office/drawing/2014/main" val="1862464088"/>
-                  </a:ext>
-                </a:extLst>
-              </a:tr>
-              <a:tr h="370840">
-                <a:tc>
-                  <a:txBody>
-                    <a:bodyPr/>
-                    <a:lstStyle/>
-                    <a:p>
-                      <a:pPr algn="ctr" latinLnBrk="1"/>
-                      <a:r>
-                        <a:rPr lang="en-US" altLang="ko-KR" dirty="0">
-                          <a:solidFill>
-                            <a:schemeClr val="tx1"/>
-                          </a:solidFill>
-                        </a:rPr>
-                        <a:t>HP</a:t>
-                      </a:r>
-                    </a:p>
-                  </a:txBody>
-                  <a:tcPr anchor="ctr">
-                    <a:lnL w="12700" cap="flat" cmpd="sng" algn="ctr">
-                      <a:solidFill>
-                        <a:schemeClr val="tx1"/>
-                      </a:solidFill>
-                      <a:prstDash val="solid"/>
-                      <a:round/>
-                      <a:headEnd type="none" w="med" len="med"/>
-                      <a:tailEnd type="none" w="med" len="med"/>
-                    </a:lnL>
-                    <a:lnR w="12700" cap="flat" cmpd="sng" algn="ctr">
-                      <a:solidFill>
-                        <a:schemeClr val="tx1"/>
-                      </a:solidFill>
-                      <a:prstDash val="solid"/>
-                      <a:round/>
-                      <a:headEnd type="none" w="med" len="med"/>
-                      <a:tailEnd type="none" w="med" len="med"/>
-                    </a:lnR>
-                    <a:lnT w="12700" cap="flat" cmpd="sng" algn="ctr">
-                      <a:solidFill>
-                        <a:schemeClr val="tx1"/>
-                      </a:solidFill>
-                      <a:prstDash val="solid"/>
-                      <a:round/>
-                      <a:headEnd type="none" w="med" len="med"/>
-                      <a:tailEnd type="none" w="med" len="med"/>
-                    </a:lnT>
-                    <a:lnB w="12700" cap="flat" cmpd="sng" algn="ctr">
-                      <a:solidFill>
-                        <a:schemeClr val="tx1"/>
-                      </a:solidFill>
-                      <a:prstDash val="solid"/>
-                      <a:round/>
-                      <a:headEnd type="none" w="med" len="med"/>
-                      <a:tailEnd type="none" w="med" len="med"/>
-                    </a:lnB>
-                    <a:solidFill>
-                      <a:schemeClr val="bg2">
-                        <a:lumMod val="90000"/>
-                      </a:schemeClr>
-                    </a:solidFill>
-                  </a:tcPr>
-                </a:tc>
-                <a:tc>
-                  <a:txBody>
-                    <a:bodyPr/>
-                    <a:lstStyle/>
-                    <a:p>
-                      <a:pPr algn="ctr" latinLnBrk="1"/>
-                      <a:r>
-                        <a:rPr lang="en-US" altLang="ko-KR" dirty="0">
-                          <a:solidFill>
-                            <a:schemeClr val="tx1"/>
-                          </a:solidFill>
-                        </a:rPr>
-                        <a:t>100</a:t>
-                      </a:r>
-                      <a:endParaRPr lang="ko-KR" altLang="en-US" dirty="0">
-                        <a:solidFill>
-                          <a:schemeClr val="tx1"/>
-                        </a:solidFill>
-                      </a:endParaRPr>
-                    </a:p>
-                  </a:txBody>
-                  <a:tcPr anchor="ctr">
-                    <a:lnL w="12700" cap="flat" cmpd="sng" algn="ctr">
-                      <a:solidFill>
-                        <a:schemeClr val="tx1"/>
-                      </a:solidFill>
-                      <a:prstDash val="solid"/>
-                      <a:round/>
-                      <a:headEnd type="none" w="med" len="med"/>
-                      <a:tailEnd type="none" w="med" len="med"/>
-                    </a:lnL>
-                    <a:lnR w="12700" cap="flat" cmpd="sng" algn="ctr">
-                      <a:solidFill>
-                        <a:schemeClr val="tx1"/>
-                      </a:solidFill>
-                      <a:prstDash val="solid"/>
-                      <a:round/>
-                      <a:headEnd type="none" w="med" len="med"/>
-                      <a:tailEnd type="none" w="med" len="med"/>
-                    </a:lnR>
-                    <a:lnT w="12700" cap="flat" cmpd="sng" algn="ctr">
-                      <a:solidFill>
-                        <a:schemeClr val="tx1"/>
-                      </a:solidFill>
-                      <a:prstDash val="solid"/>
-                      <a:round/>
-                      <a:headEnd type="none" w="med" len="med"/>
-                      <a:tailEnd type="none" w="med" len="med"/>
-                    </a:lnT>
-                    <a:lnB w="12700" cap="flat" cmpd="sng" algn="ctr">
-                      <a:solidFill>
-                        <a:schemeClr val="tx1"/>
-                      </a:solidFill>
-                      <a:prstDash val="solid"/>
-                      <a:round/>
-                      <a:headEnd type="none" w="med" len="med"/>
-                      <a:tailEnd type="none" w="med" len="med"/>
-                    </a:lnB>
-                    <a:solidFill>
-                      <a:schemeClr val="bg1"/>
-                    </a:solidFill>
-                  </a:tcPr>
-                </a:tc>
-                <a:tc>
-                  <a:txBody>
-                    <a:bodyPr/>
-                    <a:lstStyle/>
-                    <a:p>
-                      <a:pPr algn="l" latinLnBrk="1"/>
-                      <a:endParaRPr lang="ko-KR" altLang="en-US" dirty="0">
-                        <a:solidFill>
-                          <a:schemeClr val="tx1"/>
-                        </a:solidFill>
-                      </a:endParaRPr>
-                    </a:p>
-                  </a:txBody>
-                  <a:tcPr anchor="ctr">
-                    <a:lnL w="12700" cap="flat" cmpd="sng" algn="ctr">
-                      <a:solidFill>
-                        <a:schemeClr val="tx1"/>
-                      </a:solidFill>
-                      <a:prstDash val="solid"/>
-                      <a:round/>
-                      <a:headEnd type="none" w="med" len="med"/>
-                      <a:tailEnd type="none" w="med" len="med"/>
-                    </a:lnL>
-                    <a:lnR w="12700" cap="flat" cmpd="sng" algn="ctr">
-                      <a:solidFill>
-                        <a:schemeClr val="tx1"/>
-                      </a:solidFill>
-                      <a:prstDash val="solid"/>
-                      <a:round/>
-                      <a:headEnd type="none" w="med" len="med"/>
-                      <a:tailEnd type="none" w="med" len="med"/>
-                    </a:lnR>
-                    <a:lnT w="12700" cap="flat" cmpd="sng" algn="ctr">
-                      <a:solidFill>
-                        <a:schemeClr val="tx1"/>
-                      </a:solidFill>
-                      <a:prstDash val="solid"/>
-                      <a:round/>
-                      <a:headEnd type="none" w="med" len="med"/>
-                      <a:tailEnd type="none" w="med" len="med"/>
-                    </a:lnT>
-                    <a:lnB w="12700" cap="flat" cmpd="sng" algn="ctr">
-                      <a:solidFill>
-                        <a:schemeClr val="tx1"/>
-                      </a:solidFill>
-                      <a:prstDash val="solid"/>
-                      <a:round/>
-                      <a:headEnd type="none" w="med" len="med"/>
-                      <a:tailEnd type="none" w="med" len="med"/>
-                    </a:lnB>
-                    <a:solidFill>
-                      <a:schemeClr val="bg1"/>
-                    </a:solidFill>
-                  </a:tcPr>
-                </a:tc>
-                <a:extLst>
-                  <a:ext uri="{0D108BD9-81ED-4DB2-BD59-A6C34878D82A}">
-                    <a16:rowId xmlns:a16="http://schemas.microsoft.com/office/drawing/2014/main" val="992783964"/>
-                  </a:ext>
-                </a:extLst>
-              </a:tr>
-              <a:tr h="370840">
-                <a:tc>
-                  <a:txBody>
-                    <a:bodyPr/>
-                    <a:lstStyle/>
-                    <a:p>
-                      <a:pPr algn="ctr" latinLnBrk="1"/>
-                      <a:r>
-                        <a:rPr lang="ko-KR" altLang="en-US" dirty="0">
-                          <a:solidFill>
-                            <a:schemeClr val="tx1"/>
-                          </a:solidFill>
-                        </a:rPr>
-                        <a:t>이동 속도 </a:t>
-                      </a:r>
-                      <a:r>
-                        <a:rPr lang="en-US" altLang="ko-KR" dirty="0">
-                          <a:solidFill>
-                            <a:schemeClr val="tx1"/>
-                          </a:solidFill>
-                        </a:rPr>
-                        <a:t>(m/s)</a:t>
-                      </a:r>
-                      <a:endParaRPr lang="ko-KR" altLang="en-US" dirty="0">
-                        <a:solidFill>
-                          <a:schemeClr val="tx1"/>
-                        </a:solidFill>
-                      </a:endParaRPr>
-                    </a:p>
-                  </a:txBody>
-                  <a:tcPr anchor="ctr">
-                    <a:lnL w="12700" cap="flat" cmpd="sng" algn="ctr">
-                      <a:solidFill>
-                        <a:schemeClr val="tx1"/>
-                      </a:solidFill>
-                      <a:prstDash val="solid"/>
-                      <a:round/>
-                      <a:headEnd type="none" w="med" len="med"/>
-                      <a:tailEnd type="none" w="med" len="med"/>
-                    </a:lnL>
-                    <a:lnR w="12700" cap="flat" cmpd="sng" algn="ctr">
-                      <a:solidFill>
-                        <a:schemeClr val="tx1"/>
-                      </a:solidFill>
-                      <a:prstDash val="solid"/>
-                      <a:round/>
-                      <a:headEnd type="none" w="med" len="med"/>
-                      <a:tailEnd type="none" w="med" len="med"/>
-                    </a:lnR>
-                    <a:lnT w="12700" cap="flat" cmpd="sng" algn="ctr">
-                      <a:solidFill>
-                        <a:schemeClr val="tx1"/>
-                      </a:solidFill>
-                      <a:prstDash val="solid"/>
-                      <a:round/>
-                      <a:headEnd type="none" w="med" len="med"/>
-                      <a:tailEnd type="none" w="med" len="med"/>
-                    </a:lnT>
-                    <a:lnB w="12700" cap="flat" cmpd="sng" algn="ctr">
-                      <a:solidFill>
-                        <a:schemeClr val="tx1"/>
-                      </a:solidFill>
-                      <a:prstDash val="solid"/>
-                      <a:round/>
-                      <a:headEnd type="none" w="med" len="med"/>
-                      <a:tailEnd type="none" w="med" len="med"/>
-                    </a:lnB>
-                    <a:solidFill>
-                      <a:schemeClr val="bg2">
-                        <a:lumMod val="90000"/>
-                      </a:schemeClr>
-                    </a:solidFill>
-                  </a:tcPr>
-                </a:tc>
-                <a:tc>
-                  <a:txBody>
-                    <a:bodyPr/>
-                    <a:lstStyle/>
-                    <a:p>
-                      <a:pPr algn="ctr" latinLnBrk="1"/>
-                      <a:r>
-                        <a:rPr lang="en-US" altLang="ko-KR" dirty="0">
-                          <a:solidFill>
-                            <a:schemeClr val="tx1"/>
-                          </a:solidFill>
-                        </a:rPr>
-                        <a:t>5</a:t>
-                      </a:r>
-                      <a:endParaRPr lang="ko-KR" altLang="en-US" dirty="0">
-                        <a:solidFill>
-                          <a:schemeClr val="tx1"/>
-                        </a:solidFill>
-                      </a:endParaRPr>
-                    </a:p>
-                  </a:txBody>
-                  <a:tcPr anchor="ctr">
-                    <a:lnL w="12700" cap="flat" cmpd="sng" algn="ctr">
-                      <a:solidFill>
-                        <a:schemeClr val="tx1"/>
-                      </a:solidFill>
-                      <a:prstDash val="solid"/>
-                      <a:round/>
-                      <a:headEnd type="none" w="med" len="med"/>
-                      <a:tailEnd type="none" w="med" len="med"/>
-                    </a:lnL>
-                    <a:lnR w="12700" cap="flat" cmpd="sng" algn="ctr">
-                      <a:solidFill>
-                        <a:schemeClr val="tx1"/>
-                      </a:solidFill>
-                      <a:prstDash val="solid"/>
-                      <a:round/>
-                      <a:headEnd type="none" w="med" len="med"/>
-                      <a:tailEnd type="none" w="med" len="med"/>
-                    </a:lnR>
-                    <a:lnT w="12700" cap="flat" cmpd="sng" algn="ctr">
-                      <a:solidFill>
-                        <a:schemeClr val="tx1"/>
-                      </a:solidFill>
-                      <a:prstDash val="solid"/>
-                      <a:round/>
-                      <a:headEnd type="none" w="med" len="med"/>
-                      <a:tailEnd type="none" w="med" len="med"/>
-                    </a:lnT>
-                    <a:lnB w="12700" cap="flat" cmpd="sng" algn="ctr">
-                      <a:solidFill>
-                        <a:schemeClr val="tx1"/>
-                      </a:solidFill>
-                      <a:prstDash val="solid"/>
-                      <a:round/>
-                      <a:headEnd type="none" w="med" len="med"/>
-                      <a:tailEnd type="none" w="med" len="med"/>
-                    </a:lnB>
-                    <a:solidFill>
-                      <a:schemeClr val="bg1"/>
-                    </a:solidFill>
-                  </a:tcPr>
-                </a:tc>
-                <a:tc>
-                  <a:txBody>
-                    <a:bodyPr/>
-                    <a:lstStyle/>
-                    <a:p>
-                      <a:pPr algn="l" latinLnBrk="1"/>
-                      <a:endParaRPr lang="ko-KR" altLang="en-US" dirty="0">
-                        <a:solidFill>
-                          <a:schemeClr val="tx1"/>
-                        </a:solidFill>
-                      </a:endParaRPr>
-                    </a:p>
-                  </a:txBody>
-                  <a:tcPr anchor="ctr">
-                    <a:lnL w="12700" cap="flat" cmpd="sng" algn="ctr">
-                      <a:solidFill>
-                        <a:schemeClr val="tx1"/>
-                      </a:solidFill>
-                      <a:prstDash val="solid"/>
-                      <a:round/>
-                      <a:headEnd type="none" w="med" len="med"/>
-                      <a:tailEnd type="none" w="med" len="med"/>
-                    </a:lnL>
-                    <a:lnR w="12700" cap="flat" cmpd="sng" algn="ctr">
-                      <a:solidFill>
-                        <a:schemeClr val="tx1"/>
-                      </a:solidFill>
-                      <a:prstDash val="solid"/>
-                      <a:round/>
-                      <a:headEnd type="none" w="med" len="med"/>
-                      <a:tailEnd type="none" w="med" len="med"/>
-                    </a:lnR>
-                    <a:lnT w="12700" cap="flat" cmpd="sng" algn="ctr">
-                      <a:solidFill>
-                        <a:schemeClr val="tx1"/>
-                      </a:solidFill>
-                      <a:prstDash val="solid"/>
-                      <a:round/>
-                      <a:headEnd type="none" w="med" len="med"/>
-                      <a:tailEnd type="none" w="med" len="med"/>
-                    </a:lnT>
-                    <a:lnB w="12700" cap="flat" cmpd="sng" algn="ctr">
-                      <a:solidFill>
-                        <a:schemeClr val="tx1"/>
-                      </a:solidFill>
-                      <a:prstDash val="solid"/>
-                      <a:round/>
-                      <a:headEnd type="none" w="med" len="med"/>
-                      <a:tailEnd type="none" w="med" len="med"/>
-                    </a:lnB>
-                    <a:solidFill>
-                      <a:schemeClr val="bg1"/>
-                    </a:solidFill>
-                  </a:tcPr>
-                </a:tc>
-                <a:extLst>
-                  <a:ext uri="{0D108BD9-81ED-4DB2-BD59-A6C34878D82A}">
-                    <a16:rowId xmlns:a16="http://schemas.microsoft.com/office/drawing/2014/main" val="4165556141"/>
-                  </a:ext>
-                </a:extLst>
-              </a:tr>
-            </a:tbl>
-          </a:graphicData>
-        </a:graphic>
-      </p:graphicFrame>
-    </p:spTree>
-    <p:extLst>
-      <p:ext uri="{BB962C8B-B14F-4D97-AF65-F5344CB8AC3E}">
-        <p14:creationId xmlns:p14="http://schemas.microsoft.com/office/powerpoint/2010/main" val="3387152185"/>
-      </p:ext>
-    </p:extLst>
-  </p:cSld>
-  <p:clrMapOvr>
-    <a:masterClrMapping/>
-  </p:clrMapOvr>
-</p:sld>
-</file>
-
-<file path=ppt/slides/slide8.xml><?xml version="1.0" encoding="utf-8"?>
-<p:sld xmlns:a="http://schemas.openxmlformats.org/drawingml/2006/main" xmlns:r="http://schemas.openxmlformats.org/officeDocument/2006/relationships" xmlns:p="http://schemas.openxmlformats.org/presentationml/2006/main">
-  <p:cSld>
-    <p:spTree>
-      <p:nvGrpSpPr>
-        <p:cNvPr id="1" name=""/>
-        <p:cNvGrpSpPr/>
-        <p:nvPr/>
-      </p:nvGrpSpPr>
-      <p:grpSpPr>
-        <a:xfrm>
-          <a:off x="0" y="0"/>
-          <a:ext cx="0" cy="0"/>
-          <a:chOff x="0" y="0"/>
-          <a:chExt cx="0" cy="0"/>
-        </a:xfrm>
-      </p:grpSpPr>
-      <p:sp>
-        <p:nvSpPr>
-          <p:cNvPr id="2" name="텍스트 개체 틀 1">
-            <a:extLst>
-              <a:ext uri="{FF2B5EF4-FFF2-40B4-BE49-F238E27FC236}">
-                <a16:creationId xmlns:a16="http://schemas.microsoft.com/office/drawing/2014/main" id="{FAA54CC2-59AB-0E80-3695-A9D923BB04AC}"/>
-              </a:ext>
-            </a:extLst>
-          </p:cNvPr>
-          <p:cNvSpPr>
-            <a:spLocks noGrp="1"/>
-          </p:cNvSpPr>
-          <p:nvPr>
-            <p:ph type="body" sz="quarter" idx="13"/>
-          </p:nvPr>
-        </p:nvSpPr>
-        <p:spPr>
-          <a:xfrm>
-            <a:off x="0" y="654689"/>
-            <a:ext cx="1600200" cy="2349500"/>
-          </a:xfrm>
-        </p:spPr>
-        <p:txBody>
-          <a:bodyPr/>
-          <a:lstStyle/>
-          <a:p>
-            <a:r>
-              <a:rPr lang="ko-KR" altLang="en-US" b="1" dirty="0" err="1"/>
-              <a:t>스탯</a:t>
-            </a:r>
             <a:endParaRPr lang="en-US" altLang="ko-KR" b="1" dirty="0"/>
           </a:p>
           <a:p>
@@ -8497,7 +7472,7 @@
           <a:p>
             <a:fld id="{2A226FEB-661D-4181-84CB-C53DCFE1931A}" type="slidenum">
               <a:rPr lang="ko-KR" altLang="en-US" smtClean="0"/>
-              <a:t>8</a:t>
+              <a:t>7</a:t>
             </a:fld>
             <a:endParaRPr lang="ko-KR" altLang="en-US"/>
           </a:p>
@@ -10682,7 +9657,7 @@
 </p:sld>
 </file>
 
-<file path=ppt/slides/slide9.xml><?xml version="1.0" encoding="utf-8"?>
+<file path=ppt/slides/slide8.xml><?xml version="1.0" encoding="utf-8"?>
 <p:sld xmlns:a="http://schemas.openxmlformats.org/drawingml/2006/main" xmlns:r="http://schemas.openxmlformats.org/officeDocument/2006/relationships" xmlns:p="http://schemas.openxmlformats.org/presentationml/2006/main">
   <p:cSld>
     <p:spTree>
@@ -10878,7 +9853,7 @@
           <a:p>
             <a:fld id="{2A226FEB-661D-4181-84CB-C53DCFE1931A}" type="slidenum">
               <a:rPr lang="ko-KR" altLang="en-US" smtClean="0"/>
-              <a:t>9</a:t>
+              <a:t>8</a:t>
             </a:fld>
             <a:endParaRPr lang="ko-KR" altLang="en-US"/>
           </a:p>
@@ -10924,6 +9899,199 @@
     <p:extLst>
       <p:ext uri="{BB962C8B-B14F-4D97-AF65-F5344CB8AC3E}">
         <p14:creationId xmlns:p14="http://schemas.microsoft.com/office/powerpoint/2010/main" val="3756870264"/>
+      </p:ext>
+    </p:extLst>
+  </p:cSld>
+  <p:clrMapOvr>
+    <a:masterClrMapping/>
+  </p:clrMapOvr>
+</p:sld>
+</file>
+
+<file path=ppt/slides/slide9.xml><?xml version="1.0" encoding="utf-8"?>
+<p:sld xmlns:a="http://schemas.openxmlformats.org/drawingml/2006/main" xmlns:r="http://schemas.openxmlformats.org/officeDocument/2006/relationships" xmlns:p="http://schemas.openxmlformats.org/presentationml/2006/main">
+  <p:cSld>
+    <p:spTree>
+      <p:nvGrpSpPr>
+        <p:cNvPr id="1" name="">
+          <a:extLst>
+            <a:ext uri="{FF2B5EF4-FFF2-40B4-BE49-F238E27FC236}">
+              <a16:creationId xmlns:a16="http://schemas.microsoft.com/office/drawing/2014/main" id="{31D2C7A6-B4F4-EF26-C3A5-025FBC77D235}"/>
+            </a:ext>
+          </a:extLst>
+        </p:cNvPr>
+        <p:cNvGrpSpPr/>
+        <p:nvPr/>
+      </p:nvGrpSpPr>
+      <p:grpSpPr>
+        <a:xfrm>
+          <a:off x="0" y="0"/>
+          <a:ext cx="0" cy="0"/>
+          <a:chOff x="0" y="0"/>
+          <a:chExt cx="0" cy="0"/>
+        </a:xfrm>
+      </p:grpSpPr>
+      <p:sp>
+        <p:nvSpPr>
+          <p:cNvPr id="2" name="텍스트 개체 틀 1">
+            <a:extLst>
+              <a:ext uri="{FF2B5EF4-FFF2-40B4-BE49-F238E27FC236}">
+                <a16:creationId xmlns:a16="http://schemas.microsoft.com/office/drawing/2014/main" id="{B208B376-0743-E8C9-E35B-BBF8AA656457}"/>
+              </a:ext>
+            </a:extLst>
+          </p:cNvPr>
+          <p:cNvSpPr>
+            <a:spLocks noGrp="1"/>
+          </p:cNvSpPr>
+          <p:nvPr>
+            <p:ph type="body" sz="quarter" idx="13"/>
+          </p:nvPr>
+        </p:nvSpPr>
+        <p:spPr>
+          <a:xfrm>
+            <a:off x="0" y="654689"/>
+            <a:ext cx="1600200" cy="2349500"/>
+          </a:xfrm>
+        </p:spPr>
+        <p:txBody>
+          <a:bodyPr/>
+          <a:lstStyle/>
+          <a:p>
+            <a:r>
+              <a:rPr lang="ko-KR" altLang="en-US" dirty="0" err="1"/>
+              <a:t>스탯</a:t>
+            </a:r>
+            <a:endParaRPr lang="en-US" altLang="ko-KR" dirty="0"/>
+          </a:p>
+          <a:p>
+            <a:r>
+              <a:rPr lang="en-US" altLang="ko-KR" dirty="0"/>
+              <a:t>FSM</a:t>
+            </a:r>
+          </a:p>
+          <a:p>
+            <a:r>
+              <a:rPr lang="ko-KR" altLang="en-US" b="1" dirty="0"/>
+              <a:t>스킬</a:t>
+            </a:r>
+          </a:p>
+        </p:txBody>
+      </p:sp>
+      <p:sp>
+        <p:nvSpPr>
+          <p:cNvPr id="3" name="제목 2">
+            <a:extLst>
+              <a:ext uri="{FF2B5EF4-FFF2-40B4-BE49-F238E27FC236}">
+                <a16:creationId xmlns:a16="http://schemas.microsoft.com/office/drawing/2014/main" id="{5BE9D689-69D2-7FB9-1E02-EA2DF933B80D}"/>
+              </a:ext>
+            </a:extLst>
+          </p:cNvPr>
+          <p:cNvSpPr>
+            <a:spLocks noGrp="1"/>
+          </p:cNvSpPr>
+          <p:nvPr>
+            <p:ph type="title"/>
+          </p:nvPr>
+        </p:nvSpPr>
+        <p:spPr>
+          <a:xfrm>
+            <a:off x="0" y="119158"/>
+            <a:ext cx="1600200" cy="535531"/>
+          </a:xfrm>
+        </p:spPr>
+        <p:txBody>
+          <a:bodyPr/>
+          <a:lstStyle/>
+          <a:p>
+            <a:r>
+              <a:rPr lang="ko-KR" altLang="en-US" dirty="0"/>
+              <a:t>거미</a:t>
+            </a:r>
+          </a:p>
+        </p:txBody>
+      </p:sp>
+      <p:sp>
+        <p:nvSpPr>
+          <p:cNvPr id="5" name="슬라이드 번호 개체 틀 4">
+            <a:extLst>
+              <a:ext uri="{FF2B5EF4-FFF2-40B4-BE49-F238E27FC236}">
+                <a16:creationId xmlns:a16="http://schemas.microsoft.com/office/drawing/2014/main" id="{9C1D64E5-28A3-6645-16F5-5F97C2E85C8A}"/>
+              </a:ext>
+            </a:extLst>
+          </p:cNvPr>
+          <p:cNvSpPr>
+            <a:spLocks noGrp="1"/>
+          </p:cNvSpPr>
+          <p:nvPr>
+            <p:ph type="sldNum" sz="quarter" idx="12"/>
+          </p:nvPr>
+        </p:nvSpPr>
+        <p:spPr/>
+        <p:txBody>
+          <a:bodyPr/>
+          <a:lstStyle/>
+          <a:p>
+            <a:fld id="{2A226FEB-661D-4181-84CB-C53DCFE1931A}" type="slidenum">
+              <a:rPr lang="ko-KR" altLang="en-US" smtClean="0"/>
+              <a:t>9</a:t>
+            </a:fld>
+            <a:endParaRPr lang="ko-KR" altLang="en-US"/>
+          </a:p>
+        </p:txBody>
+      </p:sp>
+      <p:sp>
+        <p:nvSpPr>
+          <p:cNvPr id="11" name="내용 개체 틀 10">
+            <a:extLst>
+              <a:ext uri="{FF2B5EF4-FFF2-40B4-BE49-F238E27FC236}">
+                <a16:creationId xmlns:a16="http://schemas.microsoft.com/office/drawing/2014/main" id="{161AB7A6-A663-B3DF-5EA4-62CEDB69FD83}"/>
+              </a:ext>
+            </a:extLst>
+          </p:cNvPr>
+          <p:cNvSpPr>
+            <a:spLocks noGrp="1"/>
+          </p:cNvSpPr>
+          <p:nvPr>
+            <p:ph idx="1"/>
+          </p:nvPr>
+        </p:nvSpPr>
+        <p:spPr/>
+        <p:txBody>
+          <a:bodyPr/>
+          <a:lstStyle/>
+          <a:p>
+            <a:r>
+              <a:rPr lang="ko-KR" altLang="en-US" dirty="0"/>
+              <a:t>거미 스킬</a:t>
+            </a:r>
+            <a:r>
+              <a:rPr lang="en-US" altLang="ko-KR" dirty="0"/>
+              <a:t>: </a:t>
+            </a:r>
+            <a:r>
+              <a:rPr lang="ko-KR" altLang="en-US" dirty="0"/>
+              <a:t>거미줄을 설치하여</a:t>
+            </a:r>
+            <a:r>
+              <a:rPr lang="en-US" altLang="ko-KR" dirty="0"/>
+              <a:t>, </a:t>
+            </a:r>
+            <a:r>
+              <a:rPr lang="ko-KR" altLang="en-US" dirty="0"/>
+              <a:t>거미줄이 파괴되거나 플레이어가 거미줄에 닿았을 때 이를 감지하여 추적할 수 있다</a:t>
+            </a:r>
+            <a:r>
+              <a:rPr lang="en-US" altLang="ko-KR"/>
+              <a:t>.</a:t>
+            </a:r>
+            <a:endParaRPr lang="ko-KR" altLang="en-US"/>
+          </a:p>
+        </p:txBody>
+      </p:sp>
+    </p:spTree>
+    <p:extLst>
+      <p:ext uri="{BB962C8B-B14F-4D97-AF65-F5344CB8AC3E}">
+        <p14:creationId xmlns:p14="http://schemas.microsoft.com/office/powerpoint/2010/main" val="3324608471"/>
       </p:ext>
     </p:extLst>
   </p:cSld>
